--- a/_implementation-notes/evening-series/FotH Evening Session 2 Slides DRAFT v1.pptx
+++ b/_implementation-notes/evening-series/FotH Evening Session 2 Slides DRAFT v1.pptx
@@ -10,6 +10,7 @@
   <p:sldIdLst>
     <p:sldId id="256" r:id="rId2"/>
     <p:sldId id="261" r:id="rId22"/>
+    <p:sldId id="526" r:id="rId21"/>
     <p:sldId id="262" r:id="rId23"/>
     <p:sldId id="335" r:id="rId24"/>
     <p:sldId id="336" r:id="rId25"/>
@@ -19,7 +20,8 @@
     <p:sldId id="338" r:id="rId29"/>
     <p:sldId id="339" r:id="rId30"/>
     <p:sldId id="340" r:id="rId31"/>
-    <p:sldId id="525" r:id="rId32"/>
+    <p:sldId id="527" r:id="rId20"/>
+    <p:sldId id="528" r:id="rId19"/>
     <p:sldId id="341" r:id="rId33"/>
     <p:sldId id="342" r:id="rId34"/>
   </p:sldIdLst>
@@ -751,6 +753,214 @@
 </p:notes>
 </file>
 
+<file path=ppt/notesSlides/notesSlide15.xml><?xml version="1.0" encoding="utf-8"?>
+<p:notes xmlns:a="http://schemas.openxmlformats.org/drawingml/2006/main" xmlns:p="http://schemas.openxmlformats.org/presentationml/2006/main" xmlns:r="http://schemas.openxmlformats.org/officeDocument/2006/relationships">
+  <p:cSld>
+    <p:spTree>
+      <p:nvGrpSpPr>
+        <p:cNvPr id="1" name=""/>
+        <p:cNvGrpSpPr/>
+        <p:nvPr/>
+      </p:nvGrpSpPr>
+      <p:grpSpPr>
+        <a:xfrm>
+          <a:off x="0" y="0"/>
+          <a:ext cx="0" cy="0"/>
+          <a:chOff x="0" y="0"/>
+          <a:chExt cx="0" cy="0"/>
+        </a:xfrm>
+      </p:grpSpPr>
+      <p:sp>
+        <p:nvSpPr>
+          <p:cNvPr id="2" name="Notes Placeholder 1"/>
+          <p:cNvSpPr>
+            <a:spLocks noGrp="1"/>
+          </p:cNvSpPr>
+          <p:nvPr>
+            <p:ph type="body" idx="1"/>
+          </p:nvPr>
+        </p:nvSpPr>
+        <p:spPr/>
+        <p:txBody>
+          <a:bodyPr/>
+          <a:lstStyle/>
+          <a:p>
+            <a:r>
+              <a:t>S2 · WELCOME · LEAD: CONTAINER HOLDER · GROUNDING — every session opens on this map</a:t>
+            </a:r>
+          </a:p>
+          <a:p>
+            <a:r>
+              <a:t>BEATS:</a:t>
+            </a:r>
+          </a:p>
+          <a:p>
+            <a:r>
+              <a:t>1. Locate tonight on the map, plainly: Session 2 stands in the first box — Connect with Self. Each connection makes the next one real (Matt. 22:37–40).</a:t>
+            </a:r>
+          </a:p>
+          <a:p>
+            <a:r>
+              <a:t>2. The four boxes are one journey — each connection makes the next one real — rooted in the two great commandments: love God, love neighbor (Matt 22:37–40).</a:t>
+            </a:r>
+          </a:p>
+          <a:p>
+            <a:r>
+              <a:t>3. This is also the 'where we are on the map' minute the welcome owes any newcomer.</a:t>
+            </a:r>
+          </a:p>
+          <a:p>
+            <a:r>
+              <a:t>CUES: Two minutes at most; then tonight's road.</a:t>
+            </a:r>
+          </a:p>
+        </p:txBody>
+      </p:sp>
+    </p:spTree>
+  </p:cSld>
+  <p:clrMapOvr>
+    <a:masterClrMapping/>
+  </p:clrMapOvr>
+</p:notes>
+</file>
+
+<file path=ppt/notesSlides/notesSlide16.xml><?xml version="1.0" encoding="utf-8"?>
+<p:notes xmlns:a="http://schemas.openxmlformats.org/drawingml/2006/main" xmlns:p="http://schemas.openxmlformats.org/presentationml/2006/main" xmlns:r="http://schemas.openxmlformats.org/officeDocument/2006/relationships">
+  <p:cSld>
+    <p:spTree>
+      <p:nvGrpSpPr>
+        <p:cNvPr id="1" name=""/>
+        <p:cNvGrpSpPr/>
+        <p:nvPr/>
+      </p:nvGrpSpPr>
+      <p:grpSpPr>
+        <a:xfrm>
+          <a:off x="0" y="0"/>
+          <a:ext cx="0" cy="0"/>
+          <a:chOff x="0" y="0"/>
+          <a:chExt cx="0" cy="0"/>
+        </a:xfrm>
+      </p:grpSpPr>
+      <p:sp>
+        <p:nvSpPr>
+          <p:cNvPr id="2" name="Notes Placeholder 1"/>
+          <p:cNvSpPr>
+            <a:spLocks noGrp="1"/>
+          </p:cNvSpPr>
+          <p:nvPr>
+            <p:ph type="body" idx="1"/>
+          </p:nvPr>
+        </p:nvSpPr>
+        <p:spPr/>
+        <p:txBody>
+          <a:bodyPr/>
+          <a:lstStyle/>
+          <a:p>
+            <a:r>
+              <a:t>S2 · COMMISSIONING · LEAD: CONTENT PRESENTER</a:t>
+            </a:r>
+          </a:p>
+          <a:p>
+            <a:r>
+              <a:t>BEATS:</a:t>
+            </a:r>
+          </a:p>
+          <a:p>
+            <a:r>
+              <a:t>1. The sheet on the screen is the sheet in their hands — walk it, don't read it.</a:t>
+            </a:r>
+          </a:p>
+          <a:p>
+            <a:r>
+              <a:t>2. The standing rhythm first: the morning question, the evening journal line — one box per day on the week-grids.</a:t>
+            </a:r>
+          </a:p>
+          <a:p>
+            <a:r>
+              <a:t>3. A missed box is never a failure — it is an invitation to return.</a:t>
+            </a:r>
+          </a:p>
+          <a:p>
+            <a:r>
+              <a:t>CUES: The four parts are the next slide.</a:t>
+            </a:r>
+          </a:p>
+        </p:txBody>
+      </p:sp>
+    </p:spTree>
+  </p:cSld>
+  <p:clrMapOvr>
+    <a:masterClrMapping/>
+  </p:clrMapOvr>
+</p:notes>
+</file>
+
+<file path=ppt/notesSlides/notesSlide17.xml><?xml version="1.0" encoding="utf-8"?>
+<p:notes xmlns:a="http://schemas.openxmlformats.org/drawingml/2006/main" xmlns:p="http://schemas.openxmlformats.org/presentationml/2006/main" xmlns:r="http://schemas.openxmlformats.org/officeDocument/2006/relationships">
+  <p:cSld>
+    <p:spTree>
+      <p:nvGrpSpPr>
+        <p:cNvPr id="1" name=""/>
+        <p:cNvGrpSpPr/>
+        <p:nvPr/>
+      </p:nvGrpSpPr>
+      <p:grpSpPr>
+        <a:xfrm>
+          <a:off x="0" y="0"/>
+          <a:ext cx="0" cy="0"/>
+          <a:chOff x="0" y="0"/>
+          <a:chExt cx="0" cy="0"/>
+        </a:xfrm>
+      </p:grpSpPr>
+      <p:sp>
+        <p:nvSpPr>
+          <p:cNvPr id="2" name="Notes Placeholder 1"/>
+          <p:cNvSpPr>
+            <a:spLocks noGrp="1"/>
+          </p:cNvSpPr>
+          <p:nvPr>
+            <p:ph type="body" idx="1"/>
+          </p:nvPr>
+        </p:nvSpPr>
+        <p:spPr/>
+        <p:txBody>
+          <a:bodyPr/>
+          <a:lstStyle/>
+          <a:p>
+            <a:r>
+              <a:t>S2 · COMMISSIONING · LEAD: CONTENT PRESENTER</a:t>
+            </a:r>
+          </a:p>
+          <a:p>
+            <a:r>
+              <a:t>BEATS:</a:t>
+            </a:r>
+          </a:p>
+          <a:p>
+            <a:r>
+              <a:t>1. The four parts, in order: the homework practice, week one; the end-of-week-one check-in; the homework practice, week two; one sentence of preparation.</a:t>
+            </a:r>
+          </a:p>
+          <a:p>
+            <a:r>
+              <a:t>2. Check-in partners are named aloud before leaving this slide — the sheet has the line to write the name.</a:t>
+            </a:r>
+          </a:p>
+          <a:p>
+            <a:r>
+              <a:t>GUARD: The sheet-walk, not a re-teach.</a:t>
+            </a:r>
+          </a:p>
+        </p:txBody>
+      </p:sp>
+    </p:spTree>
+  </p:cSld>
+  <p:clrMapOvr>
+    <a:masterClrMapping/>
+  </p:clrMapOvr>
+</p:notes>
+</file>
+
 <file path=ppt/notesSlides/notesSlide20.xml><?xml version="1.0" encoding="utf-8"?>
 <p:notes xmlns:a="http://schemas.openxmlformats.org/drawingml/2006/main" xmlns:r="http://schemas.openxmlformats.org/officeDocument/2006/relationships" xmlns:p="http://schemas.openxmlformats.org/presentationml/2006/main">
   <p:cSld>
@@ -914,38 +1124,37 @@
           <a:lstStyle/>
           <a:p>
             <a:r>
-              <a:rPr lang="en-US" sz="1200"/>
               <a:t>S2 · 7:00–7:08 · LEAD: CONTAINER HOLDER</a:t>
             </a:r>
           </a:p>
           <a:p>
             <a:r>
-              <a:rPr lang="en-US" sz="1200"/>
               <a:t>BEATS:</a:t>
             </a:r>
           </a:p>
           <a:p>
             <a:r>
-              <a:rPr lang="en-US" sz="1200"/>
               <a:t>1. Full eight-step opening protocol — the cohort knows the form; hold the rhythm, do not over-explain.</a:t>
             </a:r>
           </a:p>
           <a:p>
             <a:r>
-              <a:rPr lang="en-US" sz="1200"/>
               <a:t>2. Four conditions: name them once; nods or a quiet yes are enough. Re-teach only if Week 1 felt unsafe.</a:t>
             </a:r>
           </a:p>
           <a:p>
             <a:r>
-              <a:rPr lang="en-US" sz="1200"/>
               <a:t>3. Close the opening with brief prayer naming the Holy Spirit — ask Him to teach us through Jesus' own words today.</a:t>
             </a:r>
           </a:p>
           <a:p>
             <a:r>
-              <a:rPr lang="en-US" sz="1200"/>
               <a:t>CUES: At the one-word check-in, listen for heavy words ('angry', 'numb', 'scared') — note them; the diagnostic may pull from there.</a:t>
+            </a:r>
+          </a:p>
+          <a:p>
+            <a:r>
+              <a:t>PAIR LEAD: name the leading pair in the welcome — two leaders hold tonight, and the room will see the evening handed back and forth between them; that is the design. The pair practices the session together beforehand.</a:t>
             </a:r>
           </a:p>
         </p:txBody>
@@ -1485,77 +1694,6 @@
             <a:r>
               <a:rPr lang="en-US" sz="1200" dirty="0"/>
               <a:t>3. Keep last week's morning question going — the two practices stack.</a:t>
-            </a:r>
-          </a:p>
-        </p:txBody>
-      </p:sp>
-    </p:spTree>
-  </p:cSld>
-  <p:clrMapOvr>
-    <a:masterClrMapping/>
-  </p:clrMapOvr>
-</p:notes>
-</file>
-
-<file path=ppt/notesSlides/notesSlide30.xml><?xml version="1.0" encoding="utf-8"?>
-<p:notes xmlns:a="http://schemas.openxmlformats.org/drawingml/2006/main" xmlns:r="http://schemas.openxmlformats.org/officeDocument/2006/relationships" xmlns:p="http://schemas.openxmlformats.org/presentationml/2006/main">
-  <p:cSld>
-    <p:spTree>
-      <p:nvGrpSpPr>
-        <p:cNvPr id="1" name=""/>
-        <p:cNvGrpSpPr/>
-        <p:nvPr/>
-      </p:nvGrpSpPr>
-      <p:grpSpPr>
-        <a:xfrm>
-          <a:off x="0" y="0"/>
-          <a:ext cx="0" cy="0"/>
-          <a:chOff x="0" y="0"/>
-          <a:chExt cx="0" cy="0"/>
-        </a:xfrm>
-      </p:grpSpPr>
-      <p:sp>
-        <p:nvSpPr>
-          <p:cNvPr id="2" name="Notes Placeholder 1"/>
-          <p:cNvSpPr>
-            <a:spLocks noGrp="1"/>
-          </p:cNvSpPr>
-          <p:nvPr>
-            <p:ph type="body" idx="1"/>
-          </p:nvPr>
-        </p:nvSpPr>
-        <p:spPr/>
-        <p:txBody>
-          <a:bodyPr/>
-          <a:lstStyle/>
-          <a:p>
-            <a:r>
-              <a:rPr lang="en-US" sz="1200"/>
-              <a:t>S2 · 8:20–8:24 · LEAD: CONTENT PRESENTER</a:t>
-            </a:r>
-          </a:p>
-          <a:p>
-            <a:r>
-              <a:rPr lang="en-US" sz="1200"/>
-              <a:t>BEATS:</a:t>
-            </a:r>
-          </a:p>
-          <a:p>
-            <a:r>
-              <a:rPr lang="en-US" sz="1200"/>
-              <a:t>1. Hold up the check-off card (H2.4): daily morning question and evening sentence, plus three soil-journal boxes.</a:t>
-            </a:r>
-          </a:p>
-          <a:p>
-            <a:r>
-              <a:rPr lang="en-US" sz="1200"/>
-              <a:t>2. A missed box is never a failure — it is an invitation to return.</a:t>
-            </a:r>
-          </a:p>
-          <a:p>
-            <a:r>
-              <a:rPr lang="en-US" sz="1200"/>
-              <a:t>CUES: Rides inside the practice block — keep both slides to five minutes together.</a:t>
             </a:r>
           </a:p>
         </p:txBody>
@@ -4921,7 +5059,7 @@
 </p:sld>
 </file>
 
-<file path=ppt/slides/slide21.xml><?xml version="1.0" encoding="utf-8"?>
+<file path=ppt/slides/slide10.xml><?xml version="1.0" encoding="utf-8"?>
 <p:sld xmlns:a="http://schemas.openxmlformats.org/drawingml/2006/main" xmlns:r="http://schemas.openxmlformats.org/officeDocument/2006/relationships" xmlns:p="http://schemas.openxmlformats.org/presentationml/2006/main">
   <p:cSld>
     <p:spTree>
@@ -4958,34 +5096,241 @@
           <a:ln>
             <a:noFill/>
           </a:ln>
-          <a:effectLst/>
-        </p:spPr>
-        <p:style>
-          <a:lnRef idx="1">
-            <a:schemeClr val="accent1"/>
-          </a:lnRef>
-          <a:fillRef idx="3">
-            <a:schemeClr val="accent1"/>
-          </a:fillRef>
-          <a:effectRef idx="2">
-            <a:schemeClr val="accent1"/>
-          </a:effectRef>
-          <a:fontRef idx="minor">
-            <a:schemeClr val="lt1"/>
-          </a:fontRef>
-        </p:style>
-        <p:txBody>
-          <a:bodyPr rtlCol="0" anchor="ctr"/>
-          <a:lstStyle/>
-          <a:p>
-            <a:pPr algn="ctr"/>
+        </p:spPr>
+        <p:txBody>
+          <a:bodyPr/>
+          <a:lstStyle/>
+          <a:p>
             <a:endParaRPr/>
+          </a:p>
+        </p:txBody>
+      </p:sp>
+      <p:sp>
+        <p:nvSpPr>
+          <p:cNvPr id="3" name="TextBox 2"/>
+          <p:cNvSpPr txBox="1"/>
+          <p:nvPr/>
+        </p:nvSpPr>
+        <p:spPr>
+          <a:xfrm>
+            <a:off x="822960" y="502920"/>
+            <a:ext cx="10515600" cy="822960"/>
+          </a:xfrm>
+          <a:prstGeom prst="rect">
+            <a:avLst/>
+          </a:prstGeom>
+          <a:noFill/>
+        </p:spPr>
+        <p:txBody>
+          <a:bodyPr wrap="square">
+            <a:spAutoFit/>
+          </a:bodyPr>
+          <a:lstStyle/>
+          <a:p>
+            <a:pPr algn="l">
+              <a:spcAft>
+                <a:spcPts val="600"/>
+              </a:spcAft>
+            </a:pPr>
+            <a:r>
+              <a:rPr sz="2800" b="1" i="0">
+                <a:solidFill>
+                  <a:srgbClr val="2C5F2D"/>
+                </a:solidFill>
+                <a:latin typeface="Cambria"/>
+              </a:rPr>
+              <a:t>Re-Merge — One Word, Then the Verse</a:t>
+            </a:r>
+          </a:p>
+        </p:txBody>
+      </p:sp>
+      <p:sp>
+        <p:nvSpPr>
+          <p:cNvPr id="4" name="TextBox 4"/>
+          <p:cNvSpPr txBox="1"/>
+          <p:nvPr/>
+        </p:nvSpPr>
+        <p:spPr>
+          <a:xfrm>
+            <a:off x="822960" y="1600200"/>
+            <a:ext cx="5669280" cy="4023360"/>
+          </a:xfrm>
+          <a:prstGeom prst="rect">
+            <a:avLst/>
+          </a:prstGeom>
+          <a:noFill/>
+        </p:spPr>
+        <p:txBody>
+          <a:bodyPr wrap="square" lIns="91440" tIns="91440" rIns="91440" bIns="91440"/>
+          <a:lstStyle/>
+          <a:p>
+            <a:pPr marL="274320" indent="-274320">
+              <a:spcAft>
+                <a:spcPts val="800"/>
+              </a:spcAft>
+            </a:pPr>
+            <a:r>
+              <a:rPr sz="2000" b="1" i="0">
+                <a:solidFill>
+                  <a:srgbClr val="97BC62"/>
+                </a:solidFill>
+                <a:latin typeface="Calibri"/>
+              </a:rPr>
+              <a:t>•  </a:t>
+            </a:r>
+            <a:r>
+              <a:rPr sz="2000" b="0" i="0">
+                <a:solidFill>
+                  <a:srgbClr val="222B22"/>
+                </a:solidFill>
+                <a:latin typeface="Calibri"/>
+              </a:rPr>
+              <a:t>What surfaced stays in your pair — here, just one word from each of us</a:t>
+            </a:r>
+          </a:p>
+          <a:p>
+            <a:pPr marL="274320" indent="-274320">
+              <a:spcAft>
+                <a:spcPts val="800"/>
+              </a:spcAft>
+            </a:pPr>
+            <a:r>
+              <a:rPr sz="2000" b="1" i="0">
+                <a:solidFill>
+                  <a:srgbClr val="97BC62"/>
+                </a:solidFill>
+                <a:latin typeface="Calibri"/>
+              </a:rPr>
+              <a:t>•  </a:t>
+            </a:r>
+            <a:r>
+              <a:rPr sz="2000" b="0" i="0">
+                <a:solidFill>
+                  <a:srgbClr val="222B22"/>
+                </a:solidFill>
+                <a:latin typeface="Calibri"/>
+              </a:rPr>
+              <a:t>Then the verse Jesus ends with, read slowly — listen for the word that lands</a:t>
+            </a:r>
+          </a:p>
+          <a:p>
+            <a:pPr marL="274320" indent="-274320">
+              <a:spcAft>
+                <a:spcPts val="800"/>
+              </a:spcAft>
+            </a:pPr>
+            <a:r>
+              <a:rPr sz="2000" b="1" i="0">
+                <a:solidFill>
+                  <a:srgbClr val="97BC62"/>
+                </a:solidFill>
+                <a:latin typeface="Calibri"/>
+              </a:rPr>
+              <a:t>•  </a:t>
+            </a:r>
+            <a:r>
+              <a:rPr sz="2000" b="0" i="0">
+                <a:solidFill>
+                  <a:srgbClr val="222B22"/>
+                </a:solidFill>
+                <a:latin typeface="Calibri"/>
+              </a:rPr>
+              <a:t>Noticing rocks and thorns is not the opposite of good soil — it is what good soil does</a:t>
+            </a:r>
+          </a:p>
+        </p:txBody>
+      </p:sp>
+      <p:sp>
+        <p:nvSpPr>
+          <p:cNvPr id="6" name="TextBox 6"/>
+          <p:cNvSpPr txBox="1"/>
+          <p:nvPr/>
+        </p:nvSpPr>
+        <p:spPr>
+          <a:xfrm>
+            <a:off x="6766560" y="1737360"/>
+            <a:ext cx="4663440" cy="3291840"/>
+          </a:xfrm>
+          <a:prstGeom prst="rect">
+            <a:avLst/>
+          </a:prstGeom>
+          <a:solidFill>
+            <a:srgbClr val="F1F6EC"/>
+          </a:solidFill>
+        </p:spPr>
+        <p:txBody>
+          <a:bodyPr wrap="square" lIns="91440" tIns="91440" rIns="91440" bIns="91440" anchor="ctr"/>
+          <a:lstStyle/>
+          <a:p>
+            <a:pPr>
+              <a:spcAft>
+                <a:spcPts val="1000"/>
+              </a:spcAft>
+            </a:pPr>
+            <a:r>
+              <a:rPr sz="1200" b="1" i="0">
+                <a:solidFill>
+                  <a:srgbClr val="97BC62"/>
+                </a:solidFill>
+                <a:latin typeface="Calibri"/>
+              </a:rPr>
+              <a:t>MARK 4:20</a:t>
+            </a:r>
+          </a:p>
+          <a:p>
+            <a:pPr>
+              <a:spcAft>
+                <a:spcPts val="600"/>
+              </a:spcAft>
+            </a:pPr>
+            <a:r>
+              <a:rPr sz="2400" b="0" i="1">
+                <a:solidFill>
+                  <a:srgbClr val="222B22"/>
+                </a:solidFill>
+                <a:latin typeface="Cambria"/>
+              </a:rPr>
+              <a:t>“But those that were sown on the good soil are the ones who hear the word and accept it and bear fruit, thirtyfold and sixtyfold and a hundredfold.”</a:t>
+            </a:r>
+          </a:p>
+        </p:txBody>
+      </p:sp>
+      <p:sp>
+        <p:nvSpPr>
+          <p:cNvPr id="90" name="SlideNum"/>
+          <p:cNvSpPr txBox="1"/>
+          <p:nvPr/>
+        </p:nvSpPr>
+        <p:spPr>
+          <a:xfrm>
+            <a:off x="11384280" y="6446520"/>
+            <a:ext cx="640080" cy="292608"/>
+          </a:xfrm>
+          <a:prstGeom prst="rect">
+            <a:avLst/>
+          </a:prstGeom>
+          <a:noFill/>
+        </p:spPr>
+        <p:txBody>
+          <a:bodyPr wrap="none" lIns="0" tIns="0" rIns="45720" bIns="0" anchor="ctr"/>
+          <a:lstStyle/>
+          <a:p>
+            <a:pPr algn="r"/>
+            <a:r>
+              <a:t>29</a:t>
+            </a:r>
+            <a:endParaRPr sz="1000" b="1">
+              <a:solidFill>
+                <a:srgbClr val="7A8A6E"/>
+              </a:solidFill>
+              <a:latin typeface="Calibri"/>
+            </a:endParaRPr>
           </a:p>
         </p:txBody>
       </p:sp>
       <p:pic>
         <p:nvPicPr>
-          <p:cNvPr id="3" name="Picture 2" descr="wk02-soil.jpg"/>
+          <p:cNvPr id="30" name="Picture 30" descr="a single apple on the branch"/>
           <p:cNvPicPr>
             <a:picLocks noChangeAspect="1"/>
           </p:cNvPicPr>
@@ -4999,8 +5344,8 @@
         </p:blipFill>
         <p:spPr>
           <a:xfrm>
-            <a:off x="6309360" y="1630118"/>
-            <a:ext cx="5394960" cy="3597763"/>
+            <a:off x="822960" y="4160520"/>
+            <a:ext cx="4206240" cy="2368296"/>
           </a:xfrm>
           <a:prstGeom prst="rect">
             <a:avLst/>
@@ -5019,149 +5364,6 @@
           </a:effectLst>
         </p:spPr>
       </p:pic>
-      <p:sp>
-        <p:nvSpPr>
-          <p:cNvPr id="4" name="TextBox 3"/>
-          <p:cNvSpPr txBox="1"/>
-          <p:nvPr/>
-        </p:nvSpPr>
-        <p:spPr>
-          <a:xfrm>
-            <a:off x="822960" y="1828800"/>
-            <a:ext cx="5212080" cy="3291840"/>
-          </a:xfrm>
-          <a:prstGeom prst="rect">
-            <a:avLst/>
-          </a:prstGeom>
-          <a:noFill/>
-        </p:spPr>
-        <p:txBody>
-          <a:bodyPr wrap="square">
-            <a:spAutoFit/>
-          </a:bodyPr>
-          <a:lstStyle/>
-          <a:p>
-            <a:pPr algn="l">
-              <a:spcAft>
-                <a:spcPts val="600"/>
-              </a:spcAft>
-            </a:pPr>
-            <a:r>
-              <a:rPr sz="1800" b="1" i="0">
-                <a:solidFill>
-                  <a:srgbClr val="97BC62"/>
-                </a:solidFill>
-                <a:latin typeface="Calibri"/>
-              </a:rPr>
-              <a:t>SESSION 2</a:t>
-            </a:r>
-          </a:p>
-          <a:p>
-            <a:pPr algn="l">
-              <a:spcAft>
-                <a:spcPts val="1000"/>
-              </a:spcAft>
-            </a:pPr>
-            <a:r>
-              <a:rPr sz="3300" b="1" i="0">
-                <a:solidFill>
-                  <a:srgbClr val="2C5F2D"/>
-                </a:solidFill>
-                <a:latin typeface="Cambria"/>
-              </a:rPr>
-              <a:t>The Soil of Your Heart</a:t>
-            </a:r>
-          </a:p>
-          <a:p>
-            <a:pPr algn="l">
-              <a:spcAft>
-                <a:spcPts val="600"/>
-              </a:spcAft>
-            </a:pPr>
-            <a:r>
-              <a:rPr sz="1800" b="0" i="1">
-                <a:solidFill>
-                  <a:srgbClr val="595959"/>
-                </a:solidFill>
-                <a:latin typeface="Calibri"/>
-              </a:rPr>
-              <a:t>The Heart Soil diagnostic from Mark 4; beginning Connecting with Self</a:t>
-            </a:r>
-          </a:p>
-        </p:txBody>
-      </p:sp>
-      <p:sp>
-        <p:nvSpPr>
-          <p:cNvPr id="5" name="TextBox 4"/>
-          <p:cNvSpPr txBox="1"/>
-          <p:nvPr/>
-        </p:nvSpPr>
-        <p:spPr>
-          <a:xfrm>
-            <a:off x="822960" y="6126480"/>
-            <a:ext cx="7315200" cy="457200"/>
-          </a:xfrm>
-          <a:prstGeom prst="rect">
-            <a:avLst/>
-          </a:prstGeom>
-          <a:noFill/>
-        </p:spPr>
-        <p:txBody>
-          <a:bodyPr wrap="square">
-            <a:spAutoFit/>
-          </a:bodyPr>
-          <a:lstStyle/>
-          <a:p>
-            <a:pPr algn="l">
-              <a:spcAft>
-                <a:spcPts val="600"/>
-              </a:spcAft>
-            </a:pPr>
-            <a:r>
-              <a:rPr sz="1800" b="0" i="0">
-                <a:solidFill>
-                  <a:srgbClr val="595959"/>
-                </a:solidFill>
-                <a:latin typeface="Calibri"/>
-              </a:rPr>
-              <a:t>Quarter 1: Connect with Self &amp; Others</a:t>
-            </a:r>
-          </a:p>
-        </p:txBody>
-      </p:sp>
-      <p:sp>
-        <p:nvSpPr>
-          <p:cNvPr id="90" name="SlideNum"/>
-          <p:cNvSpPr txBox="1"/>
-          <p:nvPr/>
-        </p:nvSpPr>
-        <p:spPr>
-          <a:xfrm>
-            <a:off x="11384280" y="6446520"/>
-            <a:ext cx="640080" cy="292608"/>
-          </a:xfrm>
-          <a:prstGeom prst="rect">
-            <a:avLst/>
-          </a:prstGeom>
-          <a:noFill/>
-        </p:spPr>
-        <p:txBody>
-          <a:bodyPr wrap="none" lIns="0" tIns="0" rIns="45720" bIns="0" anchor="ctr"/>
-          <a:lstStyle/>
-          <a:p>
-            <a:pPr algn="r"/>
-            <a:r>
-              <a:t>21</a:t>
-            </a:r>
-            <a:endParaRPr sz="1000" b="1">
-              <a:solidFill>
-                <a:srgbClr val="7A8A6E"/>
-              </a:solidFill>
-              <a:latin typeface="Calibri"/>
-            </a:endParaRPr>
-          </a:p>
-        </p:txBody>
-      </p:sp>
     </p:spTree>
   </p:cSld>
   <p:clrMapOvr>
@@ -5170,7 +5372,7 @@
 </p:sld>
 </file>
 
-<file path=ppt/slides/slide22.xml><?xml version="1.0" encoding="utf-8"?>
+<file path=ppt/slides/slide11.xml><?xml version="1.0" encoding="utf-8"?>
 <p:sld xmlns:a="http://schemas.openxmlformats.org/drawingml/2006/main" xmlns:r="http://schemas.openxmlformats.org/officeDocument/2006/relationships" xmlns:p="http://schemas.openxmlformats.org/presentationml/2006/main">
   <p:cSld>
     <p:spTree>
@@ -5207,27 +5409,11 @@
           <a:ln>
             <a:noFill/>
           </a:ln>
-          <a:effectLst/>
-        </p:spPr>
-        <p:style>
-          <a:lnRef idx="1">
-            <a:schemeClr val="accent1"/>
-          </a:lnRef>
-          <a:fillRef idx="3">
-            <a:schemeClr val="accent1"/>
-          </a:fillRef>
-          <a:effectRef idx="2">
-            <a:schemeClr val="accent1"/>
-          </a:effectRef>
-          <a:fontRef idx="minor">
-            <a:schemeClr val="lt1"/>
-          </a:fontRef>
-        </p:style>
-        <p:txBody>
-          <a:bodyPr rtlCol="0" anchor="ctr"/>
-          <a:lstStyle/>
-          <a:p>
-            <a:pPr algn="ctr"/>
+        </p:spPr>
+        <p:txBody>
+          <a:bodyPr/>
+          <a:lstStyle/>
+          <a:p>
             <a:endParaRPr/>
           </a:p>
         </p:txBody>
@@ -5266,21 +5452,21 @@
                 </a:solidFill>
                 <a:latin typeface="Cambria"/>
               </a:rPr>
-              <a:t>Session 2 — Tonight’s Road</a:t>
-            </a:r>
-          </a:p>
-        </p:txBody>
-      </p:sp>
-      <p:sp>
-        <p:nvSpPr>
-          <p:cNvPr id="4" name="TextBox 3"/>
+              <a:t>Homework — Two Weeks, Four Parts</a:t>
+            </a:r>
+          </a:p>
+        </p:txBody>
+      </p:sp>
+      <p:sp>
+        <p:nvSpPr>
+          <p:cNvPr id="4" name="TextBox 4"/>
           <p:cNvSpPr txBox="1"/>
           <p:nvPr/>
         </p:nvSpPr>
         <p:spPr>
           <a:xfrm>
-            <a:off x="822960" y="1508760"/>
-            <a:ext cx="7040880" cy="4503797"/>
+            <a:off x="822960" y="1554480"/>
+            <a:ext cx="6675120" cy="4754880"/>
           </a:xfrm>
           <a:prstGeom prst="rect">
             <a:avLst/>
@@ -5288,208 +5474,149 @@
           <a:noFill/>
         </p:spPr>
         <p:txBody>
-          <a:bodyPr wrap="square">
-            <a:spAutoFit/>
-          </a:bodyPr>
-          <a:lstStyle/>
-          <a:p>
-            <a:pPr>
+          <a:bodyPr wrap="square" lIns="91440" tIns="91440" rIns="91440" bIns="91440"/>
+          <a:lstStyle/>
+          <a:p>
+            <a:pPr marL="274320" indent="-274320">
               <a:spcAft>
-                <a:spcPts val="800"/>
+                <a:spcPts val="900"/>
               </a:spcAft>
             </a:pPr>
             <a:r>
-              <a:rPr sz="2400" b="1" dirty="0">
+              <a:rPr sz="2200" b="1" i="0" dirty="0">
                 <a:solidFill>
                   <a:srgbClr val="97BC62"/>
                 </a:solidFill>
                 <a:latin typeface="Calibri"/>
               </a:rPr>
-              <a:t>1   </a:t>
-            </a:r>
-            <a:r>
-              <a:rPr sz="2400" dirty="0">
+              <a:t>•  </a:t>
+            </a:r>
+            <a:r>
+              <a:rPr sz="2200" b="0" i="0" dirty="0">
                 <a:solidFill>
                   <a:srgbClr val="222B22"/>
                 </a:solidFill>
                 <a:latin typeface="Calibri"/>
               </a:rPr>
-              <a:t>Opening container — full eight-step protocol</a:t>
-            </a:r>
-          </a:p>
-          <a:p>
-            <a:pPr>
+              <a:t>The Soil Journal — three times this week, five minutes each. Not every day; three times.</a:t>
+            </a:r>
+          </a:p>
+          <a:p>
+            <a:pPr marL="685800" indent="-274320">
               <a:spcAft>
-                <a:spcPts val="800"/>
+                <a:spcPts val="700"/>
               </a:spcAft>
             </a:pPr>
             <a:r>
-              <a:rPr sz="2400" b="1" dirty="0">
+              <a:rPr sz="1800" b="1" i="0" dirty="0">
                 <a:solidFill>
                   <a:srgbClr val="97BC62"/>
                 </a:solidFill>
                 <a:latin typeface="Calibri"/>
               </a:rPr>
-              <a:t>2   </a:t>
-            </a:r>
-            <a:r>
-              <a:rPr sz="2400" dirty="0">
+              <a:t>–  </a:t>
+            </a:r>
+            <a:r>
+              <a:rPr sz="2400" b="0" i="1" dirty="0">
                 <a:solidFill>
                   <a:srgbClr val="222B22"/>
                 </a:solidFill>
                 <a:latin typeface="Calibri"/>
               </a:rPr>
-              <a:t>Check-in on Week 1 practice</a:t>
-            </a:r>
-          </a:p>
-          <a:p>
-            <a:pPr>
+              <a:t>Today, where did the path show up? The rocky? The thorny? The good soil?</a:t>
+            </a:r>
+          </a:p>
+          <a:p>
+            <a:pPr marL="685800" indent="-274320">
               <a:spcAft>
-                <a:spcPts val="800"/>
+                <a:spcPts val="700"/>
               </a:spcAft>
             </a:pPr>
             <a:r>
-              <a:rPr sz="2400" b="1" dirty="0">
+              <a:rPr sz="2400" b="1" i="0" dirty="0">
                 <a:solidFill>
                   <a:srgbClr val="97BC62"/>
                 </a:solidFill>
                 <a:latin typeface="Calibri"/>
               </a:rPr>
-              <a:t>3   </a:t>
-            </a:r>
-            <a:r>
-              <a:rPr sz="2400" dirty="0">
+              <a:t>–  </a:t>
+            </a:r>
+            <a:r>
+              <a:rPr sz="2400" b="0" i="0" dirty="0">
                 <a:solidFill>
                   <a:srgbClr val="222B22"/>
                 </a:solidFill>
                 <a:latin typeface="Calibri"/>
               </a:rPr>
-              <a:t>Teaching: the seed recalled; Mark 4, the soils, and Paul’s mixed ground</a:t>
-            </a:r>
-          </a:p>
-          <a:p>
-            <a:pPr>
+              <a:t>One sentence per soil. Specific, not general.</a:t>
+            </a:r>
+          </a:p>
+          <a:p>
+            <a:pPr marL="274320" indent="-274320">
               <a:spcAft>
-                <a:spcPts val="800"/>
+                <a:spcPts val="900"/>
               </a:spcAft>
             </a:pPr>
             <a:r>
-              <a:rPr sz="2400" b="1" dirty="0">
+              <a:rPr sz="2200" b="1" i="0" dirty="0">
                 <a:solidFill>
                   <a:srgbClr val="97BC62"/>
                 </a:solidFill>
                 <a:latin typeface="Calibri"/>
               </a:rPr>
-              <a:t>4   </a:t>
-            </a:r>
-            <a:r>
-              <a:rPr sz="2400" dirty="0">
+              <a:t>•  </a:t>
+            </a:r>
+            <a:r>
+              <a:rPr sz="2200" b="0" i="0" dirty="0">
                 <a:solidFill>
                   <a:srgbClr val="222B22"/>
                 </a:solidFill>
                 <a:latin typeface="Calibri"/>
               </a:rPr>
-              <a:t>pairs: question zero, then the Heart Soil diagnostic</a:t>
-            </a:r>
-          </a:p>
-          <a:p>
-            <a:pPr>
+              <a:t>No fixing. We notice; the Spirit fixes.</a:t>
+            </a:r>
+          </a:p>
+          <a:p>
+            <a:pPr marL="274320" indent="-274320">
               <a:spcAft>
-                <a:spcPts val="800"/>
+                <a:spcPts val="900"/>
               </a:spcAft>
             </a:pPr>
             <a:r>
-              <a:rPr sz="2400" b="1" dirty="0">
+              <a:rPr sz="2200" b="1" i="0" dirty="0">
                 <a:solidFill>
                   <a:srgbClr val="97BC62"/>
                 </a:solidFill>
                 <a:latin typeface="Calibri"/>
               </a:rPr>
-              <a:t>5   </a:t>
-            </a:r>
-            <a:r>
-              <a:rPr sz="2400" dirty="0">
+              <a:t>•  </a:t>
+            </a:r>
+            <a:r>
+              <a:rPr sz="2200" b="0" i="0" dirty="0">
                 <a:solidFill>
                   <a:srgbClr val="222B22"/>
                 </a:solidFill>
                 <a:latin typeface="Calibri"/>
               </a:rPr>
-              <a:t>Re-merge — shared debrief; Mark 4:20 re-read</a:t>
-            </a:r>
-          </a:p>
-          <a:p>
-            <a:pPr>
-              <a:spcAft>
-                <a:spcPts val="800"/>
-              </a:spcAft>
-            </a:pPr>
-            <a:r>
-              <a:rPr sz="2400" b="1" dirty="0">
-                <a:solidFill>
-                  <a:srgbClr val="97BC62"/>
-                </a:solidFill>
-                <a:latin typeface="Calibri"/>
-              </a:rPr>
-              <a:t>6   </a:t>
-            </a:r>
-            <a:r>
-              <a:rPr sz="2400" dirty="0">
+              <a:t>Keep the morning question going too: </a:t>
+            </a:r>
+            <a:r>
+              <a:rPr sz="2200" b="0" i="1" dirty="0">
                 <a:solidFill>
                   <a:srgbClr val="222B22"/>
                 </a:solidFill>
                 <a:latin typeface="Calibri"/>
               </a:rPr>
-              <a:t>Homework commissioning — handout + check-in partners</a:t>
-            </a:r>
-          </a:p>
-          <a:p>
-            <a:pPr>
-              <a:spcAft>
-                <a:spcPts val="800"/>
-              </a:spcAft>
-            </a:pPr>
-            <a:r>
-              <a:rPr sz="2400" b="1" dirty="0">
-                <a:solidFill>
-                  <a:srgbClr val="97BC62"/>
-                </a:solidFill>
-                <a:latin typeface="Calibri"/>
-              </a:rPr>
-              <a:t>7   </a:t>
-            </a:r>
-            <a:r>
-              <a:rPr sz="2400" dirty="0">
+              <a:t>“Father, what are you up to today?”</a:t>
+            </a:r>
+            <a:r>
+              <a:rPr sz="2200" b="0" i="0" dirty="0">
                 <a:solidFill>
                   <a:srgbClr val="222B22"/>
                 </a:solidFill>
                 <a:latin typeface="Calibri"/>
               </a:rPr>
-              <a:t>The Leader Feedback Round — both leaders</a:t>
-            </a:r>
-          </a:p>
-          <a:p>
-            <a:pPr>
-              <a:spcAft>
-                <a:spcPts val="800"/>
-              </a:spcAft>
-            </a:pPr>
-            <a:r>
-              <a:rPr sz="2400" b="1" dirty="0">
-                <a:solidFill>
-                  <a:srgbClr val="97BC62"/>
-                </a:solidFill>
-                <a:latin typeface="Calibri"/>
-              </a:rPr>
-              <a:t>8   </a:t>
-            </a:r>
-            <a:r>
-              <a:rPr sz="2400" dirty="0">
-                <a:solidFill>
-                  <a:srgbClr val="222B22"/>
-                </a:solidFill>
-                <a:latin typeface="Calibri"/>
-              </a:rPr>
-              <a:t>Closing container + Aaronic blessing</a:t>
+              <a:t> The practices stack.</a:t>
             </a:r>
           </a:p>
         </p:txBody>
@@ -5516,7 +5643,7 @@
           <a:p>
             <a:pPr algn="r"/>
             <a:r>
-              <a:t>22</a:t>
+              <a:t>30</a:t>
             </a:r>
             <a:endParaRPr sz="1000" b="1">
               <a:solidFill>
@@ -5529,7 +5656,7 @@
       </p:sp>
       <p:pic>
         <p:nvPicPr>
-          <p:cNvPr id="31" name="Picture 31" descr="the open container bowl"/>
+          <p:cNvPr id="30" name="Picture 30" descr="sprouts emerging from dark soil"/>
           <p:cNvPicPr>
             <a:picLocks noChangeAspect="1"/>
           </p:cNvPicPr>
@@ -5543,8 +5670,8 @@
         </p:blipFill>
         <p:spPr>
           <a:xfrm>
-            <a:off x="8001000" y="1554480"/>
-            <a:ext cx="3017520" cy="4526280"/>
+            <a:off x="7818120" y="1463040"/>
+            <a:ext cx="3264408" cy="4892040"/>
           </a:xfrm>
           <a:prstGeom prst="rect">
             <a:avLst/>
@@ -5571,7 +5698,7 @@
 </p:sld>
 </file>
 
-<file path=ppt/slides/slide23.xml><?xml version="1.0" encoding="utf-8"?>
+<file path=ppt/slides/slide13.xml><?xml version="1.0" encoding="utf-8"?>
 <p:sld xmlns:a="http://schemas.openxmlformats.org/drawingml/2006/main" xmlns:r="http://schemas.openxmlformats.org/officeDocument/2006/relationships" xmlns:p="http://schemas.openxmlformats.org/presentationml/2006/main">
   <p:cSld>
     <p:spTree>
@@ -5651,7 +5778,7 @@
                 </a:solidFill>
                 <a:latin typeface="Cambria"/>
               </a:rPr>
-              <a:t>Opening Container — the Full Eight Steps</a:t>
+              <a:t>The Leader Feedback Round</a:t>
             </a:r>
           </a:p>
         </p:txBody>
@@ -5665,7 +5792,7 @@
         <p:spPr>
           <a:xfrm>
             <a:off x="822960" y="1554480"/>
-            <a:ext cx="10515600" cy="4754880"/>
+            <a:ext cx="6675120" cy="4754880"/>
           </a:xfrm>
           <a:prstGeom prst="rect">
             <a:avLst/>
@@ -5676,203 +5803,153 @@
           <a:bodyPr wrap="square" lIns="91440" tIns="91440" rIns="91440" bIns="91440"/>
           <a:lstStyle/>
           <a:p>
-            <a:pPr marL="342900" indent="-342900">
+            <a:pPr marL="274320" indent="-274320">
               <a:spcAft>
-                <a:spcPts val="750"/>
+                <a:spcPts val="900"/>
               </a:spcAft>
             </a:pPr>
             <a:r>
-              <a:rPr sz="2400" b="1" i="0" dirty="0">
+              <a:rPr sz="2800" b="1" i="0">
                 <a:solidFill>
                   <a:srgbClr val="97BC62"/>
                 </a:solidFill>
                 <a:latin typeface="Calibri"/>
               </a:rPr>
-              <a:t>1   </a:t>
-            </a:r>
-            <a:r>
-              <a:rPr sz="2400" b="0" i="0" dirty="0">
+              <a:t>•  </a:t>
+            </a:r>
+            <a:r>
+              <a:rPr sz="2800" b="0" i="0">
                 <a:solidFill>
                   <a:srgbClr val="222B22"/>
                 </a:solidFill>
                 <a:latin typeface="Calibri"/>
               </a:rPr>
-              <a:t>Welcome — five minutes to open the container</a:t>
-            </a:r>
-          </a:p>
-          <a:p>
-            <a:pPr marL="342900" indent="-342900">
+              <a:t>Two rounds, same as every session — the container holder first, then the content presenter: three things each</a:t>
+            </a:r>
+          </a:p>
+          <a:p>
+            <a:pPr marL="685800" indent="-274320">
               <a:spcAft>
-                <a:spcPts val="750"/>
+                <a:spcPts val="700"/>
               </a:spcAft>
             </a:pPr>
             <a:r>
-              <a:rPr sz="2400" b="1" i="0" dirty="0">
+              <a:rPr sz="2000" b="1" i="0">
                 <a:solidFill>
                   <a:srgbClr val="97BC62"/>
                 </a:solidFill>
                 <a:latin typeface="Calibri"/>
               </a:rPr>
-              <a:t>2   </a:t>
-            </a:r>
-            <a:r>
-              <a:rPr sz="2400" b="0" i="0" dirty="0">
+              <a:t>–  </a:t>
+            </a:r>
+            <a:r>
+              <a:rPr sz="2000" b="0" i="1">
                 <a:solidFill>
                   <a:srgbClr val="222B22"/>
                 </a:solidFill>
                 <a:latin typeface="Calibri"/>
               </a:rPr>
-              <a:t>Phones silenced and put away</a:t>
-            </a:r>
-          </a:p>
-          <a:p>
-            <a:pPr marL="342900" indent="-342900">
+              <a:t>“What I think went well tonight: ______”</a:t>
+            </a:r>
+          </a:p>
+          <a:p>
+            <a:pPr marL="685800" indent="-274320">
               <a:spcAft>
-                <a:spcPts val="750"/>
+                <a:spcPts val="700"/>
               </a:spcAft>
             </a:pPr>
             <a:r>
-              <a:rPr sz="2400" b="1" i="0" dirty="0">
+              <a:rPr sz="2000" b="1" i="0">
                 <a:solidFill>
                   <a:srgbClr val="97BC62"/>
                 </a:solidFill>
                 <a:latin typeface="Calibri"/>
               </a:rPr>
-              <a:t>3   </a:t>
-            </a:r>
-            <a:r>
-              <a:rPr sz="2400" b="0" i="0" dirty="0">
+              <a:t>–  </a:t>
+            </a:r>
+            <a:r>
+              <a:rPr sz="2000" b="0" i="1">
                 <a:solidFill>
                   <a:srgbClr val="222B22"/>
                 </a:solidFill>
                 <a:latin typeface="Calibri"/>
               </a:rPr>
-              <a:t>Stand in a circle</a:t>
-            </a:r>
-          </a:p>
-          <a:p>
-            <a:pPr marL="342900" indent="-342900">
+              <a:t>“What I’d do differently next time: ______”</a:t>
+            </a:r>
+          </a:p>
+          <a:p>
+            <a:pPr marL="685800" indent="-274320">
               <a:spcAft>
-                <a:spcPts val="750"/>
+                <a:spcPts val="700"/>
               </a:spcAft>
             </a:pPr>
             <a:r>
-              <a:rPr sz="2400" b="1" i="0" dirty="0">
+              <a:rPr sz="2000" b="1" i="0">
                 <a:solidFill>
                   <a:srgbClr val="97BC62"/>
                 </a:solidFill>
                 <a:latin typeface="Calibri"/>
               </a:rPr>
-              <a:t>4   </a:t>
-            </a:r>
-            <a:r>
-              <a:rPr sz="2400" b="0" i="0" dirty="0">
+              <a:t>–  </a:t>
+            </a:r>
+            <a:r>
+              <a:rPr sz="2000" b="0" i="1">
                 <a:solidFill>
                   <a:srgbClr val="222B22"/>
                 </a:solidFill>
                 <a:latin typeface="Calibri"/>
               </a:rPr>
-              <a:t>One-word check-in — how you actually are, right now</a:t>
-            </a:r>
-          </a:p>
-          <a:p>
-            <a:pPr marL="342900" indent="-342900">
+              <a:t>“If I were to teach tonight’s process to someone, I would tell them: ______”</a:t>
+            </a:r>
+          </a:p>
+          <a:p>
+            <a:pPr marL="274320" indent="-274320">
               <a:spcAft>
-                <a:spcPts val="750"/>
+                <a:spcPts val="900"/>
               </a:spcAft>
             </a:pPr>
             <a:r>
-              <a:rPr sz="2400" b="1" i="0" dirty="0">
+              <a:rPr sz="2800" b="1" i="0">
                 <a:solidFill>
                   <a:srgbClr val="97BC62"/>
                 </a:solidFill>
                 <a:latin typeface="Calibri"/>
               </a:rPr>
-              <a:t>5   </a:t>
-            </a:r>
-            <a:r>
-              <a:rPr sz="2400" b="0" i="0" dirty="0">
+              <a:t>•  </a:t>
+            </a:r>
+            <a:r>
+              <a:rPr sz="2800" b="0" i="0">
                 <a:solidFill>
                   <a:srgbClr val="222B22"/>
                 </a:solidFill>
                 <a:latin typeface="Calibri"/>
               </a:rPr>
-              <a:t>Put out / bring in — set something down; bring a blessing in</a:t>
-            </a:r>
-          </a:p>
-          <a:p>
-            <a:pPr marL="342900" indent="-342900">
+              <a:t>Then the room — the same two questions about tonight</a:t>
+            </a:r>
+          </a:p>
+          <a:p>
+            <a:pPr marL="274320" indent="-274320">
               <a:spcAft>
-                <a:spcPts val="750"/>
+                <a:spcPts val="900"/>
               </a:spcAft>
             </a:pPr>
             <a:r>
-              <a:rPr sz="2400" b="1" i="0" dirty="0">
+              <a:rPr sz="2800" b="1" i="0">
                 <a:solidFill>
                   <a:srgbClr val="97BC62"/>
                 </a:solidFill>
                 <a:latin typeface="Calibri"/>
               </a:rPr>
-              <a:t>6   </a:t>
-            </a:r>
-            <a:r>
-              <a:rPr sz="2400" b="0" i="0" dirty="0">
+              <a:t>•  </a:t>
+            </a:r>
+            <a:r>
+              <a:rPr sz="2800" b="0" i="0">
                 <a:solidFill>
                   <a:srgbClr val="222B22"/>
                 </a:solidFill>
                 <a:latin typeface="Calibri"/>
               </a:rPr>
-              <a:t>Spoken commitment: “I am here. I am paying attention. I am willing to be moved.”</a:t>
-            </a:r>
-          </a:p>
-          <a:p>
-            <a:pPr marL="342900" indent="-342900">
-              <a:spcAft>
-                <a:spcPts val="750"/>
-              </a:spcAft>
-            </a:pPr>
-            <a:r>
-              <a:rPr sz="2400" b="1" i="0" dirty="0">
-                <a:solidFill>
-                  <a:srgbClr val="97BC62"/>
-                </a:solidFill>
-                <a:latin typeface="Calibri"/>
-              </a:rPr>
-              <a:t>7   </a:t>
-            </a:r>
-            <a:r>
-              <a:rPr sz="2400" b="0" i="0" dirty="0">
-                <a:solidFill>
-                  <a:srgbClr val="222B22"/>
-                </a:solidFill>
-                <a:latin typeface="Calibri"/>
-              </a:rPr>
-              <a:t>Opening prayer — “Holy Spirit, you are welcome here. Speak. We are listening.”</a:t>
-            </a:r>
-          </a:p>
-          <a:p>
-            <a:pPr marL="342900" indent="-342900">
-              <a:spcAft>
-                <a:spcPts val="750"/>
-              </a:spcAft>
-            </a:pPr>
-            <a:r>
-              <a:rPr sz="2400" b="1" i="0" dirty="0">
-                <a:solidFill>
-                  <a:srgbClr val="97BC62"/>
-                </a:solidFill>
-                <a:latin typeface="Calibri"/>
-              </a:rPr>
-              <a:t>8   </a:t>
-            </a:r>
-            <a:r>
-              <a:rPr sz="2400" b="0" i="0" dirty="0">
-                <a:solidFill>
-                  <a:srgbClr val="222B22"/>
-                </a:solidFill>
-                <a:latin typeface="Calibri"/>
-              </a:rPr>
-              <a:t>Sit. Begin.</a:t>
+              <a:t>The leaders receive without defending — “thank you” is the whole response</a:t>
             </a:r>
           </a:p>
         </p:txBody>
@@ -5899,7 +5976,7 @@
           <a:p>
             <a:pPr algn="r"/>
             <a:r>
-              <a:t>23</a:t>
+              <a:t>32</a:t>
             </a:r>
             <a:endParaRPr sz="1000" b="1">
               <a:solidFill>
@@ -5910,6 +5987,42 @@
           </a:p>
         </p:txBody>
       </p:sp>
+      <p:pic>
+        <p:nvPicPr>
+          <p:cNvPr id="33" name="Picture 33" descr="compass on the trail - the weekly bearing check"/>
+          <p:cNvPicPr>
+            <a:picLocks noChangeAspect="1"/>
+          </p:cNvPicPr>
+          <p:nvPr/>
+        </p:nvPicPr>
+        <p:blipFill>
+          <a:blip r:embed="rId3"/>
+          <a:stretch>
+            <a:fillRect/>
+          </a:stretch>
+        </p:blipFill>
+        <p:spPr>
+          <a:xfrm>
+            <a:off x="8106160" y="1463040"/>
+            <a:ext cx="3259831" cy="4892040"/>
+          </a:xfrm>
+          <a:prstGeom prst="rect">
+            <a:avLst/>
+          </a:prstGeom>
+          <a:ln w="76200">
+            <a:solidFill>
+              <a:srgbClr val="FFFFFF"/>
+            </a:solidFill>
+          </a:ln>
+          <a:effectLst>
+            <a:outerShdw blurRad="63500" dist="25400" dir="5400000" rotWithShape="0">
+              <a:srgbClr val="000000">
+                <a:alpha val="35000"/>
+              </a:srgbClr>
+            </a:outerShdw>
+          </a:effectLst>
+        </p:spPr>
+      </p:pic>
     </p:spTree>
   </p:cSld>
   <p:clrMapOvr>
@@ -5918,7 +6031,7 @@
 </p:sld>
 </file>
 
-<file path=ppt/slides/slide24.xml><?xml version="1.0" encoding="utf-8"?>
+<file path=ppt/slides/slide14.xml><?xml version="1.0" encoding="utf-8"?>
 <p:sld xmlns:a="http://schemas.openxmlformats.org/drawingml/2006/main" xmlns:r="http://schemas.openxmlformats.org/officeDocument/2006/relationships" xmlns:p="http://schemas.openxmlformats.org/presentationml/2006/main">
   <p:cSld>
     <p:spTree>
@@ -5998,7 +6111,7 @@
                 </a:solidFill>
                 <a:latin typeface="Cambria"/>
               </a:rPr>
-              <a:t>Check-In on Week 1 Practice</a:t>
+              <a:t>Closing the Container + Aaronic Blessing</a:t>
             </a:r>
           </a:p>
         </p:txBody>
@@ -6011,8 +6124,8 @@
         </p:nvSpPr>
         <p:spPr>
           <a:xfrm>
-            <a:off x="822960" y="1554480"/>
-            <a:ext cx="6675120" cy="4754880"/>
+            <a:off x="822960" y="1600200"/>
+            <a:ext cx="5669280" cy="4206240"/>
           </a:xfrm>
           <a:prstGeom prst="rect">
             <a:avLst/>
@@ -6044,7 +6157,7 @@
                 </a:solidFill>
                 <a:latin typeface="Calibri"/>
               </a:rPr>
-              <a:t>One quick round, one sentence each — a parent starts</a:t>
+              <a:t>We close the way we opened — the container, six steps:</a:t>
             </a:r>
           </a:p>
           <a:p>
@@ -6054,22 +6167,22 @@
               </a:spcAft>
             </a:pPr>
             <a:r>
-              <a:rPr sz="2200" b="1" i="0">
+              <a:rPr sz="2000" b="1" i="0">
                 <a:solidFill>
                   <a:srgbClr val="97BC62"/>
                 </a:solidFill>
                 <a:latin typeface="Calibri"/>
               </a:rPr>
-              <a:t>–  </a:t>
-            </a:r>
-            <a:r>
-              <a:rPr sz="2200" b="0" i="1">
+              <a:t>1   </a:t>
+            </a:r>
+            <a:r>
+              <a:rPr sz="2000" b="0" i="0">
                 <a:solidFill>
                   <a:srgbClr val="222B22"/>
                 </a:solidFill>
                 <a:latin typeface="Calibri"/>
               </a:rPr>
-              <a:t>“One thing I noticed this week when I asked the morning question …”</a:t>
+              <a:t>Stand again — same circle, same posture as the open</a:t>
             </a:r>
           </a:p>
           <a:p>
@@ -6079,72 +6192,209 @@
               </a:spcAft>
             </a:pPr>
             <a:r>
-              <a:rPr sz="2200" b="1" i="0">
+              <a:rPr sz="2000" b="1" i="0">
                 <a:solidFill>
                   <a:srgbClr val="97BC62"/>
                 </a:solidFill>
                 <a:latin typeface="Calibri"/>
               </a:rPr>
-              <a:t>–  </a:t>
-            </a:r>
-            <a:r>
-              <a:rPr sz="2200" b="0" i="0">
+              <a:t>2   </a:t>
+            </a:r>
+            <a:r>
+              <a:rPr sz="2000" b="0" i="0">
                 <a:solidFill>
                   <a:srgbClr val="222B22"/>
                 </a:solidFill>
                 <a:latin typeface="Calibri"/>
               </a:rPr>
-              <a:t>Or one thing about the practice itself — “I forgot it three days running” is a real answer</a:t>
-            </a:r>
-          </a:p>
-          <a:p>
-            <a:pPr marL="274320" indent="-274320">
+              <a:t>One-word landing — compare it to your opening word</a:t>
+            </a:r>
+          </a:p>
+          <a:p>
+            <a:pPr marL="685800" indent="-274320">
               <a:spcAft>
-                <a:spcPts val="900"/>
+                <a:spcPts val="700"/>
               </a:spcAft>
             </a:pPr>
             <a:r>
-              <a:rPr sz="2200" b="1" i="0">
+              <a:rPr sz="2000" b="1" i="0">
                 <a:solidFill>
                   <a:srgbClr val="97BC62"/>
                 </a:solidFill>
                 <a:latin typeface="Calibri"/>
               </a:rPr>
-              <a:t>•  </a:t>
-            </a:r>
-            <a:r>
-              <a:rPr sz="2200" b="0" i="0">
+              <a:t>3   </a:t>
+            </a:r>
+            <a:r>
+              <a:rPr sz="2000" b="0" i="0">
                 <a:solidFill>
                   <a:srgbClr val="222B22"/>
                 </a:solidFill>
                 <a:latin typeface="Calibri"/>
               </a:rPr>
-              <a:t>No grades, no lectures — honesty over performance</a:t>
-            </a:r>
-          </a:p>
-          <a:p>
-            <a:pPr marL="274320" indent="-274320">
+              <a:t>The one thing you are taking from tonight</a:t>
+            </a:r>
+          </a:p>
+          <a:p>
+            <a:pPr marL="685800" indent="-274320">
               <a:spcAft>
-                <a:spcPts val="900"/>
+                <a:spcPts val="700"/>
               </a:spcAft>
             </a:pPr>
             <a:r>
-              <a:rPr sz="2200" b="1" i="0">
+              <a:rPr sz="2000" b="1" i="0">
                 <a:solidFill>
                   <a:srgbClr val="97BC62"/>
                 </a:solidFill>
                 <a:latin typeface="Calibri"/>
               </a:rPr>
-              <a:t>•  </a:t>
-            </a:r>
-            <a:r>
-              <a:rPr sz="2200" b="0" i="0">
+              <a:t>4   </a:t>
+            </a:r>
+            <a:r>
+              <a:rPr sz="2000" b="0" i="0">
                 <a:solidFill>
                   <a:srgbClr val="222B22"/>
                 </a:solidFill>
                 <a:latin typeface="Calibri"/>
               </a:rPr>
-              <a:t>Missed it? “Thanks for the honesty. Pick it back up tomorrow.”</a:t>
+              <a:t>The one practice — committed aloud, or modified to one you will actually keep</a:t>
+            </a:r>
+          </a:p>
+          <a:p>
+            <a:pPr marL="685800" indent="-274320">
+              <a:spcAft>
+                <a:spcPts val="700"/>
+              </a:spcAft>
+            </a:pPr>
+            <a:r>
+              <a:rPr sz="2000" b="1" i="0">
+                <a:solidFill>
+                  <a:srgbClr val="97BC62"/>
+                </a:solidFill>
+                <a:latin typeface="Calibri"/>
+              </a:rPr>
+              <a:t>5   </a:t>
+            </a:r>
+            <a:r>
+              <a:rPr sz="2000" b="0" i="0">
+                <a:solidFill>
+                  <a:srgbClr val="222B22"/>
+                </a:solidFill>
+                <a:latin typeface="Calibri"/>
+              </a:rPr>
+              <a:t>Blessings — specific, witnessed, short</a:t>
+            </a:r>
+          </a:p>
+          <a:p>
+            <a:pPr marL="685800" indent="-274320">
+              <a:spcAft>
+                <a:spcPts val="700"/>
+              </a:spcAft>
+            </a:pPr>
+            <a:r>
+              <a:rPr sz="2000" b="1" i="0">
+                <a:solidFill>
+                  <a:srgbClr val="97BC62"/>
+                </a:solidFill>
+                <a:latin typeface="Calibri"/>
+              </a:rPr>
+              <a:t>6   </a:t>
+            </a:r>
+            <a:r>
+              <a:rPr sz="2000" b="0" i="0">
+                <a:solidFill>
+                  <a:srgbClr val="222B22"/>
+                </a:solidFill>
+                <a:latin typeface="Calibri"/>
+              </a:rPr>
+              <a:t>Closing prayer — and the Aaronic blessing, spoken over each other, face to face</a:t>
+            </a:r>
+          </a:p>
+        </p:txBody>
+      </p:sp>
+      <p:sp>
+        <p:nvSpPr>
+          <p:cNvPr id="6" name="TextBox 6"/>
+          <p:cNvSpPr txBox="1"/>
+          <p:nvPr/>
+        </p:nvSpPr>
+        <p:spPr>
+          <a:xfrm>
+            <a:off x="6766560" y="1737360"/>
+            <a:ext cx="4663440" cy="3657600"/>
+          </a:xfrm>
+          <a:prstGeom prst="rect">
+            <a:avLst/>
+          </a:prstGeom>
+          <a:solidFill>
+            <a:srgbClr val="F1F6EC"/>
+          </a:solidFill>
+        </p:spPr>
+        <p:txBody>
+          <a:bodyPr wrap="square" lIns="91440" tIns="91440" rIns="91440" bIns="91440" anchor="ctr"/>
+          <a:lstStyle/>
+          <a:p>
+            <a:pPr>
+              <a:spcAft>
+                <a:spcPts val="1000"/>
+              </a:spcAft>
+            </a:pPr>
+            <a:r>
+              <a:rPr sz="1200" b="1" i="0">
+                <a:solidFill>
+                  <a:srgbClr val="97BC62"/>
+                </a:solidFill>
+                <a:latin typeface="Calibri"/>
+              </a:rPr>
+              <a:t>THE AARONIC BLESSING — NUMBERS 6:24–26</a:t>
+            </a:r>
+          </a:p>
+          <a:p>
+            <a:pPr>
+              <a:spcAft>
+                <a:spcPts val="700"/>
+              </a:spcAft>
+            </a:pPr>
+            <a:r>
+              <a:rPr sz="2400" b="0" i="1">
+                <a:solidFill>
+                  <a:srgbClr val="222B22"/>
+                </a:solidFill>
+                <a:latin typeface="Cambria"/>
+              </a:rPr>
+              <a:t>“The Lord bless you and keep you;</a:t>
+            </a:r>
+          </a:p>
+          <a:p>
+            <a:pPr>
+              <a:spcAft>
+                <a:spcPts val="700"/>
+              </a:spcAft>
+            </a:pPr>
+            <a:r>
+              <a:rPr sz="2400" b="0" i="1">
+                <a:solidFill>
+                  <a:srgbClr val="222B22"/>
+                </a:solidFill>
+                <a:latin typeface="Cambria"/>
+              </a:rPr>
+              <a:t>the Lord make his face to shine upon you, and be gracious to you;</a:t>
+            </a:r>
+          </a:p>
+          <a:p>
+            <a:pPr>
+              <a:spcAft>
+                <a:spcPts val="700"/>
+              </a:spcAft>
+            </a:pPr>
+            <a:r>
+              <a:rPr sz="2400" b="0" i="1">
+                <a:solidFill>
+                  <a:srgbClr val="222B22"/>
+                </a:solidFill>
+                <a:latin typeface="Cambria"/>
+              </a:rPr>
+              <a:t>the Lord lift up his countenance upon you, and give you peace.”</a:t>
             </a:r>
           </a:p>
         </p:txBody>
@@ -6171,7 +6421,7 @@
           <a:p>
             <a:pPr algn="r"/>
             <a:r>
-              <a:t>24</a:t>
+              <a:t>33</a:t>
             </a:r>
             <a:endParaRPr sz="1000" b="1">
               <a:solidFill>
@@ -6179,89 +6429,6 @@
               </a:solidFill>
               <a:latin typeface="Calibri"/>
             </a:endParaRPr>
-          </a:p>
-        </p:txBody>
-      </p:sp>
-      <p:pic>
-        <p:nvPicPr>
-          <p:cNvPr id="32" name="Picture 32" descr="trail cairn - the weekly check-in"/>
-          <p:cNvPicPr>
-            <a:picLocks noChangeAspect="1"/>
-          </p:cNvPicPr>
-          <p:nvPr/>
-        </p:nvPicPr>
-        <p:blipFill>
-          <a:blip r:embed="rId3"/>
-          <a:stretch>
-            <a:fillRect/>
-          </a:stretch>
-        </p:blipFill>
-        <p:spPr>
-          <a:xfrm>
-            <a:off x="8103612" y="1463040"/>
-            <a:ext cx="3262379" cy="4892040"/>
-          </a:xfrm>
-          <a:prstGeom prst="rect">
-            <a:avLst/>
-          </a:prstGeom>
-          <a:ln w="76200">
-            <a:solidFill>
-              <a:srgbClr val="FFFFFF"/>
-            </a:solidFill>
-          </a:ln>
-          <a:effectLst>
-            <a:outerShdw blurRad="63500" dist="25400" dir="5400000" rotWithShape="0">
-              <a:srgbClr val="000000">
-                <a:alpha val="35000"/>
-              </a:srgbClr>
-            </a:outerShdw>
-          </a:effectLst>
-        </p:spPr>
-      </p:pic>
-      <p:sp>
-        <p:nvSpPr>
-          <p:cNvPr id="91" name="JoshuaCard"/>
-          <p:cNvSpPr txBox="1"/>
-          <p:nvPr/>
-        </p:nvSpPr>
-        <p:spPr>
-          <a:xfrm>
-            <a:off x="822960" y="5230368"/>
-            <a:ext cx="6675120" cy="1078992"/>
-          </a:xfrm>
-          <a:prstGeom prst="rect">
-            <a:avLst/>
-          </a:prstGeom>
-          <a:solidFill>
-            <a:srgbClr val="F1F6EC"/>
-          </a:solidFill>
-        </p:spPr>
-        <p:txBody>
-          <a:bodyPr wrap="square" lIns="137160" tIns="73152" rIns="137160" bIns="73152" anchor="ctr"/>
-          <a:lstStyle/>
-          <a:p>
-            <a:pPr algn="l"/>
-            <a:r>
-              <a:rPr lang="en-US" sz="2400" i="1">
-                <a:solidFill>
-                  <a:srgbClr val="222B22"/>
-                </a:solidFill>
-                <a:latin typeface="Cambria"/>
-              </a:rPr>
-              <a:t>“When your children ask their fathers in times to come, ‘What do these stones mean?’”</a:t>
-            </a:r>
-          </a:p>
-          <a:p>
-            <a:pPr algn="l"/>
-            <a:r>
-              <a:rPr lang="en-US" sz="1100" b="1">
-                <a:solidFill>
-                  <a:srgbClr val="97BC62"/>
-                </a:solidFill>
-                <a:latin typeface="Calibri"/>
-              </a:rPr>
-              <a:t>— JOSHUA 4:21 (ESV)</a:t>
-            </a:r>
           </a:p>
         </p:txBody>
       </p:sp>
@@ -6273,7 +6440,596 @@
 </p:sld>
 </file>
 
-<file path=ppt/slides/slide25.xml><?xml version="1.0" encoding="utf-8"?>
+<file path=ppt/slides/slide15.xml><?xml version="1.0" encoding="utf-8"?>
+<p:sld xmlns:a="http://schemas.openxmlformats.org/drawingml/2006/main" xmlns:p="http://schemas.openxmlformats.org/presentationml/2006/main" xmlns:r="http://schemas.openxmlformats.org/officeDocument/2006/relationships">
+  <p:cSld>
+    <p:spTree>
+      <p:nvGrpSpPr>
+        <p:cNvPr id="1" name=""/>
+        <p:cNvGrpSpPr/>
+        <p:nvPr/>
+      </p:nvGrpSpPr>
+      <p:grpSpPr/>
+      <p:sp>
+        <p:nvSpPr>
+          <p:cNvPr id="2" name="Rectangle 1"/>
+          <p:cNvSpPr/>
+          <p:nvPr/>
+        </p:nvSpPr>
+        <p:spPr>
+          <a:xfrm>
+            <a:off x="0" y="0"/>
+            <a:ext cx="12192000" cy="6858000"/>
+          </a:xfrm>
+          <a:prstGeom prst="rect">
+            <a:avLst/>
+          </a:prstGeom>
+          <a:solidFill>
+            <a:srgbClr val="FFFFFF"/>
+          </a:solidFill>
+          <a:ln>
+            <a:noFill/>
+          </a:ln>
+          <a:effectLst/>
+        </p:spPr>
+        <p:style>
+          <a:lnRef idx="1">
+            <a:schemeClr val="accent1"/>
+          </a:lnRef>
+          <a:fillRef idx="3">
+            <a:schemeClr val="accent1"/>
+          </a:fillRef>
+          <a:effectRef idx="2">
+            <a:schemeClr val="accent1"/>
+          </a:effectRef>
+          <a:fontRef idx="minor">
+            <a:schemeClr val="lt1"/>
+          </a:fontRef>
+        </p:style>
+        <p:txBody>
+          <a:bodyPr rtlCol="0" anchor="ctr"/>
+          <a:lstStyle/>
+          <a:p>
+            <a:pPr algn="ctr"/>
+          </a:p>
+        </p:txBody>
+      </p:sp>
+      <p:sp>
+        <p:nvSpPr>
+          <p:cNvPr id="3" name="TextBox 2"/>
+          <p:cNvSpPr txBox="1"/>
+          <p:nvPr/>
+        </p:nvSpPr>
+        <p:spPr>
+          <a:xfrm>
+            <a:off x="822960" y="502920"/>
+            <a:ext cx="10515600" cy="822960"/>
+          </a:xfrm>
+          <a:prstGeom prst="rect">
+            <a:avLst/>
+          </a:prstGeom>
+          <a:noFill/>
+        </p:spPr>
+        <p:txBody>
+          <a:bodyPr wrap="square">
+            <a:spAutoFit/>
+          </a:bodyPr>
+          <a:lstStyle/>
+          <a:p>
+            <a:r>
+              <a:rPr sz="2800" b="1">
+                <a:solidFill>
+                  <a:srgbClr val="2C5F2D"/>
+                </a:solidFill>
+                <a:latin typeface="Cambria"/>
+              </a:rPr>
+              <a:t>Where We Are — the Four Connects</a:t>
+            </a:r>
+          </a:p>
+        </p:txBody>
+      </p:sp>
+      <p:pic>
+        <p:nvPicPr>
+          <p:cNvPr id="4" name="Picture 3" descr="four-connects.png"/>
+          <p:cNvPicPr>
+            <a:picLocks noChangeAspect="1"/>
+          </p:cNvPicPr>
+          <p:nvPr/>
+        </p:nvPicPr>
+        <p:blipFill>
+          <a:blip r:embed="rId2"/>
+          <a:stretch>
+            <a:fillRect/>
+          </a:stretch>
+        </p:blipFill>
+        <p:spPr>
+          <a:xfrm>
+            <a:off x="932688" y="1645920"/>
+            <a:ext cx="10332720" cy="3708663"/>
+          </a:xfrm>
+          <a:prstGeom prst="rect">
+            <a:avLst/>
+          </a:prstGeom>
+        </p:spPr>
+      </p:pic>
+      <p:sp>
+        <p:nvSpPr>
+          <p:cNvPr id="5" name="TextBox 4"/>
+          <p:cNvSpPr txBox="1"/>
+          <p:nvPr/>
+        </p:nvSpPr>
+        <p:spPr>
+          <a:xfrm>
+            <a:off x="822960" y="5623560"/>
+            <a:ext cx="10515600" cy="914400"/>
+          </a:xfrm>
+          <a:prstGeom prst="rect">
+            <a:avLst/>
+          </a:prstGeom>
+          <a:noFill/>
+        </p:spPr>
+        <p:txBody>
+          <a:bodyPr wrap="square">
+            <a:spAutoFit/>
+          </a:bodyPr>
+          <a:lstStyle/>
+          <a:p>
+            <a:r>
+              <a:rPr sz="1800" b="0">
+                <a:solidFill>
+                  <a:srgbClr val="222B22"/>
+                </a:solidFill>
+                <a:latin typeface="Calibri"/>
+              </a:rPr>
+              <a:t>Session 2 stands in the first box — </a:t>
+            </a:r>
+            <a:r>
+              <a:rPr sz="1800" b="1">
+                <a:solidFill>
+                  <a:srgbClr val="2C5F2D"/>
+                </a:solidFill>
+                <a:latin typeface="Calibri"/>
+              </a:rPr>
+              <a:t>Connect with Self</a:t>
+            </a:r>
+            <a:r>
+              <a:rPr sz="1800" b="0">
+                <a:solidFill>
+                  <a:srgbClr val="222B22"/>
+                </a:solidFill>
+                <a:latin typeface="Calibri"/>
+              </a:rPr>
+              <a:t>. Each connection makes the next one real (Matt. 22:37–40).</a:t>
+            </a:r>
+          </a:p>
+        </p:txBody>
+      </p:sp>
+      <p:sp>
+        <p:nvSpPr>
+          <p:cNvPr id="90" name="SlideNum"/>
+          <p:cNvSpPr txBox="1"/>
+          <p:nvPr/>
+        </p:nvSpPr>
+        <p:spPr>
+          <a:xfrm>
+            <a:off x="11384280" y="6446520"/>
+            <a:ext cx="640080" cy="292608"/>
+          </a:xfrm>
+          <a:prstGeom prst="rect">
+            <a:avLst/>
+          </a:prstGeom>
+          <a:noFill/>
+        </p:spPr>
+        <p:txBody>
+          <a:bodyPr wrap="none" lIns="0" tIns="0" rIns="45720" bIns="0" anchor="ctr"/>
+          <a:lstStyle/>
+          <a:p>
+            <a:pPr algn="r"/>
+            <a:r>
+              <a:t>21a</a:t>
+            </a:r>
+            <a:endParaRPr sz="1000" b="1">
+              <a:solidFill>
+                <a:srgbClr val="7A8A6E"/>
+              </a:solidFill>
+              <a:latin typeface="Calibri"/>
+            </a:endParaRPr>
+          </a:p>
+        </p:txBody>
+      </p:sp>
+    </p:spTree>
+  </p:cSld>
+  <p:clrMapOvr>
+    <a:masterClrMapping/>
+  </p:clrMapOvr>
+</p:sld>
+</file>
+
+<file path=ppt/slides/slide16.xml><?xml version="1.0" encoding="utf-8"?>
+<p:sld xmlns:a="http://schemas.openxmlformats.org/drawingml/2006/main" xmlns:p="http://schemas.openxmlformats.org/presentationml/2006/main" xmlns:r="http://schemas.openxmlformats.org/officeDocument/2006/relationships">
+  <p:cSld>
+    <p:spTree>
+      <p:nvGrpSpPr>
+        <p:cNvPr id="1" name=""/>
+        <p:cNvGrpSpPr/>
+        <p:nvPr/>
+      </p:nvGrpSpPr>
+      <p:grpSpPr/>
+      <p:sp>
+        <p:nvSpPr>
+          <p:cNvPr id="2" name="Rectangle 1"/>
+          <p:cNvSpPr/>
+          <p:nvPr/>
+        </p:nvSpPr>
+        <p:spPr>
+          <a:xfrm>
+            <a:off x="0" y="0"/>
+            <a:ext cx="12192000" cy="6858000"/>
+          </a:xfrm>
+          <a:prstGeom prst="rect">
+            <a:avLst/>
+          </a:prstGeom>
+          <a:solidFill>
+            <a:srgbClr val="FFFFFF"/>
+          </a:solidFill>
+          <a:ln>
+            <a:noFill/>
+          </a:ln>
+          <a:effectLst/>
+        </p:spPr>
+        <p:style>
+          <a:lnRef idx="1">
+            <a:schemeClr val="accent1"/>
+          </a:lnRef>
+          <a:fillRef idx="3">
+            <a:schemeClr val="accent1"/>
+          </a:fillRef>
+          <a:effectRef idx="2">
+            <a:schemeClr val="accent1"/>
+          </a:effectRef>
+          <a:fontRef idx="minor">
+            <a:schemeClr val="lt1"/>
+          </a:fontRef>
+        </p:style>
+        <p:txBody>
+          <a:bodyPr rtlCol="0" anchor="ctr"/>
+          <a:lstStyle/>
+          <a:p>
+            <a:pPr algn="ctr"/>
+          </a:p>
+        </p:txBody>
+      </p:sp>
+      <p:sp>
+        <p:nvSpPr>
+          <p:cNvPr id="3" name="TextBox 2"/>
+          <p:cNvSpPr txBox="1"/>
+          <p:nvPr/>
+        </p:nvSpPr>
+        <p:spPr>
+          <a:xfrm>
+            <a:off x="822960" y="502920"/>
+            <a:ext cx="10515600" cy="822960"/>
+          </a:xfrm>
+          <a:prstGeom prst="rect">
+            <a:avLst/>
+          </a:prstGeom>
+          <a:noFill/>
+        </p:spPr>
+        <p:txBody>
+          <a:bodyPr wrap="square">
+            <a:spAutoFit/>
+          </a:bodyPr>
+          <a:lstStyle/>
+          <a:p>
+            <a:r>
+              <a:rPr sz="2800" b="1">
+                <a:solidFill>
+                  <a:srgbClr val="2C5F2D"/>
+                </a:solidFill>
+                <a:latin typeface="Cambria"/>
+              </a:rPr>
+              <a:t>The Take-Home Sheet — the Daily Rhythm</a:t>
+            </a:r>
+          </a:p>
+        </p:txBody>
+      </p:sp>
+      <p:pic>
+        <p:nvPicPr>
+          <p:cNvPr id="4" name="Picture 3" descr="s2_part1.png"/>
+          <p:cNvPicPr>
+            <a:picLocks noChangeAspect="1"/>
+          </p:cNvPicPr>
+          <p:nvPr/>
+        </p:nvPicPr>
+        <p:blipFill>
+          <a:blip r:embed="rId2"/>
+          <a:stretch>
+            <a:fillRect/>
+          </a:stretch>
+        </p:blipFill>
+        <p:spPr>
+          <a:xfrm>
+            <a:off x="1798167" y="1463040"/>
+            <a:ext cx="8595360" cy="4039819"/>
+          </a:xfrm>
+          <a:prstGeom prst="rect">
+            <a:avLst/>
+          </a:prstGeom>
+          <a:ln w="12700">
+            <a:solidFill>
+              <a:srgbClr val="C8C8C8"/>
+            </a:solidFill>
+          </a:ln>
+        </p:spPr>
+      </p:pic>
+      <p:sp>
+        <p:nvSpPr>
+          <p:cNvPr id="5" name="TextBox 4"/>
+          <p:cNvSpPr txBox="1"/>
+          <p:nvPr/>
+        </p:nvSpPr>
+        <p:spPr>
+          <a:xfrm>
+            <a:off x="822960" y="6355080"/>
+            <a:ext cx="10515600" cy="411480"/>
+          </a:xfrm>
+          <a:prstGeom prst="rect">
+            <a:avLst/>
+          </a:prstGeom>
+          <a:noFill/>
+        </p:spPr>
+        <p:txBody>
+          <a:bodyPr wrap="square">
+            <a:spAutoFit/>
+          </a:bodyPr>
+          <a:lstStyle/>
+          <a:p>
+            <a:r>
+              <a:rPr sz="1400" i="1">
+                <a:solidFill>
+                  <a:srgbClr val="595959"/>
+                </a:solidFill>
+                <a:latin typeface="Calibri"/>
+              </a:rPr>
+              <a:t>Handed out now — this is the sheet in your hands.</a:t>
+            </a:r>
+          </a:p>
+        </p:txBody>
+      </p:sp>
+      <p:sp>
+        <p:nvSpPr>
+          <p:cNvPr id="90" name="SlideNum"/>
+          <p:cNvSpPr txBox="1"/>
+          <p:nvPr/>
+        </p:nvSpPr>
+        <p:spPr>
+          <a:xfrm>
+            <a:off x="11384280" y="6446520"/>
+            <a:ext cx="640080" cy="292608"/>
+          </a:xfrm>
+          <a:prstGeom prst="rect">
+            <a:avLst/>
+          </a:prstGeom>
+          <a:noFill/>
+        </p:spPr>
+        <p:txBody>
+          <a:bodyPr wrap="none" lIns="0" tIns="0" rIns="45720" bIns="0" anchor="ctr"/>
+          <a:lstStyle/>
+          <a:p>
+            <a:pPr algn="r"/>
+            <a:r>
+              <a:t>31</a:t>
+            </a:r>
+            <a:endParaRPr sz="1000" b="1">
+              <a:solidFill>
+                <a:srgbClr val="7A8A6E"/>
+              </a:solidFill>
+              <a:latin typeface="Calibri"/>
+            </a:endParaRPr>
+          </a:p>
+        </p:txBody>
+      </p:sp>
+    </p:spTree>
+  </p:cSld>
+  <p:clrMapOvr>
+    <a:masterClrMapping/>
+  </p:clrMapOvr>
+</p:sld>
+</file>
+
+<file path=ppt/slides/slide17.xml><?xml version="1.0" encoding="utf-8"?>
+<p:sld xmlns:a="http://schemas.openxmlformats.org/drawingml/2006/main" xmlns:p="http://schemas.openxmlformats.org/presentationml/2006/main" xmlns:r="http://schemas.openxmlformats.org/officeDocument/2006/relationships">
+  <p:cSld>
+    <p:spTree>
+      <p:nvGrpSpPr>
+        <p:cNvPr id="1" name=""/>
+        <p:cNvGrpSpPr/>
+        <p:nvPr/>
+      </p:nvGrpSpPr>
+      <p:grpSpPr/>
+      <p:sp>
+        <p:nvSpPr>
+          <p:cNvPr id="2" name="Rectangle 1"/>
+          <p:cNvSpPr/>
+          <p:nvPr/>
+        </p:nvSpPr>
+        <p:spPr>
+          <a:xfrm>
+            <a:off x="0" y="0"/>
+            <a:ext cx="12192000" cy="6858000"/>
+          </a:xfrm>
+          <a:prstGeom prst="rect">
+            <a:avLst/>
+          </a:prstGeom>
+          <a:solidFill>
+            <a:srgbClr val="FFFFFF"/>
+          </a:solidFill>
+          <a:ln>
+            <a:noFill/>
+          </a:ln>
+          <a:effectLst/>
+        </p:spPr>
+        <p:style>
+          <a:lnRef idx="1">
+            <a:schemeClr val="accent1"/>
+          </a:lnRef>
+          <a:fillRef idx="3">
+            <a:schemeClr val="accent1"/>
+          </a:fillRef>
+          <a:effectRef idx="2">
+            <a:schemeClr val="accent1"/>
+          </a:effectRef>
+          <a:fontRef idx="minor">
+            <a:schemeClr val="lt1"/>
+          </a:fontRef>
+        </p:style>
+        <p:txBody>
+          <a:bodyPr rtlCol="0" anchor="ctr"/>
+          <a:lstStyle/>
+          <a:p>
+            <a:pPr algn="ctr"/>
+          </a:p>
+        </p:txBody>
+      </p:sp>
+      <p:sp>
+        <p:nvSpPr>
+          <p:cNvPr id="3" name="TextBox 2"/>
+          <p:cNvSpPr txBox="1"/>
+          <p:nvPr/>
+        </p:nvSpPr>
+        <p:spPr>
+          <a:xfrm>
+            <a:off x="822960" y="502920"/>
+            <a:ext cx="10515600" cy="822960"/>
+          </a:xfrm>
+          <a:prstGeom prst="rect">
+            <a:avLst/>
+          </a:prstGeom>
+          <a:noFill/>
+        </p:spPr>
+        <p:txBody>
+          <a:bodyPr wrap="square">
+            <a:spAutoFit/>
+          </a:bodyPr>
+          <a:lstStyle/>
+          <a:p>
+            <a:r>
+              <a:rPr sz="2800" b="1">
+                <a:solidFill>
+                  <a:srgbClr val="2C5F2D"/>
+                </a:solidFill>
+                <a:latin typeface="Cambria"/>
+              </a:rPr>
+              <a:t>The Take-Home Sheet — the Four Parts</a:t>
+            </a:r>
+          </a:p>
+        </p:txBody>
+      </p:sp>
+      <p:pic>
+        <p:nvPicPr>
+          <p:cNvPr id="4" name="Picture 3" descr="s2_part2.png"/>
+          <p:cNvPicPr>
+            <a:picLocks noChangeAspect="1"/>
+          </p:cNvPicPr>
+          <p:nvPr/>
+        </p:nvPicPr>
+        <p:blipFill>
+          <a:blip r:embed="rId2"/>
+          <a:stretch>
+            <a:fillRect/>
+          </a:stretch>
+        </p:blipFill>
+        <p:spPr>
+          <a:xfrm>
+            <a:off x="2066004" y="1463040"/>
+            <a:ext cx="8059687" cy="4709160"/>
+          </a:xfrm>
+          <a:prstGeom prst="rect">
+            <a:avLst/>
+          </a:prstGeom>
+          <a:ln w="12700">
+            <a:solidFill>
+              <a:srgbClr val="C8C8C8"/>
+            </a:solidFill>
+          </a:ln>
+        </p:spPr>
+      </p:pic>
+      <p:sp>
+        <p:nvSpPr>
+          <p:cNvPr id="5" name="TextBox 4"/>
+          <p:cNvSpPr txBox="1"/>
+          <p:nvPr/>
+        </p:nvSpPr>
+        <p:spPr>
+          <a:xfrm>
+            <a:off x="822960" y="6355080"/>
+            <a:ext cx="10515600" cy="411480"/>
+          </a:xfrm>
+          <a:prstGeom prst="rect">
+            <a:avLst/>
+          </a:prstGeom>
+          <a:noFill/>
+        </p:spPr>
+        <p:txBody>
+          <a:bodyPr wrap="square">
+            <a:spAutoFit/>
+          </a:bodyPr>
+          <a:lstStyle/>
+          <a:p>
+            <a:r>
+              <a:rPr sz="1400" i="1">
+                <a:solidFill>
+                  <a:srgbClr val="595959"/>
+                </a:solidFill>
+                <a:latin typeface="Calibri"/>
+              </a:rPr>
+              <a:t>One practice at a time — and a partner expecting you at the end of week one.</a:t>
+            </a:r>
+          </a:p>
+        </p:txBody>
+      </p:sp>
+      <p:sp>
+        <p:nvSpPr>
+          <p:cNvPr id="90" name="SlideNum"/>
+          <p:cNvSpPr txBox="1"/>
+          <p:nvPr/>
+        </p:nvSpPr>
+        <p:spPr>
+          <a:xfrm>
+            <a:off x="11384280" y="6446520"/>
+            <a:ext cx="640080" cy="292608"/>
+          </a:xfrm>
+          <a:prstGeom prst="rect">
+            <a:avLst/>
+          </a:prstGeom>
+          <a:noFill/>
+        </p:spPr>
+        <p:txBody>
+          <a:bodyPr wrap="none" lIns="0" tIns="0" rIns="45720" bIns="0" anchor="ctr"/>
+          <a:lstStyle/>
+          <a:p>
+            <a:pPr algn="r"/>
+            <a:r>
+              <a:t>31a</a:t>
+            </a:r>
+            <a:endParaRPr sz="1000" b="1">
+              <a:solidFill>
+                <a:srgbClr val="7A8A6E"/>
+              </a:solidFill>
+              <a:latin typeface="Calibri"/>
+            </a:endParaRPr>
+          </a:p>
+        </p:txBody>
+      </p:sp>
+    </p:spTree>
+  </p:cSld>
+  <p:clrMapOvr>
+    <a:masterClrMapping/>
+  </p:clrMapOvr>
+</p:sld>
+</file>
+
+<file path=ppt/slides/slide2.xml><?xml version="1.0" encoding="utf-8"?>
 <p:sld xmlns:a="http://schemas.openxmlformats.org/drawingml/2006/main" xmlns:r="http://schemas.openxmlformats.org/officeDocument/2006/relationships" xmlns:p="http://schemas.openxmlformats.org/presentationml/2006/main">
   <p:cSld>
     <p:spTree>
@@ -6310,57 +7066,34 @@
           <a:ln>
             <a:noFill/>
           </a:ln>
-        </p:spPr>
-        <p:txBody>
-          <a:bodyPr/>
-          <a:lstStyle/>
-          <a:p>
+          <a:effectLst/>
+        </p:spPr>
+        <p:style>
+          <a:lnRef idx="1">
+            <a:schemeClr val="accent1"/>
+          </a:lnRef>
+          <a:fillRef idx="3">
+            <a:schemeClr val="accent1"/>
+          </a:fillRef>
+          <a:effectRef idx="2">
+            <a:schemeClr val="accent1"/>
+          </a:effectRef>
+          <a:fontRef idx="minor">
+            <a:schemeClr val="lt1"/>
+          </a:fontRef>
+        </p:style>
+        <p:txBody>
+          <a:bodyPr rtlCol="0" anchor="ctr"/>
+          <a:lstStyle/>
+          <a:p>
+            <a:pPr algn="ctr"/>
             <a:endParaRPr/>
-          </a:p>
-        </p:txBody>
-      </p:sp>
-      <p:sp>
-        <p:nvSpPr>
-          <p:cNvPr id="3" name="TextBox 2"/>
-          <p:cNvSpPr txBox="1"/>
-          <p:nvPr/>
-        </p:nvSpPr>
-        <p:spPr>
-          <a:xfrm>
-            <a:off x="822960" y="502920"/>
-            <a:ext cx="10515600" cy="822960"/>
-          </a:xfrm>
-          <a:prstGeom prst="rect">
-            <a:avLst/>
-          </a:prstGeom>
-          <a:noFill/>
-        </p:spPr>
-        <p:txBody>
-          <a:bodyPr wrap="square">
-            <a:spAutoFit/>
-          </a:bodyPr>
-          <a:lstStyle/>
-          <a:p>
-            <a:pPr algn="l">
-              <a:spcAft>
-                <a:spcPts val="600"/>
-              </a:spcAft>
-            </a:pPr>
-            <a:r>
-              <a:rPr sz="2800" b="1" i="0">
-                <a:solidFill>
-                  <a:srgbClr val="2C5F2D"/>
-                </a:solidFill>
-                <a:latin typeface="Cambria"/>
-              </a:rPr>
-              <a:t>Teaching — Mark 4 and the Four Soils</a:t>
-            </a:r>
           </a:p>
         </p:txBody>
       </p:sp>
       <p:pic>
         <p:nvPicPr>
-          <p:cNvPr id="5" name="Picture 4" descr="four soils diagram"/>
+          <p:cNvPr id="3" name="Picture 2" descr="wk02-soil.jpg"/>
           <p:cNvPicPr>
             <a:picLocks noChangeAspect="1"/>
           </p:cNvPicPr>
@@ -6374,8 +7107,8 @@
         </p:blipFill>
         <p:spPr>
           <a:xfrm>
-            <a:off x="822960" y="1737360"/>
-            <a:ext cx="10515600" cy="3771900"/>
+            <a:off x="6309360" y="1630118"/>
+            <a:ext cx="5394960" cy="3597763"/>
           </a:xfrm>
           <a:prstGeom prst="rect">
             <a:avLst/>
@@ -6396,14 +7129,14 @@
       </p:pic>
       <p:sp>
         <p:nvSpPr>
-          <p:cNvPr id="4" name="TextBox 4"/>
+          <p:cNvPr id="4" name="TextBox 3"/>
           <p:cNvSpPr txBox="1"/>
           <p:nvPr/>
         </p:nvSpPr>
         <p:spPr>
           <a:xfrm>
-            <a:off x="822960" y="5623560"/>
-            <a:ext cx="10515600" cy="640080"/>
+            <a:off x="822960" y="1828800"/>
+            <a:ext cx="5212080" cy="3291840"/>
           </a:xfrm>
           <a:prstGeom prst="rect">
             <a:avLst/>
@@ -6411,45 +7144,70 @@
           <a:noFill/>
         </p:spPr>
         <p:txBody>
-          <a:bodyPr wrap="square" lIns="91440" tIns="91440" rIns="91440" bIns="91440"/>
-          <a:lstStyle/>
-          <a:p>
-            <a:pPr>
+          <a:bodyPr wrap="square">
+            <a:spAutoFit/>
+          </a:bodyPr>
+          <a:lstStyle/>
+          <a:p>
+            <a:pPr algn="l">
               <a:spcAft>
-                <a:spcPts val="900"/>
+                <a:spcPts val="600"/>
               </a:spcAft>
             </a:pPr>
             <a:r>
-              <a:rPr sz="1800" b="0" i="0">
-                <a:solidFill>
-                  <a:srgbClr val="222B22"/>
-                </a:solidFill>
-                <a:latin typeface="Calibri"/>
-              </a:rPr>
-              <a:t>Read Mark 4:1–20 in full, slowly — all twenty verses, no commentary. </a:t>
-            </a:r>
-            <a:r>
               <a:rPr sz="1800" b="1" i="0">
                 <a:solidFill>
-                  <a:srgbClr val="222B22"/>
-                </a:solidFill>
-                <a:latin typeface="Calibri"/>
-              </a:rPr>
-              <a:t>Then the seed, recalled — sixty seconds. Then the four soils — and Paul’s mixed ground, next slide.</a:t>
-            </a:r>
-          </a:p>
-        </p:txBody>
-      </p:sp>
-      <p:sp>
-        <p:nvSpPr>
-          <p:cNvPr id="90" name="SlideNum"/>
+                  <a:srgbClr val="97BC62"/>
+                </a:solidFill>
+                <a:latin typeface="Calibri"/>
+              </a:rPr>
+              <a:t>SESSION 2</a:t>
+            </a:r>
+          </a:p>
+          <a:p>
+            <a:pPr algn="l">
+              <a:spcAft>
+                <a:spcPts val="1000"/>
+              </a:spcAft>
+            </a:pPr>
+            <a:r>
+              <a:rPr sz="3300" b="1" i="0">
+                <a:solidFill>
+                  <a:srgbClr val="2C5F2D"/>
+                </a:solidFill>
+                <a:latin typeface="Cambria"/>
+              </a:rPr>
+              <a:t>The Soil of Your Heart</a:t>
+            </a:r>
+          </a:p>
+          <a:p>
+            <a:pPr algn="l">
+              <a:spcAft>
+                <a:spcPts val="600"/>
+              </a:spcAft>
+            </a:pPr>
+            <a:r>
+              <a:rPr sz="1800" b="0" i="1">
+                <a:solidFill>
+                  <a:srgbClr val="595959"/>
+                </a:solidFill>
+                <a:latin typeface="Calibri"/>
+              </a:rPr>
+              <a:t>The Heart Soil diagnostic from Mark 4; beginning Connecting with Self</a:t>
+            </a:r>
+          </a:p>
+        </p:txBody>
+      </p:sp>
+      <p:sp>
+        <p:nvSpPr>
+          <p:cNvPr id="5" name="TextBox 4"/>
           <p:cNvSpPr txBox="1"/>
           <p:nvPr/>
         </p:nvSpPr>
         <p:spPr>
           <a:xfrm>
-            <a:off x="11384280" y="6446520"/>
-            <a:ext cx="640080" cy="292608"/>
+            <a:off x="822960" y="6126480"/>
+            <a:ext cx="7315200" cy="457200"/>
           </a:xfrm>
           <a:prstGeom prst="rect">
             <a:avLst/>
@@ -6457,12 +7215,51 @@
           <a:noFill/>
         </p:spPr>
         <p:txBody>
+          <a:bodyPr wrap="square">
+            <a:spAutoFit/>
+          </a:bodyPr>
+          <a:lstStyle/>
+          <a:p>
+            <a:pPr algn="l">
+              <a:spcAft>
+                <a:spcPts val="600"/>
+              </a:spcAft>
+            </a:pPr>
+            <a:r>
+              <a:rPr sz="1800" b="0" i="0">
+                <a:solidFill>
+                  <a:srgbClr val="595959"/>
+                </a:solidFill>
+                <a:latin typeface="Calibri"/>
+              </a:rPr>
+              <a:t>Quarter 1: Connect with Self &amp; Others</a:t>
+            </a:r>
+          </a:p>
+        </p:txBody>
+      </p:sp>
+      <p:sp>
+        <p:nvSpPr>
+          <p:cNvPr id="90" name="SlideNum"/>
+          <p:cNvSpPr txBox="1"/>
+          <p:nvPr/>
+        </p:nvSpPr>
+        <p:spPr>
+          <a:xfrm>
+            <a:off x="11384280" y="6446520"/>
+            <a:ext cx="640080" cy="292608"/>
+          </a:xfrm>
+          <a:prstGeom prst="rect">
+            <a:avLst/>
+          </a:prstGeom>
+          <a:noFill/>
+        </p:spPr>
+        <p:txBody>
           <a:bodyPr wrap="none" lIns="0" tIns="0" rIns="45720" bIns="0" anchor="ctr"/>
           <a:lstStyle/>
           <a:p>
             <a:pPr algn="r"/>
             <a:r>
-              <a:t>25</a:t>
+              <a:t>21</a:t>
             </a:r>
             <a:endParaRPr sz="1000" b="1">
               <a:solidFill>
@@ -6481,7 +7278,7 @@
 </p:sld>
 </file>
 
-<file path=ppt/slides/slide26.xml><?xml version="1.0" encoding="utf-8"?>
+<file path=ppt/slides/slide3.xml><?xml version="1.0" encoding="utf-8"?>
 <p:sld xmlns:a="http://schemas.openxmlformats.org/drawingml/2006/main" xmlns:r="http://schemas.openxmlformats.org/officeDocument/2006/relationships" xmlns:p="http://schemas.openxmlformats.org/presentationml/2006/main">
   <p:cSld>
     <p:spTree>
@@ -6518,11 +7315,27 @@
           <a:ln>
             <a:noFill/>
           </a:ln>
-        </p:spPr>
-        <p:txBody>
-          <a:bodyPr/>
-          <a:lstStyle/>
-          <a:p>
+          <a:effectLst/>
+        </p:spPr>
+        <p:style>
+          <a:lnRef idx="1">
+            <a:schemeClr val="accent1"/>
+          </a:lnRef>
+          <a:fillRef idx="3">
+            <a:schemeClr val="accent1"/>
+          </a:fillRef>
+          <a:effectRef idx="2">
+            <a:schemeClr val="accent1"/>
+          </a:effectRef>
+          <a:fontRef idx="minor">
+            <a:schemeClr val="lt1"/>
+          </a:fontRef>
+        </p:style>
+        <p:txBody>
+          <a:bodyPr rtlCol="0" anchor="ctr"/>
+          <a:lstStyle/>
+          <a:p>
+            <a:pPr algn="ctr"/>
             <a:endParaRPr/>
           </a:p>
         </p:txBody>
@@ -6561,21 +7374,21 @@
                 </a:solidFill>
                 <a:latin typeface="Cambria"/>
               </a:rPr>
-              <a:t>Paul’s Mixed Ground — Romans 7</a:t>
-            </a:r>
-          </a:p>
-        </p:txBody>
-      </p:sp>
-      <p:sp>
-        <p:nvSpPr>
-          <p:cNvPr id="90" name="SlideNum"/>
+              <a:t>Session 2 — Tonight’s Road</a:t>
+            </a:r>
+          </a:p>
+        </p:txBody>
+      </p:sp>
+      <p:sp>
+        <p:nvSpPr>
+          <p:cNvPr id="4" name="TextBox 3"/>
           <p:cNvSpPr txBox="1"/>
           <p:nvPr/>
         </p:nvSpPr>
         <p:spPr>
           <a:xfrm>
-            <a:off x="11384280" y="6446520"/>
-            <a:ext cx="640080" cy="292608"/>
+            <a:off x="822960" y="1508760"/>
+            <a:ext cx="7040880" cy="4503797"/>
           </a:xfrm>
           <a:prstGeom prst="rect">
             <a:avLst/>
@@ -6583,12 +7396,235 @@
           <a:noFill/>
         </p:spPr>
         <p:txBody>
+          <a:bodyPr wrap="square">
+            <a:spAutoFit/>
+          </a:bodyPr>
+          <a:lstStyle/>
+          <a:p>
+            <a:pPr>
+              <a:spcAft>
+                <a:spcPts val="800"/>
+              </a:spcAft>
+            </a:pPr>
+            <a:r>
+              <a:rPr sz="2400" b="1" dirty="0">
+                <a:solidFill>
+                  <a:srgbClr val="97BC62"/>
+                </a:solidFill>
+                <a:latin typeface="Calibri"/>
+              </a:rPr>
+              <a:t>1   </a:t>
+            </a:r>
+            <a:r>
+              <a:rPr sz="2400" dirty="0">
+                <a:solidFill>
+                  <a:srgbClr val="222B22"/>
+                </a:solidFill>
+                <a:latin typeface="Calibri"/>
+              </a:rPr>
+              <a:t>Opening container — full eight-step protocol</a:t>
+            </a:r>
+          </a:p>
+          <a:p>
+            <a:pPr>
+              <a:spcAft>
+                <a:spcPts val="800"/>
+              </a:spcAft>
+            </a:pPr>
+            <a:r>
+              <a:rPr sz="2400" b="1" dirty="0">
+                <a:solidFill>
+                  <a:srgbClr val="97BC62"/>
+                </a:solidFill>
+                <a:latin typeface="Calibri"/>
+              </a:rPr>
+              <a:t>2   </a:t>
+            </a:r>
+            <a:r>
+              <a:rPr sz="2400" dirty="0">
+                <a:solidFill>
+                  <a:srgbClr val="222B22"/>
+                </a:solidFill>
+                <a:latin typeface="Calibri"/>
+              </a:rPr>
+              <a:t>Check-in on Week 1 practice</a:t>
+            </a:r>
+          </a:p>
+          <a:p>
+            <a:pPr>
+              <a:spcAft>
+                <a:spcPts val="800"/>
+              </a:spcAft>
+            </a:pPr>
+            <a:r>
+              <a:rPr sz="2400" b="1" dirty="0">
+                <a:solidFill>
+                  <a:srgbClr val="97BC62"/>
+                </a:solidFill>
+                <a:latin typeface="Calibri"/>
+              </a:rPr>
+              <a:t>3   </a:t>
+            </a:r>
+            <a:r>
+              <a:rPr sz="2400" dirty="0">
+                <a:solidFill>
+                  <a:srgbClr val="222B22"/>
+                </a:solidFill>
+                <a:latin typeface="Calibri"/>
+              </a:rPr>
+              <a:t>Teaching: the seed recalled; Mark 4, the soils, and Paul’s mixed ground</a:t>
+            </a:r>
+          </a:p>
+          <a:p>
+            <a:pPr>
+              <a:spcAft>
+                <a:spcPts val="800"/>
+              </a:spcAft>
+            </a:pPr>
+            <a:r>
+              <a:rPr sz="2400" b="1" dirty="0">
+                <a:solidFill>
+                  <a:srgbClr val="97BC62"/>
+                </a:solidFill>
+                <a:latin typeface="Calibri"/>
+              </a:rPr>
+              <a:t>4   </a:t>
+            </a:r>
+            <a:r>
+              <a:rPr sz="2400" dirty="0">
+                <a:solidFill>
+                  <a:srgbClr val="222B22"/>
+                </a:solidFill>
+                <a:latin typeface="Calibri"/>
+              </a:rPr>
+              <a:t>pairs: question zero, then the Heart Soil diagnostic</a:t>
+            </a:r>
+          </a:p>
+          <a:p>
+            <a:pPr>
+              <a:spcAft>
+                <a:spcPts val="800"/>
+              </a:spcAft>
+            </a:pPr>
+            <a:r>
+              <a:rPr sz="2400" b="1" dirty="0">
+                <a:solidFill>
+                  <a:srgbClr val="97BC62"/>
+                </a:solidFill>
+                <a:latin typeface="Calibri"/>
+              </a:rPr>
+              <a:t>5   </a:t>
+            </a:r>
+            <a:r>
+              <a:rPr sz="2400" dirty="0">
+                <a:solidFill>
+                  <a:srgbClr val="222B22"/>
+                </a:solidFill>
+                <a:latin typeface="Calibri"/>
+              </a:rPr>
+              <a:t>Re-merge — shared debrief; Mark 4:20 re-read</a:t>
+            </a:r>
+          </a:p>
+          <a:p>
+            <a:pPr>
+              <a:spcAft>
+                <a:spcPts val="800"/>
+              </a:spcAft>
+            </a:pPr>
+            <a:r>
+              <a:rPr sz="2400" b="1" dirty="0">
+                <a:solidFill>
+                  <a:srgbClr val="97BC62"/>
+                </a:solidFill>
+                <a:latin typeface="Calibri"/>
+              </a:rPr>
+              <a:t>6   </a:t>
+            </a:r>
+            <a:r>
+              <a:rPr sz="2400" dirty="0">
+                <a:solidFill>
+                  <a:srgbClr val="222B22"/>
+                </a:solidFill>
+                <a:latin typeface="Calibri"/>
+              </a:rPr>
+              <a:t>Homework commissioning — handout + check-in partners</a:t>
+            </a:r>
+          </a:p>
+          <a:p>
+            <a:pPr>
+              <a:spcAft>
+                <a:spcPts val="800"/>
+              </a:spcAft>
+            </a:pPr>
+            <a:r>
+              <a:rPr sz="2400" b="1" dirty="0">
+                <a:solidFill>
+                  <a:srgbClr val="97BC62"/>
+                </a:solidFill>
+                <a:latin typeface="Calibri"/>
+              </a:rPr>
+              <a:t>7   </a:t>
+            </a:r>
+            <a:r>
+              <a:rPr sz="2400" dirty="0">
+                <a:solidFill>
+                  <a:srgbClr val="222B22"/>
+                </a:solidFill>
+                <a:latin typeface="Calibri"/>
+              </a:rPr>
+              <a:t>The Leader Feedback Round — both leaders</a:t>
+            </a:r>
+          </a:p>
+          <a:p>
+            <a:pPr>
+              <a:spcAft>
+                <a:spcPts val="800"/>
+              </a:spcAft>
+            </a:pPr>
+            <a:r>
+              <a:rPr sz="2400" b="1" dirty="0">
+                <a:solidFill>
+                  <a:srgbClr val="97BC62"/>
+                </a:solidFill>
+                <a:latin typeface="Calibri"/>
+              </a:rPr>
+              <a:t>8   </a:t>
+            </a:r>
+            <a:r>
+              <a:rPr sz="2400" dirty="0">
+                <a:solidFill>
+                  <a:srgbClr val="222B22"/>
+                </a:solidFill>
+                <a:latin typeface="Calibri"/>
+              </a:rPr>
+              <a:t>Closing container + Aaronic blessing</a:t>
+            </a:r>
+          </a:p>
+        </p:txBody>
+      </p:sp>
+      <p:sp>
+        <p:nvSpPr>
+          <p:cNvPr id="90" name="SlideNum"/>
+          <p:cNvSpPr txBox="1"/>
+          <p:nvPr/>
+        </p:nvSpPr>
+        <p:spPr>
+          <a:xfrm>
+            <a:off x="11384280" y="6446520"/>
+            <a:ext cx="640080" cy="292608"/>
+          </a:xfrm>
+          <a:prstGeom prst="rect">
+            <a:avLst/>
+          </a:prstGeom>
+          <a:noFill/>
+        </p:spPr>
+        <p:txBody>
           <a:bodyPr wrap="none" lIns="0" tIns="0" rIns="45720" bIns="0" anchor="ctr"/>
           <a:lstStyle/>
           <a:p>
             <a:pPr algn="r"/>
             <a:r>
-              <a:t>26</a:t>
+              <a:t>22</a:t>
             </a:r>
             <a:endParaRPr sz="1000" b="1">
               <a:solidFill>
@@ -6599,149 +7635,42 @@
           </a:p>
         </p:txBody>
       </p:sp>
-      <p:sp>
-        <p:nvSpPr>
-          <p:cNvPr id="260" name="StruggleCard"/>
-          <p:cNvSpPr txBox="1"/>
+      <p:pic>
+        <p:nvPicPr>
+          <p:cNvPr id="31" name="Picture 31" descr="the open container bowl"/>
+          <p:cNvPicPr>
+            <a:picLocks noChangeAspect="1"/>
+          </p:cNvPicPr>
           <p:nvPr/>
-        </p:nvSpPr>
-        <p:spPr>
-          <a:xfrm>
-            <a:off x="822960" y="1508760"/>
-            <a:ext cx="6035040" cy="3108960"/>
+        </p:nvPicPr>
+        <p:blipFill>
+          <a:blip r:embed="rId3"/>
+          <a:stretch>
+            <a:fillRect/>
+          </a:stretch>
+        </p:blipFill>
+        <p:spPr>
+          <a:xfrm>
+            <a:off x="8001000" y="1554480"/>
+            <a:ext cx="3017520" cy="4526280"/>
           </a:xfrm>
           <a:prstGeom prst="rect">
             <a:avLst/>
           </a:prstGeom>
-          <a:solidFill>
-            <a:srgbClr val="F1F6EC"/>
-          </a:solidFill>
-        </p:spPr>
-        <p:txBody>
-          <a:bodyPr wrap="square" lIns="137160" tIns="91440" rIns="137160" bIns="91440" anchor="ctr"/>
-          <a:lstStyle/>
-          <a:p>
-            <a:pPr>
-              <a:spcAft>
-                <a:spcPts val="800"/>
-              </a:spcAft>
-            </a:pPr>
-            <a:r>
-              <a:rPr sz="1200" b="1" i="0" dirty="0">
-                <a:solidFill>
-                  <a:srgbClr val="97BC62"/>
-                </a:solidFill>
-                <a:latin typeface="Calibri"/>
-              </a:rPr>
-              <a:t>ROMANS 7:15, 18–19</a:t>
-            </a:r>
-          </a:p>
-          <a:p>
-            <a:pPr>
-              <a:spcAft>
-                <a:spcPts val="400"/>
-              </a:spcAft>
-            </a:pPr>
-            <a:r>
-              <a:rPr sz="2400" b="0" i="1" dirty="0">
-                <a:solidFill>
-                  <a:srgbClr val="222B22"/>
-                </a:solidFill>
-                <a:latin typeface="Cambria"/>
-              </a:rPr>
-              <a:t>“For I do not understand my own actions. For I do not do what I want, but I do the very thing I hate… For I have the desire to do what is right, but not the ability to carry it out. For I do not do the good I want, but the evil I do not want is what I keep on doing.”</a:t>
-            </a:r>
-          </a:p>
-        </p:txBody>
-      </p:sp>
-      <p:sp>
-        <p:nvSpPr>
-          <p:cNvPr id="261" name="RescueCard"/>
-          <p:cNvSpPr txBox="1"/>
-          <p:nvPr/>
-        </p:nvSpPr>
-        <p:spPr>
-          <a:xfrm>
-            <a:off x="7132320" y="1508760"/>
-            <a:ext cx="4206240" cy="3108960"/>
-          </a:xfrm>
-          <a:prstGeom prst="rect">
-            <a:avLst/>
-          </a:prstGeom>
-          <a:solidFill>
-            <a:srgbClr val="F1F6EC"/>
-          </a:solidFill>
-        </p:spPr>
-        <p:txBody>
-          <a:bodyPr wrap="square" lIns="137160" tIns="91440" rIns="137160" bIns="91440" anchor="ctr"/>
-          <a:lstStyle/>
-          <a:p>
-            <a:pPr>
-              <a:spcAft>
-                <a:spcPts val="800"/>
-              </a:spcAft>
-            </a:pPr>
-            <a:r>
-              <a:rPr sz="1200" b="1" i="0" dirty="0">
-                <a:solidFill>
-                  <a:srgbClr val="97BC62"/>
-                </a:solidFill>
-                <a:latin typeface="Calibri"/>
-              </a:rPr>
-              <a:t>ROMANS 7:24–25</a:t>
-            </a:r>
-          </a:p>
-          <a:p>
-            <a:pPr>
-              <a:spcAft>
-                <a:spcPts val="400"/>
-              </a:spcAft>
-            </a:pPr>
-            <a:r>
-              <a:rPr sz="2400" b="0" i="1" dirty="0">
-                <a:solidFill>
-                  <a:srgbClr val="222B22"/>
-                </a:solidFill>
-                <a:latin typeface="Cambria"/>
-              </a:rPr>
-              <a:t>“Wretched man that I am! Who will deliver me from this body of death? Thanks be to God through Jesus Christ our Lord!”</a:t>
-            </a:r>
-          </a:p>
-        </p:txBody>
-      </p:sp>
-      <p:sp>
-        <p:nvSpPr>
-          <p:cNvPr id="262" name="Landing"/>
-          <p:cNvSpPr txBox="1"/>
-          <p:nvPr/>
-        </p:nvSpPr>
-        <p:spPr>
-          <a:xfrm>
-            <a:off x="822960" y="5029200"/>
-            <a:ext cx="10515600" cy="1005840"/>
-          </a:xfrm>
-          <a:prstGeom prst="rect">
-            <a:avLst/>
-          </a:prstGeom>
-          <a:noFill/>
-        </p:spPr>
-        <p:txBody>
-          <a:bodyPr wrap="square"/>
-          <a:lstStyle/>
-          <a:p>
-            <a:pPr algn="l"/>
-            <a:r>
-              <a:rPr sz="2800" b="0" i="1" dirty="0">
-                <a:solidFill>
-                  <a:srgbClr val="222B22"/>
-                </a:solidFill>
-                <a:latin typeface="Calibri"/>
-              </a:rPr>
-              <a:t>Mixed soil, in the mouth of an apostle — and he lands on rescue, not despair. All four soils in one honest week is not failure. It is apostolic company.</a:t>
-            </a:r>
-          </a:p>
-        </p:txBody>
-      </p:sp>
+          <a:ln w="76200">
+            <a:solidFill>
+              <a:srgbClr val="FFFFFF"/>
+            </a:solidFill>
+          </a:ln>
+          <a:effectLst>
+            <a:outerShdw blurRad="63500" dist="25400" dir="5400000" rotWithShape="0">
+              <a:srgbClr val="000000">
+                <a:alpha val="35000"/>
+              </a:srgbClr>
+            </a:outerShdw>
+          </a:effectLst>
+        </p:spPr>
+      </p:pic>
     </p:spTree>
   </p:cSld>
   <p:clrMapOvr>
@@ -6750,7 +7679,7 @@
 </p:sld>
 </file>
 
-<file path=ppt/slides/slide27.xml><?xml version="1.0" encoding="utf-8"?>
+<file path=ppt/slides/slide4.xml><?xml version="1.0" encoding="utf-8"?>
 <p:sld xmlns:a="http://schemas.openxmlformats.org/drawingml/2006/main" xmlns:r="http://schemas.openxmlformats.org/officeDocument/2006/relationships" xmlns:p="http://schemas.openxmlformats.org/presentationml/2006/main">
   <p:cSld>
     <p:spTree>
@@ -6830,21 +7759,21 @@
                 </a:solidFill>
                 <a:latin typeface="Cambria"/>
               </a:rPr>
-              <a:t>Question Zero — Private, Journal Only</a:t>
-            </a:r>
-          </a:p>
-        </p:txBody>
-      </p:sp>
-      <p:sp>
-        <p:nvSpPr>
-          <p:cNvPr id="90" name="SlideNum"/>
+              <a:t>Opening Container — the Full Eight Steps</a:t>
+            </a:r>
+          </a:p>
+        </p:txBody>
+      </p:sp>
+      <p:sp>
+        <p:nvSpPr>
+          <p:cNvPr id="4" name="TextBox 4"/>
           <p:cNvSpPr txBox="1"/>
           <p:nvPr/>
         </p:nvSpPr>
         <p:spPr>
           <a:xfrm>
-            <a:off x="11384280" y="6446520"/>
-            <a:ext cx="640080" cy="292608"/>
+            <a:off x="822960" y="1554480"/>
+            <a:ext cx="10515600" cy="4754880"/>
           </a:xfrm>
           <a:prstGeom prst="rect">
             <a:avLst/>
@@ -6852,12 +7781,233 @@
           <a:noFill/>
         </p:spPr>
         <p:txBody>
+          <a:bodyPr wrap="square" lIns="91440" tIns="91440" rIns="91440" bIns="91440"/>
+          <a:lstStyle/>
+          <a:p>
+            <a:pPr marL="342900" indent="-342900">
+              <a:spcAft>
+                <a:spcPts val="750"/>
+              </a:spcAft>
+            </a:pPr>
+            <a:r>
+              <a:rPr sz="2400" b="1" i="0" dirty="0">
+                <a:solidFill>
+                  <a:srgbClr val="97BC62"/>
+                </a:solidFill>
+                <a:latin typeface="Calibri"/>
+              </a:rPr>
+              <a:t>1   </a:t>
+            </a:r>
+            <a:r>
+              <a:rPr sz="2400" b="0" i="0" dirty="0">
+                <a:solidFill>
+                  <a:srgbClr val="222B22"/>
+                </a:solidFill>
+                <a:latin typeface="Calibri"/>
+              </a:rPr>
+              <a:t>Welcome — five minutes to open the container</a:t>
+            </a:r>
+          </a:p>
+          <a:p>
+            <a:pPr marL="342900" indent="-342900">
+              <a:spcAft>
+                <a:spcPts val="750"/>
+              </a:spcAft>
+            </a:pPr>
+            <a:r>
+              <a:rPr sz="2400" b="1" i="0" dirty="0">
+                <a:solidFill>
+                  <a:srgbClr val="97BC62"/>
+                </a:solidFill>
+                <a:latin typeface="Calibri"/>
+              </a:rPr>
+              <a:t>2   </a:t>
+            </a:r>
+            <a:r>
+              <a:rPr sz="2400" b="0" i="0" dirty="0">
+                <a:solidFill>
+                  <a:srgbClr val="222B22"/>
+                </a:solidFill>
+                <a:latin typeface="Calibri"/>
+              </a:rPr>
+              <a:t>Phones silenced and put away</a:t>
+            </a:r>
+          </a:p>
+          <a:p>
+            <a:pPr marL="342900" indent="-342900">
+              <a:spcAft>
+                <a:spcPts val="750"/>
+              </a:spcAft>
+            </a:pPr>
+            <a:r>
+              <a:rPr sz="2400" b="1" i="0" dirty="0">
+                <a:solidFill>
+                  <a:srgbClr val="97BC62"/>
+                </a:solidFill>
+                <a:latin typeface="Calibri"/>
+              </a:rPr>
+              <a:t>3   </a:t>
+            </a:r>
+            <a:r>
+              <a:rPr sz="2400" b="0" i="0" dirty="0">
+                <a:solidFill>
+                  <a:srgbClr val="222B22"/>
+                </a:solidFill>
+                <a:latin typeface="Calibri"/>
+              </a:rPr>
+              <a:t>Stand in a circle</a:t>
+            </a:r>
+          </a:p>
+          <a:p>
+            <a:pPr marL="342900" indent="-342900">
+              <a:spcAft>
+                <a:spcPts val="750"/>
+              </a:spcAft>
+            </a:pPr>
+            <a:r>
+              <a:rPr sz="2400" b="1" i="0" dirty="0">
+                <a:solidFill>
+                  <a:srgbClr val="97BC62"/>
+                </a:solidFill>
+                <a:latin typeface="Calibri"/>
+              </a:rPr>
+              <a:t>4   </a:t>
+            </a:r>
+            <a:r>
+              <a:rPr sz="2400" b="0" i="0" dirty="0">
+                <a:solidFill>
+                  <a:srgbClr val="222B22"/>
+                </a:solidFill>
+                <a:latin typeface="Calibri"/>
+              </a:rPr>
+              <a:t>One-word check-in — how you actually are, right now</a:t>
+            </a:r>
+          </a:p>
+          <a:p>
+            <a:pPr marL="342900" indent="-342900">
+              <a:spcAft>
+                <a:spcPts val="750"/>
+              </a:spcAft>
+            </a:pPr>
+            <a:r>
+              <a:rPr sz="2400" b="1" i="0" dirty="0">
+                <a:solidFill>
+                  <a:srgbClr val="97BC62"/>
+                </a:solidFill>
+                <a:latin typeface="Calibri"/>
+              </a:rPr>
+              <a:t>5   </a:t>
+            </a:r>
+            <a:r>
+              <a:rPr sz="2400" b="0" i="0" dirty="0">
+                <a:solidFill>
+                  <a:srgbClr val="222B22"/>
+                </a:solidFill>
+                <a:latin typeface="Calibri"/>
+              </a:rPr>
+              <a:t>Put out / bring in — set something down; bring a blessing in</a:t>
+            </a:r>
+          </a:p>
+          <a:p>
+            <a:pPr marL="342900" indent="-342900">
+              <a:spcAft>
+                <a:spcPts val="750"/>
+              </a:spcAft>
+            </a:pPr>
+            <a:r>
+              <a:rPr sz="2400" b="1" i="0" dirty="0">
+                <a:solidFill>
+                  <a:srgbClr val="97BC62"/>
+                </a:solidFill>
+                <a:latin typeface="Calibri"/>
+              </a:rPr>
+              <a:t>6   </a:t>
+            </a:r>
+            <a:r>
+              <a:rPr sz="2400" b="0" i="0" dirty="0">
+                <a:solidFill>
+                  <a:srgbClr val="222B22"/>
+                </a:solidFill>
+                <a:latin typeface="Calibri"/>
+              </a:rPr>
+              <a:t>Spoken commitment: “I am here. I am paying attention. I am willing to be moved.”</a:t>
+            </a:r>
+          </a:p>
+          <a:p>
+            <a:pPr marL="342900" indent="-342900">
+              <a:spcAft>
+                <a:spcPts val="750"/>
+              </a:spcAft>
+            </a:pPr>
+            <a:r>
+              <a:rPr sz="2400" b="1" i="0" dirty="0">
+                <a:solidFill>
+                  <a:srgbClr val="97BC62"/>
+                </a:solidFill>
+                <a:latin typeface="Calibri"/>
+              </a:rPr>
+              <a:t>7   </a:t>
+            </a:r>
+            <a:r>
+              <a:rPr sz="2400" b="0" i="0" dirty="0">
+                <a:solidFill>
+                  <a:srgbClr val="222B22"/>
+                </a:solidFill>
+                <a:latin typeface="Calibri"/>
+              </a:rPr>
+              <a:t>Opening prayer — “Holy Spirit, you are welcome here. Speak. We are listening.”</a:t>
+            </a:r>
+          </a:p>
+          <a:p>
+            <a:pPr marL="342900" indent="-342900">
+              <a:spcAft>
+                <a:spcPts val="750"/>
+              </a:spcAft>
+            </a:pPr>
+            <a:r>
+              <a:rPr sz="2400" b="1" i="0" dirty="0">
+                <a:solidFill>
+                  <a:srgbClr val="97BC62"/>
+                </a:solidFill>
+                <a:latin typeface="Calibri"/>
+              </a:rPr>
+              <a:t>8   </a:t>
+            </a:r>
+            <a:r>
+              <a:rPr sz="2400" b="0" i="0" dirty="0">
+                <a:solidFill>
+                  <a:srgbClr val="222B22"/>
+                </a:solidFill>
+                <a:latin typeface="Calibri"/>
+              </a:rPr>
+              <a:t>Sit. Begin.</a:t>
+            </a:r>
+          </a:p>
+        </p:txBody>
+      </p:sp>
+      <p:sp>
+        <p:nvSpPr>
+          <p:cNvPr id="90" name="SlideNum"/>
+          <p:cNvSpPr txBox="1"/>
+          <p:nvPr/>
+        </p:nvSpPr>
+        <p:spPr>
+          <a:xfrm>
+            <a:off x="11384280" y="6446520"/>
+            <a:ext cx="640080" cy="292608"/>
+          </a:xfrm>
+          <a:prstGeom prst="rect">
+            <a:avLst/>
+          </a:prstGeom>
+          <a:noFill/>
+        </p:spPr>
+        <p:txBody>
           <a:bodyPr wrap="none" lIns="0" tIns="0" rIns="45720" bIns="0" anchor="ctr"/>
           <a:lstStyle/>
           <a:p>
             <a:pPr algn="r"/>
             <a:r>
-              <a:t>27</a:t>
+              <a:t>23</a:t>
             </a:r>
             <a:endParaRPr sz="1000" b="1">
               <a:solidFill>
@@ -6865,169 +8015,6 @@
               </a:solidFill>
               <a:latin typeface="Calibri"/>
             </a:endParaRPr>
-          </a:p>
-        </p:txBody>
-      </p:sp>
-      <p:sp>
-        <p:nvSpPr>
-          <p:cNvPr id="240" name="CorCard"/>
-          <p:cNvSpPr txBox="1"/>
-          <p:nvPr/>
-        </p:nvSpPr>
-        <p:spPr>
-          <a:xfrm>
-            <a:off x="822960" y="1417320"/>
-            <a:ext cx="10515600" cy="1325880"/>
-          </a:xfrm>
-          <a:prstGeom prst="rect">
-            <a:avLst/>
-          </a:prstGeom>
-          <a:solidFill>
-            <a:srgbClr val="F1F6EC"/>
-          </a:solidFill>
-        </p:spPr>
-        <p:txBody>
-          <a:bodyPr wrap="square" lIns="137160" tIns="91440" rIns="137160" bIns="91440" anchor="ctr"/>
-          <a:lstStyle/>
-          <a:p>
-            <a:pPr>
-              <a:spcAft>
-                <a:spcPts val="800"/>
-              </a:spcAft>
-            </a:pPr>
-            <a:r>
-              <a:rPr sz="1200" b="1" i="0">
-                <a:solidFill>
-                  <a:srgbClr val="97BC62"/>
-                </a:solidFill>
-                <a:latin typeface="Calibri"/>
-              </a:rPr>
-              <a:t>2 CORINTHIANS 13:5</a:t>
-            </a:r>
-          </a:p>
-          <a:p>
-            <a:pPr>
-              <a:spcAft>
-                <a:spcPts val="400"/>
-              </a:spcAft>
-            </a:pPr>
-            <a:r>
-              <a:rPr sz="2400" b="0" i="1">
-                <a:solidFill>
-                  <a:srgbClr val="222B22"/>
-                </a:solidFill>
-                <a:latin typeface="Cambria"/>
-              </a:rPr>
-              <a:t>“Examine yourselves, to see whether you are in the faith. Test yourselves.”</a:t>
-            </a:r>
-          </a:p>
-        </p:txBody>
-      </p:sp>
-      <p:sp>
-        <p:nvSpPr>
-          <p:cNvPr id="241" name="QzQuestion"/>
-          <p:cNvSpPr txBox="1"/>
-          <p:nvPr/>
-        </p:nvSpPr>
-        <p:spPr>
-          <a:xfrm>
-            <a:off x="822960" y="3063240"/>
-            <a:ext cx="10515600" cy="1417320"/>
-          </a:xfrm>
-          <a:prstGeom prst="rect">
-            <a:avLst/>
-          </a:prstGeom>
-          <a:noFill/>
-        </p:spPr>
-        <p:txBody>
-          <a:bodyPr wrap="square"/>
-          <a:lstStyle/>
-          <a:p>
-            <a:pPr algn="l"/>
-            <a:r>
-              <a:rPr sz="2400" b="1" i="0">
-                <a:solidFill>
-                  <a:srgbClr val="222B22"/>
-                </a:solidFill>
-                <a:latin typeface="Cambria"/>
-              </a:rPr>
-              <a:t>Has the seed itself ever gone into your ground? Has there been a time you actually said yes to Jesus — your yes, not your family’s?</a:t>
-            </a:r>
-          </a:p>
-        </p:txBody>
-      </p:sp>
-      <p:sp>
-        <p:nvSpPr>
-          <p:cNvPr id="242" name="QzSub"/>
-          <p:cNvSpPr txBox="1"/>
-          <p:nvPr/>
-        </p:nvSpPr>
-        <p:spPr>
-          <a:xfrm>
-            <a:off x="479507" y="4389120"/>
-            <a:ext cx="10515600" cy="548640"/>
-          </a:xfrm>
-          <a:prstGeom prst="rect">
-            <a:avLst/>
-          </a:prstGeom>
-          <a:noFill/>
-        </p:spPr>
-        <p:txBody>
-          <a:bodyPr wrap="square"/>
-          <a:lstStyle/>
-          <a:p>
-            <a:pPr algn="ctr"/>
-            <a:r>
-              <a:rPr sz="2400" b="0" i="0" dirty="0">
-                <a:solidFill>
-                  <a:srgbClr val="222B22"/>
-                </a:solidFill>
-                <a:latin typeface="Calibri"/>
-              </a:rPr>
-              <a:t>Write your honest answer — yes, no, or I’m not sure. Nobody shares this one</a:t>
-            </a:r>
-            <a:r>
-              <a:rPr sz="1800" b="0" i="0" dirty="0">
-                <a:solidFill>
-                  <a:srgbClr val="222B22"/>
-                </a:solidFill>
-                <a:latin typeface="Calibri"/>
-              </a:rPr>
-              <a:t>.</a:t>
-            </a:r>
-          </a:p>
-        </p:txBody>
-      </p:sp>
-      <p:sp>
-        <p:nvSpPr>
-          <p:cNvPr id="243" name="QzRoad"/>
-          <p:cNvSpPr txBox="1"/>
-          <p:nvPr/>
-        </p:nvSpPr>
-        <p:spPr>
-          <a:xfrm>
-            <a:off x="822960" y="5349240"/>
-            <a:ext cx="10515600" cy="1005840"/>
-          </a:xfrm>
-          <a:prstGeom prst="rect">
-            <a:avLst/>
-          </a:prstGeom>
-          <a:noFill/>
-        </p:spPr>
-        <p:txBody>
-          <a:bodyPr wrap="square"/>
-          <a:lstStyle/>
-          <a:p>
-            <a:pPr algn="l"/>
-            <a:r>
-              <a:rPr sz="2400" b="0" i="1" dirty="0">
-                <a:solidFill>
-                  <a:srgbClr val="222B22"/>
-                </a:solidFill>
-                <a:latin typeface="Calibri"/>
-              </a:rPr>
-              <a:t>If it’s no, or not sure — the road is short. The thief walked it in one sentence. Any Companion, any Wednesday, quietly — or start with your parent, tonight, in the car.</a:t>
-            </a:r>
           </a:p>
         </p:txBody>
       </p:sp>
@@ -7039,7 +8026,7 @@
 </p:sld>
 </file>
 
-<file path=ppt/slides/slide28.xml><?xml version="1.0" encoding="utf-8"?>
+<file path=ppt/slides/slide5.xml><?xml version="1.0" encoding="utf-8"?>
 <p:sld xmlns:a="http://schemas.openxmlformats.org/drawingml/2006/main" xmlns:r="http://schemas.openxmlformats.org/officeDocument/2006/relationships" xmlns:p="http://schemas.openxmlformats.org/presentationml/2006/main">
   <p:cSld>
     <p:spTree>
@@ -7119,7 +8106,7 @@
                 </a:solidFill>
                 <a:latin typeface="Cambria"/>
               </a:rPr>
-              <a:t>pairs — the Heart Soil Diagnostic</a:t>
+              <a:t>Check-In on Week 1 Practice</a:t>
             </a:r>
           </a:p>
         </p:txBody>
@@ -7132,8 +8119,8 @@
         </p:nvSpPr>
         <p:spPr>
           <a:xfrm>
-            <a:off x="822960" y="1508760"/>
-            <a:ext cx="6675120" cy="4937760"/>
+            <a:off x="822960" y="1554480"/>
+            <a:ext cx="6675120" cy="4754880"/>
           </a:xfrm>
           <a:prstGeom prst="rect">
             <a:avLst/>
@@ -7146,7 +8133,7 @@
           <a:p>
             <a:pPr marL="274320" indent="-274320">
               <a:spcAft>
-                <a:spcPts val="800"/>
+                <a:spcPts val="900"/>
               </a:spcAft>
             </a:pPr>
             <a:r>
@@ -7159,181 +8146,113 @@
               <a:t>•  </a:t>
             </a:r>
             <a:r>
-              <a:rPr sz="2000" b="0" i="0">
+              <a:rPr sz="2200" b="0" i="0">
                 <a:solidFill>
                   <a:srgbClr val="222B22"/>
                 </a:solidFill>
                 <a:latin typeface="Calibri"/>
               </a:rPr>
-              <a:t>Not </a:t>
-            </a:r>
-            <a:r>
-              <a:rPr sz="2000" b="0" i="1">
-                <a:solidFill>
-                  <a:srgbClr val="222B22"/>
-                </a:solidFill>
-                <a:latin typeface="Calibri"/>
-              </a:rPr>
-              <a:t>“which soil am I?”</a:t>
-            </a:r>
-            <a:r>
-              <a:rPr sz="2000" b="0" i="0">
-                <a:solidFill>
-                  <a:srgbClr val="222B22"/>
-                </a:solidFill>
-                <a:latin typeface="Calibri"/>
-              </a:rPr>
-              <a:t> — where does each soil show up in my life right now? Specifically.</a:t>
-            </a:r>
-          </a:p>
-          <a:p>
-            <a:pPr marL="342900" indent="-342900">
+              <a:t>One quick round, one sentence each — a parent starts</a:t>
+            </a:r>
+          </a:p>
+          <a:p>
+            <a:pPr marL="685800" indent="-274320">
               <a:spcAft>
-                <a:spcPts val="650"/>
+                <a:spcPts val="700"/>
               </a:spcAft>
             </a:pPr>
             <a:r>
-              <a:rPr sz="2000" b="1" i="0">
+              <a:rPr sz="2200" b="1" i="0">
                 <a:solidFill>
                   <a:srgbClr val="97BC62"/>
                 </a:solidFill>
                 <a:latin typeface="Calibri"/>
               </a:rPr>
-              <a:t>1   </a:t>
-            </a:r>
-            <a:r>
-              <a:rPr sz="2000" b="0" i="0">
+              <a:t>–  </a:t>
+            </a:r>
+            <a:r>
+              <a:rPr sz="2200" b="0" i="1">
                 <a:solidFill>
                   <a:srgbClr val="222B22"/>
                 </a:solidFill>
                 <a:latin typeface="Calibri"/>
               </a:rPr>
-              <a:t>Path — where is the ground hard right now? One specific place, this week</a:t>
-            </a:r>
-          </a:p>
-          <a:p>
-            <a:pPr marL="342900" indent="-342900">
+              <a:t>“One thing I noticed this week when I asked the morning question …”</a:t>
+            </a:r>
+          </a:p>
+          <a:p>
+            <a:pPr marL="685800" indent="-274320">
               <a:spcAft>
-                <a:spcPts val="650"/>
+                <a:spcPts val="700"/>
               </a:spcAft>
             </a:pPr>
             <a:r>
-              <a:rPr sz="2000" b="1" i="0">
+              <a:rPr sz="2200" b="1" i="0">
                 <a:solidFill>
                   <a:srgbClr val="97BC62"/>
                 </a:solidFill>
                 <a:latin typeface="Calibri"/>
               </a:rPr>
-              <a:t>2   </a:t>
-            </a:r>
-            <a:r>
-              <a:rPr sz="2000" b="0" i="0">
+              <a:t>–  </a:t>
+            </a:r>
+            <a:r>
+              <a:rPr sz="2200" b="0" i="0">
                 <a:solidFill>
                   <a:srgbClr val="222B22"/>
                 </a:solidFill>
                 <a:latin typeface="Calibri"/>
               </a:rPr>
-              <a:t>Rocky — where has a season with God not lasted? What sun revealed the missing roots?</a:t>
-            </a:r>
-          </a:p>
-          <a:p>
-            <a:pPr marL="342900" indent="-342900">
+              <a:t>Or one thing about the practice itself — “I forgot it three days running” is a real answer</a:t>
+            </a:r>
+          </a:p>
+          <a:p>
+            <a:pPr marL="274320" indent="-274320">
               <a:spcAft>
-                <a:spcPts val="650"/>
+                <a:spcPts val="900"/>
               </a:spcAft>
             </a:pPr>
             <a:r>
-              <a:rPr sz="2000" b="1" i="0">
+              <a:rPr sz="2200" b="1" i="0">
                 <a:solidFill>
                   <a:srgbClr val="97BC62"/>
                 </a:solidFill>
                 <a:latin typeface="Calibri"/>
               </a:rPr>
-              <a:t>3   </a:t>
-            </a:r>
-            <a:r>
-              <a:rPr sz="2000" b="0" i="0">
+              <a:t>•  </a:t>
+            </a:r>
+            <a:r>
+              <a:rPr sz="2200" b="0" i="0">
                 <a:solidFill>
                   <a:srgbClr val="222B22"/>
                 </a:solidFill>
                 <a:latin typeface="Calibri"/>
               </a:rPr>
-              <a:t>Thorny — what is choking me right now: cares, riches, other desires? Which is loudest?</a:t>
-            </a:r>
-          </a:p>
-          <a:p>
-            <a:pPr marL="342900" indent="-342900">
+              <a:t>No grades, no lectures — honesty over performance</a:t>
+            </a:r>
+          </a:p>
+          <a:p>
+            <a:pPr marL="274320" indent="-274320">
               <a:spcAft>
-                <a:spcPts val="650"/>
+                <a:spcPts val="900"/>
               </a:spcAft>
             </a:pPr>
             <a:r>
-              <a:rPr sz="2000" b="1" i="0">
+              <a:rPr sz="2200" b="1" i="0">
                 <a:solidFill>
                   <a:srgbClr val="97BC62"/>
                 </a:solidFill>
                 <a:latin typeface="Calibri"/>
               </a:rPr>
-              <a:t>4   </a:t>
-            </a:r>
-            <a:r>
-              <a:rPr sz="2000" b="0" i="0">
+              <a:t>•  </a:t>
+            </a:r>
+            <a:r>
+              <a:rPr sz="2200" b="0" i="0">
                 <a:solidFill>
                   <a:srgbClr val="222B22"/>
                 </a:solidFill>
                 <a:latin typeface="Calibri"/>
               </a:rPr>
-              <a:t>Good — where has something God planted actually grown? Name one real piece of fruit</a:t>
-            </a:r>
-          </a:p>
-          <a:p>
-            <a:pPr marL="274320" indent="-274320">
-              <a:spcAft>
-                <a:spcPts val="650"/>
-              </a:spcAft>
-            </a:pPr>
-            <a:r>
-              <a:rPr sz="2000" b="1" i="0">
-                <a:solidFill>
-                  <a:srgbClr val="97BC62"/>
-                </a:solidFill>
-                <a:latin typeface="Calibri"/>
-              </a:rPr>
-              <a:t>•  </a:t>
-            </a:r>
-            <a:r>
-              <a:rPr sz="2000" b="0" i="0">
-                <a:solidFill>
-                  <a:srgbClr val="222B22"/>
-                </a:solidFill>
-                <a:latin typeface="Calibri"/>
-              </a:rPr>
-              <a:t>Journal two minutes, then share — a parent answers first, every round</a:t>
-            </a:r>
-          </a:p>
-          <a:p>
-            <a:pPr marL="274320" indent="-274320">
-              <a:spcAft>
-                <a:spcPts val="650"/>
-              </a:spcAft>
-            </a:pPr>
-            <a:r>
-              <a:rPr sz="2000" b="1" i="0">
-                <a:solidFill>
-                  <a:srgbClr val="97BC62"/>
-                </a:solidFill>
-                <a:latin typeface="Calibri"/>
-              </a:rPr>
-              <a:t>•  </a:t>
-            </a:r>
-            <a:r>
-              <a:rPr sz="2000" b="0" i="0">
-                <a:solidFill>
-                  <a:srgbClr val="222B22"/>
-                </a:solidFill>
-                <a:latin typeface="Calibri"/>
-              </a:rPr>
-              <a:t>“I’d rather not share that one” is a complete answer — a gift, not ammunition</a:t>
+              <a:t>Missed it? “Thanks for the honesty. Pick it back up tomorrow.”</a:t>
             </a:r>
           </a:p>
         </p:txBody>
@@ -7360,7 +8279,7 @@
           <a:p>
             <a:pPr algn="r"/>
             <a:r>
-              <a:t>28</a:t>
+              <a:t>24</a:t>
             </a:r>
             <a:endParaRPr sz="1000" b="1">
               <a:solidFill>
@@ -7373,7 +8292,7 @@
       </p:sp>
       <p:pic>
         <p:nvPicPr>
-          <p:cNvPr id="30" name="Picture 30" descr="hands examining soil and seed"/>
+          <p:cNvPr id="32" name="Picture 32" descr="trail cairn - the weekly check-in"/>
           <p:cNvPicPr>
             <a:picLocks noChangeAspect="1"/>
           </p:cNvPicPr>
@@ -7387,8 +8306,8 @@
         </p:blipFill>
         <p:spPr>
           <a:xfrm>
-            <a:off x="7818120" y="1463040"/>
-            <a:ext cx="3264408" cy="4892040"/>
+            <a:off x="8103612" y="1463040"/>
+            <a:ext cx="3262379" cy="4892040"/>
           </a:xfrm>
           <a:prstGeom prst="rect">
             <a:avLst/>
@@ -7407,6 +8326,53 @@
           </a:effectLst>
         </p:spPr>
       </p:pic>
+      <p:sp>
+        <p:nvSpPr>
+          <p:cNvPr id="91" name="JoshuaCard"/>
+          <p:cNvSpPr txBox="1"/>
+          <p:nvPr/>
+        </p:nvSpPr>
+        <p:spPr>
+          <a:xfrm>
+            <a:off x="822960" y="5230368"/>
+            <a:ext cx="6675120" cy="1078992"/>
+          </a:xfrm>
+          <a:prstGeom prst="rect">
+            <a:avLst/>
+          </a:prstGeom>
+          <a:solidFill>
+            <a:srgbClr val="F1F6EC"/>
+          </a:solidFill>
+        </p:spPr>
+        <p:txBody>
+          <a:bodyPr wrap="square" lIns="137160" tIns="73152" rIns="137160" bIns="73152" anchor="ctr"/>
+          <a:lstStyle/>
+          <a:p>
+            <a:pPr algn="l"/>
+            <a:r>
+              <a:rPr lang="en-US" sz="2400" i="1">
+                <a:solidFill>
+                  <a:srgbClr val="222B22"/>
+                </a:solidFill>
+                <a:latin typeface="Cambria"/>
+              </a:rPr>
+              <a:t>“When your children ask their fathers in times to come, ‘What do these stones mean?’”</a:t>
+            </a:r>
+          </a:p>
+          <a:p>
+            <a:pPr algn="l"/>
+            <a:r>
+              <a:rPr lang="en-US" sz="1100" b="1">
+                <a:solidFill>
+                  <a:srgbClr val="97BC62"/>
+                </a:solidFill>
+                <a:latin typeface="Calibri"/>
+              </a:rPr>
+              <a:t>— JOSHUA 4:21 (ESV)</a:t>
+            </a:r>
+          </a:p>
+        </p:txBody>
+      </p:sp>
     </p:spTree>
   </p:cSld>
   <p:clrMapOvr>
@@ -7415,7 +8381,7 @@
 </p:sld>
 </file>
 
-<file path=ppt/slides/slide29.xml><?xml version="1.0" encoding="utf-8"?>
+<file path=ppt/slides/slide6.xml><?xml version="1.0" encoding="utf-8"?>
 <p:sld xmlns:a="http://schemas.openxmlformats.org/drawingml/2006/main" xmlns:r="http://schemas.openxmlformats.org/officeDocument/2006/relationships" xmlns:p="http://schemas.openxmlformats.org/presentationml/2006/main">
   <p:cSld>
     <p:spTree>
@@ -7495,198 +8461,14 @@
                 </a:solidFill>
                 <a:latin typeface="Cambria"/>
               </a:rPr>
-              <a:t>Re-Merge — One Word, Then the Verse</a:t>
-            </a:r>
-          </a:p>
-        </p:txBody>
-      </p:sp>
-      <p:sp>
-        <p:nvSpPr>
-          <p:cNvPr id="4" name="TextBox 4"/>
-          <p:cNvSpPr txBox="1"/>
-          <p:nvPr/>
-        </p:nvSpPr>
-        <p:spPr>
-          <a:xfrm>
-            <a:off x="822960" y="1600200"/>
-            <a:ext cx="5669280" cy="4023360"/>
-          </a:xfrm>
-          <a:prstGeom prst="rect">
-            <a:avLst/>
-          </a:prstGeom>
-          <a:noFill/>
-        </p:spPr>
-        <p:txBody>
-          <a:bodyPr wrap="square" lIns="91440" tIns="91440" rIns="91440" bIns="91440"/>
-          <a:lstStyle/>
-          <a:p>
-            <a:pPr marL="274320" indent="-274320">
-              <a:spcAft>
-                <a:spcPts val="800"/>
-              </a:spcAft>
-            </a:pPr>
-            <a:r>
-              <a:rPr sz="2000" b="1" i="0">
-                <a:solidFill>
-                  <a:srgbClr val="97BC62"/>
-                </a:solidFill>
-                <a:latin typeface="Calibri"/>
-              </a:rPr>
-              <a:t>•  </a:t>
-            </a:r>
-            <a:r>
-              <a:rPr sz="2000" b="0" i="0">
-                <a:solidFill>
-                  <a:srgbClr val="222B22"/>
-                </a:solidFill>
-                <a:latin typeface="Calibri"/>
-              </a:rPr>
-              <a:t>What surfaced stays in your pair — here, just one word from each of us</a:t>
-            </a:r>
-          </a:p>
-          <a:p>
-            <a:pPr marL="274320" indent="-274320">
-              <a:spcAft>
-                <a:spcPts val="800"/>
-              </a:spcAft>
-            </a:pPr>
-            <a:r>
-              <a:rPr sz="2000" b="1" i="0">
-                <a:solidFill>
-                  <a:srgbClr val="97BC62"/>
-                </a:solidFill>
-                <a:latin typeface="Calibri"/>
-              </a:rPr>
-              <a:t>•  </a:t>
-            </a:r>
-            <a:r>
-              <a:rPr sz="2000" b="0" i="0">
-                <a:solidFill>
-                  <a:srgbClr val="222B22"/>
-                </a:solidFill>
-                <a:latin typeface="Calibri"/>
-              </a:rPr>
-              <a:t>Then the verse Jesus ends with, read slowly — listen for the word that lands</a:t>
-            </a:r>
-          </a:p>
-          <a:p>
-            <a:pPr marL="274320" indent="-274320">
-              <a:spcAft>
-                <a:spcPts val="800"/>
-              </a:spcAft>
-            </a:pPr>
-            <a:r>
-              <a:rPr sz="2000" b="1" i="0">
-                <a:solidFill>
-                  <a:srgbClr val="97BC62"/>
-                </a:solidFill>
-                <a:latin typeface="Calibri"/>
-              </a:rPr>
-              <a:t>•  </a:t>
-            </a:r>
-            <a:r>
-              <a:rPr sz="2000" b="0" i="0">
-                <a:solidFill>
-                  <a:srgbClr val="222B22"/>
-                </a:solidFill>
-                <a:latin typeface="Calibri"/>
-              </a:rPr>
-              <a:t>Noticing rocks and thorns is not the opposite of good soil — it is what good soil does</a:t>
-            </a:r>
-          </a:p>
-        </p:txBody>
-      </p:sp>
-      <p:sp>
-        <p:nvSpPr>
-          <p:cNvPr id="6" name="TextBox 6"/>
-          <p:cNvSpPr txBox="1"/>
-          <p:nvPr/>
-        </p:nvSpPr>
-        <p:spPr>
-          <a:xfrm>
-            <a:off x="6766560" y="1737360"/>
-            <a:ext cx="4663440" cy="3291840"/>
-          </a:xfrm>
-          <a:prstGeom prst="rect">
-            <a:avLst/>
-          </a:prstGeom>
-          <a:solidFill>
-            <a:srgbClr val="F1F6EC"/>
-          </a:solidFill>
-        </p:spPr>
-        <p:txBody>
-          <a:bodyPr wrap="square" lIns="91440" tIns="91440" rIns="91440" bIns="91440" anchor="ctr"/>
-          <a:lstStyle/>
-          <a:p>
-            <a:pPr>
-              <a:spcAft>
-                <a:spcPts val="1000"/>
-              </a:spcAft>
-            </a:pPr>
-            <a:r>
-              <a:rPr sz="1200" b="1" i="0">
-                <a:solidFill>
-                  <a:srgbClr val="97BC62"/>
-                </a:solidFill>
-                <a:latin typeface="Calibri"/>
-              </a:rPr>
-              <a:t>MARK 4:20</a:t>
-            </a:r>
-          </a:p>
-          <a:p>
-            <a:pPr>
-              <a:spcAft>
-                <a:spcPts val="600"/>
-              </a:spcAft>
-            </a:pPr>
-            <a:r>
-              <a:rPr sz="2400" b="0" i="1">
-                <a:solidFill>
-                  <a:srgbClr val="222B22"/>
-                </a:solidFill>
-                <a:latin typeface="Cambria"/>
-              </a:rPr>
-              <a:t>“But those that were sown on the good soil are the ones who hear the word and accept it and bear fruit, thirtyfold and sixtyfold and a hundredfold.”</a:t>
-            </a:r>
-          </a:p>
-        </p:txBody>
-      </p:sp>
-      <p:sp>
-        <p:nvSpPr>
-          <p:cNvPr id="90" name="SlideNum"/>
-          <p:cNvSpPr txBox="1"/>
-          <p:nvPr/>
-        </p:nvSpPr>
-        <p:spPr>
-          <a:xfrm>
-            <a:off x="11384280" y="6446520"/>
-            <a:ext cx="640080" cy="292608"/>
-          </a:xfrm>
-          <a:prstGeom prst="rect">
-            <a:avLst/>
-          </a:prstGeom>
-          <a:noFill/>
-        </p:spPr>
-        <p:txBody>
-          <a:bodyPr wrap="none" lIns="0" tIns="0" rIns="45720" bIns="0" anchor="ctr"/>
-          <a:lstStyle/>
-          <a:p>
-            <a:pPr algn="r"/>
-            <a:r>
-              <a:t>29</a:t>
-            </a:r>
-            <a:endParaRPr sz="1000" b="1">
-              <a:solidFill>
-                <a:srgbClr val="7A8A6E"/>
-              </a:solidFill>
-              <a:latin typeface="Calibri"/>
-            </a:endParaRPr>
+              <a:t>Teaching — Mark 4 and the Four Soils</a:t>
+            </a:r>
           </a:p>
         </p:txBody>
       </p:sp>
       <p:pic>
         <p:nvPicPr>
-          <p:cNvPr id="30" name="Picture 30" descr="a single apple on the branch"/>
+          <p:cNvPr id="5" name="Picture 4" descr="four soils diagram"/>
           <p:cNvPicPr>
             <a:picLocks noChangeAspect="1"/>
           </p:cNvPicPr>
@@ -7700,8 +8482,8 @@
         </p:blipFill>
         <p:spPr>
           <a:xfrm>
-            <a:off x="822960" y="4160520"/>
-            <a:ext cx="4206240" cy="2368296"/>
+            <a:off x="822960" y="1737360"/>
+            <a:ext cx="10515600" cy="3771900"/>
           </a:xfrm>
           <a:prstGeom prst="rect">
             <a:avLst/>
@@ -7720,6 +8502,85 @@
           </a:effectLst>
         </p:spPr>
       </p:pic>
+      <p:sp>
+        <p:nvSpPr>
+          <p:cNvPr id="4" name="TextBox 4"/>
+          <p:cNvSpPr txBox="1"/>
+          <p:nvPr/>
+        </p:nvSpPr>
+        <p:spPr>
+          <a:xfrm>
+            <a:off x="822960" y="5623560"/>
+            <a:ext cx="10515600" cy="640080"/>
+          </a:xfrm>
+          <a:prstGeom prst="rect">
+            <a:avLst/>
+          </a:prstGeom>
+          <a:noFill/>
+        </p:spPr>
+        <p:txBody>
+          <a:bodyPr wrap="square" lIns="91440" tIns="91440" rIns="91440" bIns="91440"/>
+          <a:lstStyle/>
+          <a:p>
+            <a:pPr>
+              <a:spcAft>
+                <a:spcPts val="900"/>
+              </a:spcAft>
+            </a:pPr>
+            <a:r>
+              <a:rPr sz="1800" b="0" i="0">
+                <a:solidFill>
+                  <a:srgbClr val="222B22"/>
+                </a:solidFill>
+                <a:latin typeface="Calibri"/>
+              </a:rPr>
+              <a:t>Read Mark 4:1–20 in full, slowly — all twenty verses, no commentary. </a:t>
+            </a:r>
+            <a:r>
+              <a:rPr sz="1800" b="1" i="0">
+                <a:solidFill>
+                  <a:srgbClr val="222B22"/>
+                </a:solidFill>
+                <a:latin typeface="Calibri"/>
+              </a:rPr>
+              <a:t>Then the seed, recalled — sixty seconds. Then the four soils — and Paul’s mixed ground, next slide.</a:t>
+            </a:r>
+          </a:p>
+        </p:txBody>
+      </p:sp>
+      <p:sp>
+        <p:nvSpPr>
+          <p:cNvPr id="90" name="SlideNum"/>
+          <p:cNvSpPr txBox="1"/>
+          <p:nvPr/>
+        </p:nvSpPr>
+        <p:spPr>
+          <a:xfrm>
+            <a:off x="11384280" y="6446520"/>
+            <a:ext cx="640080" cy="292608"/>
+          </a:xfrm>
+          <a:prstGeom prst="rect">
+            <a:avLst/>
+          </a:prstGeom>
+          <a:noFill/>
+        </p:spPr>
+        <p:txBody>
+          <a:bodyPr wrap="none" lIns="0" tIns="0" rIns="45720" bIns="0" anchor="ctr"/>
+          <a:lstStyle/>
+          <a:p>
+            <a:pPr algn="r"/>
+            <a:r>
+              <a:t>25</a:t>
+            </a:r>
+            <a:endParaRPr sz="1000" b="1">
+              <a:solidFill>
+                <a:srgbClr val="7A8A6E"/>
+              </a:solidFill>
+              <a:latin typeface="Calibri"/>
+            </a:endParaRPr>
+          </a:p>
+        </p:txBody>
+      </p:sp>
     </p:spTree>
   </p:cSld>
   <p:clrMapOvr>
@@ -7728,7 +8589,7 @@
 </p:sld>
 </file>
 
-<file path=ppt/slides/slide30.xml><?xml version="1.0" encoding="utf-8"?>
+<file path=ppt/slides/slide7.xml><?xml version="1.0" encoding="utf-8"?>
 <p:sld xmlns:a="http://schemas.openxmlformats.org/drawingml/2006/main" xmlns:r="http://schemas.openxmlformats.org/officeDocument/2006/relationships" xmlns:p="http://schemas.openxmlformats.org/presentationml/2006/main">
   <p:cSld>
     <p:spTree>
@@ -7808,21 +8669,21 @@
                 </a:solidFill>
                 <a:latin typeface="Cambria"/>
               </a:rPr>
-              <a:t>Homework — Two Weeks, Four Parts</a:t>
-            </a:r>
-          </a:p>
-        </p:txBody>
-      </p:sp>
-      <p:sp>
-        <p:nvSpPr>
-          <p:cNvPr id="4" name="TextBox 4"/>
+              <a:t>Paul’s Mixed Ground — Romans 7</a:t>
+            </a:r>
+          </a:p>
+        </p:txBody>
+      </p:sp>
+      <p:sp>
+        <p:nvSpPr>
+          <p:cNvPr id="90" name="SlideNum"/>
           <p:cNvSpPr txBox="1"/>
           <p:nvPr/>
         </p:nvSpPr>
         <p:spPr>
           <a:xfrm>
-            <a:off x="822960" y="1554480"/>
-            <a:ext cx="6675120" cy="4754880"/>
+            <a:off x="11384280" y="6446520"/>
+            <a:ext cx="640080" cy="292608"/>
           </a:xfrm>
           <a:prstGeom prst="rect">
             <a:avLst/>
@@ -7830,176 +8691,12 @@
           <a:noFill/>
         </p:spPr>
         <p:txBody>
-          <a:bodyPr wrap="square" lIns="91440" tIns="91440" rIns="91440" bIns="91440"/>
-          <a:lstStyle/>
-          <a:p>
-            <a:pPr marL="274320" indent="-274320">
-              <a:spcAft>
-                <a:spcPts val="900"/>
-              </a:spcAft>
-            </a:pPr>
-            <a:r>
-              <a:rPr sz="2200" b="1" i="0" dirty="0">
-                <a:solidFill>
-                  <a:srgbClr val="97BC62"/>
-                </a:solidFill>
-                <a:latin typeface="Calibri"/>
-              </a:rPr>
-              <a:t>•  </a:t>
-            </a:r>
-            <a:r>
-              <a:rPr sz="2200" b="0" i="0" dirty="0">
-                <a:solidFill>
-                  <a:srgbClr val="222B22"/>
-                </a:solidFill>
-                <a:latin typeface="Calibri"/>
-              </a:rPr>
-              <a:t>The Soil Journal — three times this week, five minutes each. Not every day; three times.</a:t>
-            </a:r>
-          </a:p>
-          <a:p>
-            <a:pPr marL="685800" indent="-274320">
-              <a:spcAft>
-                <a:spcPts val="700"/>
-              </a:spcAft>
-            </a:pPr>
-            <a:r>
-              <a:rPr sz="1800" b="1" i="0" dirty="0">
-                <a:solidFill>
-                  <a:srgbClr val="97BC62"/>
-                </a:solidFill>
-                <a:latin typeface="Calibri"/>
-              </a:rPr>
-              <a:t>–  </a:t>
-            </a:r>
-            <a:r>
-              <a:rPr sz="2400" b="0" i="1" dirty="0">
-                <a:solidFill>
-                  <a:srgbClr val="222B22"/>
-                </a:solidFill>
-                <a:latin typeface="Calibri"/>
-              </a:rPr>
-              <a:t>Today, where did the path show up? The rocky? The thorny? The good soil?</a:t>
-            </a:r>
-          </a:p>
-          <a:p>
-            <a:pPr marL="685800" indent="-274320">
-              <a:spcAft>
-                <a:spcPts val="700"/>
-              </a:spcAft>
-            </a:pPr>
-            <a:r>
-              <a:rPr sz="2400" b="1" i="0" dirty="0">
-                <a:solidFill>
-                  <a:srgbClr val="97BC62"/>
-                </a:solidFill>
-                <a:latin typeface="Calibri"/>
-              </a:rPr>
-              <a:t>–  </a:t>
-            </a:r>
-            <a:r>
-              <a:rPr sz="2400" b="0" i="0" dirty="0">
-                <a:solidFill>
-                  <a:srgbClr val="222B22"/>
-                </a:solidFill>
-                <a:latin typeface="Calibri"/>
-              </a:rPr>
-              <a:t>One sentence per soil. Specific, not general.</a:t>
-            </a:r>
-          </a:p>
-          <a:p>
-            <a:pPr marL="274320" indent="-274320">
-              <a:spcAft>
-                <a:spcPts val="900"/>
-              </a:spcAft>
-            </a:pPr>
-            <a:r>
-              <a:rPr sz="2200" b="1" i="0" dirty="0">
-                <a:solidFill>
-                  <a:srgbClr val="97BC62"/>
-                </a:solidFill>
-                <a:latin typeface="Calibri"/>
-              </a:rPr>
-              <a:t>•  </a:t>
-            </a:r>
-            <a:r>
-              <a:rPr sz="2200" b="0" i="0" dirty="0">
-                <a:solidFill>
-                  <a:srgbClr val="222B22"/>
-                </a:solidFill>
-                <a:latin typeface="Calibri"/>
-              </a:rPr>
-              <a:t>No fixing. We notice; the Spirit fixes.</a:t>
-            </a:r>
-          </a:p>
-          <a:p>
-            <a:pPr marL="274320" indent="-274320">
-              <a:spcAft>
-                <a:spcPts val="900"/>
-              </a:spcAft>
-            </a:pPr>
-            <a:r>
-              <a:rPr sz="2200" b="1" i="0" dirty="0">
-                <a:solidFill>
-                  <a:srgbClr val="97BC62"/>
-                </a:solidFill>
-                <a:latin typeface="Calibri"/>
-              </a:rPr>
-              <a:t>•  </a:t>
-            </a:r>
-            <a:r>
-              <a:rPr sz="2200" b="0" i="0" dirty="0">
-                <a:solidFill>
-                  <a:srgbClr val="222B22"/>
-                </a:solidFill>
-                <a:latin typeface="Calibri"/>
-              </a:rPr>
-              <a:t>Keep the morning question going too: </a:t>
-            </a:r>
-            <a:r>
-              <a:rPr sz="2200" b="0" i="1" dirty="0">
-                <a:solidFill>
-                  <a:srgbClr val="222B22"/>
-                </a:solidFill>
-                <a:latin typeface="Calibri"/>
-              </a:rPr>
-              <a:t>“Father, what are you up to today?”</a:t>
-            </a:r>
-            <a:r>
-              <a:rPr sz="2200" b="0" i="0" dirty="0">
-                <a:solidFill>
-                  <a:srgbClr val="222B22"/>
-                </a:solidFill>
-                <a:latin typeface="Calibri"/>
-              </a:rPr>
-              <a:t> The practices stack.</a:t>
-            </a:r>
-          </a:p>
-        </p:txBody>
-      </p:sp>
-      <p:sp>
-        <p:nvSpPr>
-          <p:cNvPr id="90" name="SlideNum"/>
-          <p:cNvSpPr txBox="1"/>
-          <p:nvPr/>
-        </p:nvSpPr>
-        <p:spPr>
-          <a:xfrm>
-            <a:off x="11384280" y="6446520"/>
-            <a:ext cx="640080" cy="292608"/>
-          </a:xfrm>
-          <a:prstGeom prst="rect">
-            <a:avLst/>
-          </a:prstGeom>
-          <a:noFill/>
-        </p:spPr>
-        <p:txBody>
           <a:bodyPr wrap="none" lIns="0" tIns="0" rIns="45720" bIns="0" anchor="ctr"/>
           <a:lstStyle/>
           <a:p>
             <a:pPr algn="r"/>
             <a:r>
-              <a:t>30</a:t>
+              <a:t>26</a:t>
             </a:r>
             <a:endParaRPr sz="1000" b="1">
               <a:solidFill>
@@ -8010,42 +8707,149 @@
           </a:p>
         </p:txBody>
       </p:sp>
-      <p:pic>
-        <p:nvPicPr>
-          <p:cNvPr id="30" name="Picture 30" descr="sprouts emerging from dark soil"/>
-          <p:cNvPicPr>
-            <a:picLocks noChangeAspect="1"/>
-          </p:cNvPicPr>
+      <p:sp>
+        <p:nvSpPr>
+          <p:cNvPr id="260" name="StruggleCard"/>
+          <p:cNvSpPr txBox="1"/>
           <p:nvPr/>
-        </p:nvPicPr>
-        <p:blipFill>
-          <a:blip r:embed="rId3"/>
-          <a:stretch>
-            <a:fillRect/>
-          </a:stretch>
-        </p:blipFill>
-        <p:spPr>
-          <a:xfrm>
-            <a:off x="7818120" y="1463040"/>
-            <a:ext cx="3264408" cy="4892040"/>
+        </p:nvSpPr>
+        <p:spPr>
+          <a:xfrm>
+            <a:off x="822960" y="1508760"/>
+            <a:ext cx="6035040" cy="3108960"/>
           </a:xfrm>
           <a:prstGeom prst="rect">
             <a:avLst/>
           </a:prstGeom>
-          <a:ln w="76200">
-            <a:solidFill>
-              <a:srgbClr val="FFFFFF"/>
-            </a:solidFill>
-          </a:ln>
-          <a:effectLst>
-            <a:outerShdw blurRad="63500" dist="25400" dir="5400000" rotWithShape="0">
-              <a:srgbClr val="000000">
-                <a:alpha val="35000"/>
-              </a:srgbClr>
-            </a:outerShdw>
-          </a:effectLst>
-        </p:spPr>
-      </p:pic>
+          <a:solidFill>
+            <a:srgbClr val="F1F6EC"/>
+          </a:solidFill>
+        </p:spPr>
+        <p:txBody>
+          <a:bodyPr wrap="square" lIns="137160" tIns="91440" rIns="137160" bIns="91440" anchor="ctr"/>
+          <a:lstStyle/>
+          <a:p>
+            <a:pPr>
+              <a:spcAft>
+                <a:spcPts val="800"/>
+              </a:spcAft>
+            </a:pPr>
+            <a:r>
+              <a:rPr sz="1200" b="1" i="0" dirty="0">
+                <a:solidFill>
+                  <a:srgbClr val="97BC62"/>
+                </a:solidFill>
+                <a:latin typeface="Calibri"/>
+              </a:rPr>
+              <a:t>ROMANS 7:15, 18–19</a:t>
+            </a:r>
+          </a:p>
+          <a:p>
+            <a:pPr>
+              <a:spcAft>
+                <a:spcPts val="400"/>
+              </a:spcAft>
+            </a:pPr>
+            <a:r>
+              <a:rPr sz="2400" b="0" i="1" dirty="0">
+                <a:solidFill>
+                  <a:srgbClr val="222B22"/>
+                </a:solidFill>
+                <a:latin typeface="Cambria"/>
+              </a:rPr>
+              <a:t>“For I do not understand my own actions. For I do not do what I want, but I do the very thing I hate… For I have the desire to do what is right, but not the ability to carry it out. For I do not do the good I want, but the evil I do not want is what I keep on doing.”</a:t>
+            </a:r>
+          </a:p>
+        </p:txBody>
+      </p:sp>
+      <p:sp>
+        <p:nvSpPr>
+          <p:cNvPr id="261" name="RescueCard"/>
+          <p:cNvSpPr txBox="1"/>
+          <p:nvPr/>
+        </p:nvSpPr>
+        <p:spPr>
+          <a:xfrm>
+            <a:off x="7132320" y="1508760"/>
+            <a:ext cx="4206240" cy="3108960"/>
+          </a:xfrm>
+          <a:prstGeom prst="rect">
+            <a:avLst/>
+          </a:prstGeom>
+          <a:solidFill>
+            <a:srgbClr val="F1F6EC"/>
+          </a:solidFill>
+        </p:spPr>
+        <p:txBody>
+          <a:bodyPr wrap="square" lIns="137160" tIns="91440" rIns="137160" bIns="91440" anchor="ctr"/>
+          <a:lstStyle/>
+          <a:p>
+            <a:pPr>
+              <a:spcAft>
+                <a:spcPts val="800"/>
+              </a:spcAft>
+            </a:pPr>
+            <a:r>
+              <a:rPr sz="1200" b="1" i="0" dirty="0">
+                <a:solidFill>
+                  <a:srgbClr val="97BC62"/>
+                </a:solidFill>
+                <a:latin typeface="Calibri"/>
+              </a:rPr>
+              <a:t>ROMANS 7:24–25</a:t>
+            </a:r>
+          </a:p>
+          <a:p>
+            <a:pPr>
+              <a:spcAft>
+                <a:spcPts val="400"/>
+              </a:spcAft>
+            </a:pPr>
+            <a:r>
+              <a:rPr sz="2400" b="0" i="1" dirty="0">
+                <a:solidFill>
+                  <a:srgbClr val="222B22"/>
+                </a:solidFill>
+                <a:latin typeface="Cambria"/>
+              </a:rPr>
+              <a:t>“Wretched man that I am! Who will deliver me from this body of death? Thanks be to God through Jesus Christ our Lord!”</a:t>
+            </a:r>
+          </a:p>
+        </p:txBody>
+      </p:sp>
+      <p:sp>
+        <p:nvSpPr>
+          <p:cNvPr id="262" name="Landing"/>
+          <p:cNvSpPr txBox="1"/>
+          <p:nvPr/>
+        </p:nvSpPr>
+        <p:spPr>
+          <a:xfrm>
+            <a:off x="822960" y="5029200"/>
+            <a:ext cx="10515600" cy="1005840"/>
+          </a:xfrm>
+          <a:prstGeom prst="rect">
+            <a:avLst/>
+          </a:prstGeom>
+          <a:noFill/>
+        </p:spPr>
+        <p:txBody>
+          <a:bodyPr wrap="square"/>
+          <a:lstStyle/>
+          <a:p>
+            <a:pPr algn="l"/>
+            <a:r>
+              <a:rPr sz="2800" b="0" i="1" dirty="0">
+                <a:solidFill>
+                  <a:srgbClr val="222B22"/>
+                </a:solidFill>
+                <a:latin typeface="Calibri"/>
+              </a:rPr>
+              <a:t>Mixed soil, in the mouth of an apostle — and he lands on rescue, not despair. All four soils in one honest week is not failure. It is apostolic company.</a:t>
+            </a:r>
+          </a:p>
+        </p:txBody>
+      </p:sp>
     </p:spTree>
   </p:cSld>
   <p:clrMapOvr>
@@ -8054,7 +8858,7 @@
 </p:sld>
 </file>
 
-<file path=ppt/slides/slide31.xml><?xml version="1.0" encoding="utf-8"?>
+<file path=ppt/slides/slide8.xml><?xml version="1.0" encoding="utf-8"?>
 <p:sld xmlns:a="http://schemas.openxmlformats.org/drawingml/2006/main" xmlns:r="http://schemas.openxmlformats.org/officeDocument/2006/relationships" xmlns:p="http://schemas.openxmlformats.org/presentationml/2006/main">
   <p:cSld>
     <p:spTree>
@@ -8134,7 +8938,7 @@
                 </a:solidFill>
                 <a:latin typeface="Cambria"/>
               </a:rPr>
-              <a:t>Your Take-Home Card — This Session’s Practice</a:t>
+              <a:t>Question Zero — Private, Journal Only</a:t>
             </a:r>
           </a:p>
         </p:txBody>
@@ -8161,7 +8965,7 @@
           <a:p>
             <a:pPr algn="r"/>
             <a:r>
-              <a:t>31</a:t>
+              <a:t>27</a:t>
             </a:r>
             <a:endParaRPr sz="1000" b="1">
               <a:solidFill>
@@ -8172,52 +8976,71 @@
           </a:p>
         </p:txBody>
       </p:sp>
-      <p:pic>
-        <p:nvPicPr>
-          <p:cNvPr id="270" name="CardImage" descr="the Week 2 check-off card, as handed out"/>
-          <p:cNvPicPr>
-            <a:picLocks noChangeAspect="1"/>
-          </p:cNvPicPr>
+      <p:sp>
+        <p:nvSpPr>
+          <p:cNvPr id="240" name="CorCard"/>
+          <p:cNvSpPr txBox="1"/>
           <p:nvPr/>
-        </p:nvPicPr>
-        <p:blipFill>
-          <a:blip r:embed="rId3"/>
-          <a:stretch>
-            <a:fillRect/>
-          </a:stretch>
-        </p:blipFill>
-        <p:spPr>
-          <a:xfrm>
-            <a:off x="1158087" y="1554480"/>
-            <a:ext cx="9875520" cy="4340031"/>
+        </p:nvSpPr>
+        <p:spPr>
+          <a:xfrm>
+            <a:off x="822960" y="1417320"/>
+            <a:ext cx="10515600" cy="1325880"/>
           </a:xfrm>
           <a:prstGeom prst="rect">
             <a:avLst/>
           </a:prstGeom>
-          <a:ln w="76200">
-            <a:solidFill>
-              <a:srgbClr val="FFFFFF"/>
-            </a:solidFill>
-          </a:ln>
-          <a:effectLst>
-            <a:outerShdw blurRad="63500" dist="25400" dir="5400000" rotWithShape="0">
-              <a:srgbClr val="000000">
-                <a:alpha val="35000"/>
-              </a:srgbClr>
-            </a:outerShdw>
-          </a:effectLst>
-        </p:spPr>
-      </p:pic>
-      <p:sp>
-        <p:nvSpPr>
-          <p:cNvPr id="271" name="Caption"/>
+          <a:solidFill>
+            <a:srgbClr val="F1F6EC"/>
+          </a:solidFill>
+        </p:spPr>
+        <p:txBody>
+          <a:bodyPr wrap="square" lIns="137160" tIns="91440" rIns="137160" bIns="91440" anchor="ctr"/>
+          <a:lstStyle/>
+          <a:p>
+            <a:pPr>
+              <a:spcAft>
+                <a:spcPts val="800"/>
+              </a:spcAft>
+            </a:pPr>
+            <a:r>
+              <a:rPr sz="1200" b="1" i="0">
+                <a:solidFill>
+                  <a:srgbClr val="97BC62"/>
+                </a:solidFill>
+                <a:latin typeface="Calibri"/>
+              </a:rPr>
+              <a:t>2 CORINTHIANS 13:5</a:t>
+            </a:r>
+          </a:p>
+          <a:p>
+            <a:pPr>
+              <a:spcAft>
+                <a:spcPts val="400"/>
+              </a:spcAft>
+            </a:pPr>
+            <a:r>
+              <a:rPr sz="2400" b="0" i="1">
+                <a:solidFill>
+                  <a:srgbClr val="222B22"/>
+                </a:solidFill>
+                <a:latin typeface="Cambria"/>
+              </a:rPr>
+              <a:t>“Examine yourselves, to see whether you are in the faith. Test yourselves.”</a:t>
+            </a:r>
+          </a:p>
+        </p:txBody>
+      </p:sp>
+      <p:sp>
+        <p:nvSpPr>
+          <p:cNvPr id="241" name="QzQuestion"/>
           <p:cNvSpPr txBox="1"/>
           <p:nvPr/>
         </p:nvSpPr>
         <p:spPr>
           <a:xfrm>
-            <a:off x="822960" y="6077391"/>
-            <a:ext cx="10515600" cy="457200"/>
+            <a:off x="822960" y="3063240"/>
+            <a:ext cx="10515600" cy="1417320"/>
           </a:xfrm>
           <a:prstGeom prst="rect">
             <a:avLst/>
@@ -8228,15 +9051,90 @@
           <a:bodyPr wrap="square"/>
           <a:lstStyle/>
           <a:p>
+            <a:pPr algn="l"/>
+            <a:r>
+              <a:rPr sz="2400" b="1" i="0">
+                <a:solidFill>
+                  <a:srgbClr val="222B22"/>
+                </a:solidFill>
+                <a:latin typeface="Cambria"/>
+              </a:rPr>
+              <a:t>Has the seed itself ever gone into your ground? Has there been a time you actually said yes to Jesus — your yes, not your family’s?</a:t>
+            </a:r>
+          </a:p>
+        </p:txBody>
+      </p:sp>
+      <p:sp>
+        <p:nvSpPr>
+          <p:cNvPr id="242" name="QzSub"/>
+          <p:cNvSpPr txBox="1"/>
+          <p:nvPr/>
+        </p:nvSpPr>
+        <p:spPr>
+          <a:xfrm>
+            <a:off x="479507" y="4389120"/>
+            <a:ext cx="10515600" cy="548640"/>
+          </a:xfrm>
+          <a:prstGeom prst="rect">
+            <a:avLst/>
+          </a:prstGeom>
+          <a:noFill/>
+        </p:spPr>
+        <p:txBody>
+          <a:bodyPr wrap="square"/>
+          <a:lstStyle/>
+          <a:p>
             <a:pPr algn="ctr"/>
             <a:r>
-              <a:rPr sz="1800" b="0" i="1">
+              <a:rPr sz="2400" b="0" i="0" dirty="0">
                 <a:solidFill>
                   <a:srgbClr val="222B22"/>
                 </a:solidFill>
                 <a:latin typeface="Calibri"/>
               </a:rPr>
-              <a:t>Handed out now — fridge, mirror, journal pocket.</a:t>
+              <a:t>Write your honest answer — yes, no, or I’m not sure. Nobody shares this one</a:t>
+            </a:r>
+            <a:r>
+              <a:rPr sz="1800" b="0" i="0" dirty="0">
+                <a:solidFill>
+                  <a:srgbClr val="222B22"/>
+                </a:solidFill>
+                <a:latin typeface="Calibri"/>
+              </a:rPr>
+              <a:t>.</a:t>
+            </a:r>
+          </a:p>
+        </p:txBody>
+      </p:sp>
+      <p:sp>
+        <p:nvSpPr>
+          <p:cNvPr id="243" name="QzRoad"/>
+          <p:cNvSpPr txBox="1"/>
+          <p:nvPr/>
+        </p:nvSpPr>
+        <p:spPr>
+          <a:xfrm>
+            <a:off x="822960" y="5349240"/>
+            <a:ext cx="10515600" cy="1005840"/>
+          </a:xfrm>
+          <a:prstGeom prst="rect">
+            <a:avLst/>
+          </a:prstGeom>
+          <a:noFill/>
+        </p:spPr>
+        <p:txBody>
+          <a:bodyPr wrap="square"/>
+          <a:lstStyle/>
+          <a:p>
+            <a:pPr algn="l"/>
+            <a:r>
+              <a:rPr sz="2400" b="0" i="1" dirty="0">
+                <a:solidFill>
+                  <a:srgbClr val="222B22"/>
+                </a:solidFill>
+                <a:latin typeface="Calibri"/>
+              </a:rPr>
+              <a:t>If it’s no, or not sure — the road is short. The thief walked it in one sentence. Any Companion, any Wednesday, quietly — or start with your parent, tonight, in the car.</a:t>
             </a:r>
           </a:p>
         </p:txBody>
@@ -8249,7 +9147,7 @@
 </p:sld>
 </file>
 
-<file path=ppt/slides/slide32.xml><?xml version="1.0" encoding="utf-8"?>
+<file path=ppt/slides/slide9.xml><?xml version="1.0" encoding="utf-8"?>
 <p:sld xmlns:a="http://schemas.openxmlformats.org/drawingml/2006/main" xmlns:r="http://schemas.openxmlformats.org/officeDocument/2006/relationships" xmlns:p="http://schemas.openxmlformats.org/presentationml/2006/main">
   <p:cSld>
     <p:spTree>
@@ -8329,7 +9227,7 @@
                 </a:solidFill>
                 <a:latin typeface="Cambria"/>
               </a:rPr>
-              <a:t>The Leader Feedback Round</a:t>
+              <a:t>pairs — the Heart Soil Diagnostic</a:t>
             </a:r>
           </a:p>
         </p:txBody>
@@ -8342,8 +9240,8 @@
         </p:nvSpPr>
         <p:spPr>
           <a:xfrm>
-            <a:off x="822960" y="1554480"/>
-            <a:ext cx="6675120" cy="4754880"/>
+            <a:off x="822960" y="1508760"/>
+            <a:ext cx="6675120" cy="4937760"/>
           </a:xfrm>
           <a:prstGeom prst="rect">
             <a:avLst/>
@@ -8356,11 +9254,11 @@
           <a:p>
             <a:pPr marL="274320" indent="-274320">
               <a:spcAft>
-                <a:spcPts val="900"/>
+                <a:spcPts val="800"/>
               </a:spcAft>
             </a:pPr>
             <a:r>
-              <a:rPr sz="2800" b="1" i="0">
+              <a:rPr sz="2200" b="1" i="0">
                 <a:solidFill>
                   <a:srgbClr val="97BC62"/>
                 </a:solidFill>
@@ -8369,19 +9267,37 @@
               <a:t>•  </a:t>
             </a:r>
             <a:r>
-              <a:rPr sz="2800" b="0" i="0">
+              <a:rPr sz="2000" b="0" i="0">
                 <a:solidFill>
                   <a:srgbClr val="222B22"/>
                 </a:solidFill>
                 <a:latin typeface="Calibri"/>
               </a:rPr>
-              <a:t>Two rounds, same as every session — the container holder first, then the content presenter: three things each</a:t>
-            </a:r>
-          </a:p>
-          <a:p>
-            <a:pPr marL="685800" indent="-274320">
+              <a:t>Not </a:t>
+            </a:r>
+            <a:r>
+              <a:rPr sz="2000" b="0" i="1">
+                <a:solidFill>
+                  <a:srgbClr val="222B22"/>
+                </a:solidFill>
+                <a:latin typeface="Calibri"/>
+              </a:rPr>
+              <a:t>“which soil am I?”</a:t>
+            </a:r>
+            <a:r>
+              <a:rPr sz="2000" b="0" i="0">
+                <a:solidFill>
+                  <a:srgbClr val="222B22"/>
+                </a:solidFill>
+                <a:latin typeface="Calibri"/>
+              </a:rPr>
+              <a:t> — where does each soil show up in my life right now? Specifically.</a:t>
+            </a:r>
+          </a:p>
+          <a:p>
+            <a:pPr marL="342900" indent="-342900">
               <a:spcAft>
-                <a:spcPts val="700"/>
+                <a:spcPts val="650"/>
               </a:spcAft>
             </a:pPr>
             <a:r>
@@ -8391,22 +9307,22 @@
                 </a:solidFill>
                 <a:latin typeface="Calibri"/>
               </a:rPr>
-              <a:t>–  </a:t>
-            </a:r>
-            <a:r>
-              <a:rPr sz="2000" b="0" i="1">
+              <a:t>1   </a:t>
+            </a:r>
+            <a:r>
+              <a:rPr sz="2000" b="0" i="0">
                 <a:solidFill>
                   <a:srgbClr val="222B22"/>
                 </a:solidFill>
                 <a:latin typeface="Calibri"/>
               </a:rPr>
-              <a:t>“What I think went well tonight: ______”</a:t>
-            </a:r>
-          </a:p>
-          <a:p>
-            <a:pPr marL="685800" indent="-274320">
+              <a:t>Path — where is the ground hard right now? One specific place, this week</a:t>
+            </a:r>
+          </a:p>
+          <a:p>
+            <a:pPr marL="342900" indent="-342900">
               <a:spcAft>
-                <a:spcPts val="700"/>
+                <a:spcPts val="650"/>
               </a:spcAft>
             </a:pPr>
             <a:r>
@@ -8416,22 +9332,22 @@
                 </a:solidFill>
                 <a:latin typeface="Calibri"/>
               </a:rPr>
-              <a:t>–  </a:t>
-            </a:r>
-            <a:r>
-              <a:rPr sz="2000" b="0" i="1">
+              <a:t>2   </a:t>
+            </a:r>
+            <a:r>
+              <a:rPr sz="2000" b="0" i="0">
                 <a:solidFill>
                   <a:srgbClr val="222B22"/>
                 </a:solidFill>
                 <a:latin typeface="Calibri"/>
               </a:rPr>
-              <a:t>“What I’d do differently next time: ______”</a:t>
-            </a:r>
-          </a:p>
-          <a:p>
-            <a:pPr marL="685800" indent="-274320">
+              <a:t>Rocky — where has a season with God not lasted? What sun revealed the missing roots?</a:t>
+            </a:r>
+          </a:p>
+          <a:p>
+            <a:pPr marL="342900" indent="-342900">
               <a:spcAft>
-                <a:spcPts val="700"/>
+                <a:spcPts val="650"/>
               </a:spcAft>
             </a:pPr>
             <a:r>
@@ -8441,26 +9357,51 @@
                 </a:solidFill>
                 <a:latin typeface="Calibri"/>
               </a:rPr>
-              <a:t>–  </a:t>
-            </a:r>
-            <a:r>
-              <a:rPr sz="2000" b="0" i="1">
+              <a:t>3   </a:t>
+            </a:r>
+            <a:r>
+              <a:rPr sz="2000" b="0" i="0">
                 <a:solidFill>
                   <a:srgbClr val="222B22"/>
                 </a:solidFill>
                 <a:latin typeface="Calibri"/>
               </a:rPr>
-              <a:t>“If I were to teach tonight’s process to someone, I would tell them: ______”</a:t>
+              <a:t>Thorny — what is choking me right now: cares, riches, other desires? Which is loudest?</a:t>
+            </a:r>
+          </a:p>
+          <a:p>
+            <a:pPr marL="342900" indent="-342900">
+              <a:spcAft>
+                <a:spcPts val="650"/>
+              </a:spcAft>
+            </a:pPr>
+            <a:r>
+              <a:rPr sz="2000" b="1" i="0">
+                <a:solidFill>
+                  <a:srgbClr val="97BC62"/>
+                </a:solidFill>
+                <a:latin typeface="Calibri"/>
+              </a:rPr>
+              <a:t>4   </a:t>
+            </a:r>
+            <a:r>
+              <a:rPr sz="2000" b="0" i="0">
+                <a:solidFill>
+                  <a:srgbClr val="222B22"/>
+                </a:solidFill>
+                <a:latin typeface="Calibri"/>
+              </a:rPr>
+              <a:t>Good — where has something God planted actually grown? Name one real piece of fruit</a:t>
             </a:r>
           </a:p>
           <a:p>
             <a:pPr marL="274320" indent="-274320">
               <a:spcAft>
-                <a:spcPts val="900"/>
+                <a:spcPts val="650"/>
               </a:spcAft>
             </a:pPr>
             <a:r>
-              <a:rPr sz="2800" b="1" i="0">
+              <a:rPr sz="2000" b="1" i="0">
                 <a:solidFill>
                   <a:srgbClr val="97BC62"/>
                 </a:solidFill>
@@ -8469,23 +9410,23 @@
               <a:t>•  </a:t>
             </a:r>
             <a:r>
-              <a:rPr sz="2800" b="0" i="0">
+              <a:rPr sz="2000" b="0" i="0">
                 <a:solidFill>
                   <a:srgbClr val="222B22"/>
                 </a:solidFill>
                 <a:latin typeface="Calibri"/>
               </a:rPr>
-              <a:t>Then the room — the same two questions about tonight</a:t>
+              <a:t>Journal two minutes, then share — a parent answers first, every round</a:t>
             </a:r>
           </a:p>
           <a:p>
             <a:pPr marL="274320" indent="-274320">
               <a:spcAft>
-                <a:spcPts val="900"/>
+                <a:spcPts val="650"/>
               </a:spcAft>
             </a:pPr>
             <a:r>
-              <a:rPr sz="2800" b="1" i="0">
+              <a:rPr sz="2000" b="1" i="0">
                 <a:solidFill>
                   <a:srgbClr val="97BC62"/>
                 </a:solidFill>
@@ -8494,13 +9435,13 @@
               <a:t>•  </a:t>
             </a:r>
             <a:r>
-              <a:rPr sz="2800" b="0" i="0">
+              <a:rPr sz="2000" b="0" i="0">
                 <a:solidFill>
                   <a:srgbClr val="222B22"/>
                 </a:solidFill>
                 <a:latin typeface="Calibri"/>
               </a:rPr>
-              <a:t>The leaders receive without defending — “thank you” is the whole response</a:t>
+              <a:t>“I’d rather not share that one” is a complete answer — a gift, not ammunition</a:t>
             </a:r>
           </a:p>
         </p:txBody>
@@ -8527,7 +9468,7 @@
           <a:p>
             <a:pPr algn="r"/>
             <a:r>
-              <a:t>32</a:t>
+              <a:t>28</a:t>
             </a:r>
             <a:endParaRPr sz="1000" b="1">
               <a:solidFill>
@@ -8540,7 +9481,7 @@
       </p:sp>
       <p:pic>
         <p:nvPicPr>
-          <p:cNvPr id="33" name="Picture 33" descr="compass on the trail - the weekly bearing check"/>
+          <p:cNvPr id="30" name="Picture 30" descr="hands examining soil and seed"/>
           <p:cNvPicPr>
             <a:picLocks noChangeAspect="1"/>
           </p:cNvPicPr>
@@ -8554,8 +9495,8 @@
         </p:blipFill>
         <p:spPr>
           <a:xfrm>
-            <a:off x="8106160" y="1463040"/>
-            <a:ext cx="3259831" cy="4892040"/>
+            <a:off x="7818120" y="1463040"/>
+            <a:ext cx="3264408" cy="4892040"/>
           </a:xfrm>
           <a:prstGeom prst="rect">
             <a:avLst/>
@@ -8574,415 +9515,6 @@
           </a:effectLst>
         </p:spPr>
       </p:pic>
-    </p:spTree>
-  </p:cSld>
-  <p:clrMapOvr>
-    <a:masterClrMapping/>
-  </p:clrMapOvr>
-</p:sld>
-</file>
-
-<file path=ppt/slides/slide33.xml><?xml version="1.0" encoding="utf-8"?>
-<p:sld xmlns:a="http://schemas.openxmlformats.org/drawingml/2006/main" xmlns:r="http://schemas.openxmlformats.org/officeDocument/2006/relationships" xmlns:p="http://schemas.openxmlformats.org/presentationml/2006/main">
-  <p:cSld>
-    <p:spTree>
-      <p:nvGrpSpPr>
-        <p:cNvPr id="1" name=""/>
-        <p:cNvGrpSpPr/>
-        <p:nvPr/>
-      </p:nvGrpSpPr>
-      <p:grpSpPr>
-        <a:xfrm>
-          <a:off x="0" y="0"/>
-          <a:ext cx="0" cy="0"/>
-          <a:chOff x="0" y="0"/>
-          <a:chExt cx="0" cy="0"/>
-        </a:xfrm>
-      </p:grpSpPr>
-      <p:sp>
-        <p:nvSpPr>
-          <p:cNvPr id="2" name="Rectangle 1"/>
-          <p:cNvSpPr/>
-          <p:nvPr/>
-        </p:nvSpPr>
-        <p:spPr>
-          <a:xfrm>
-            <a:off x="0" y="0"/>
-            <a:ext cx="12191695" cy="6858000"/>
-          </a:xfrm>
-          <a:prstGeom prst="rect">
-            <a:avLst/>
-          </a:prstGeom>
-          <a:solidFill>
-            <a:srgbClr val="FFFFFF"/>
-          </a:solidFill>
-          <a:ln>
-            <a:noFill/>
-          </a:ln>
-        </p:spPr>
-        <p:txBody>
-          <a:bodyPr/>
-          <a:lstStyle/>
-          <a:p>
-            <a:endParaRPr/>
-          </a:p>
-        </p:txBody>
-      </p:sp>
-      <p:sp>
-        <p:nvSpPr>
-          <p:cNvPr id="3" name="TextBox 2"/>
-          <p:cNvSpPr txBox="1"/>
-          <p:nvPr/>
-        </p:nvSpPr>
-        <p:spPr>
-          <a:xfrm>
-            <a:off x="822960" y="502920"/>
-            <a:ext cx="10515600" cy="822960"/>
-          </a:xfrm>
-          <a:prstGeom prst="rect">
-            <a:avLst/>
-          </a:prstGeom>
-          <a:noFill/>
-        </p:spPr>
-        <p:txBody>
-          <a:bodyPr wrap="square">
-            <a:spAutoFit/>
-          </a:bodyPr>
-          <a:lstStyle/>
-          <a:p>
-            <a:pPr algn="l">
-              <a:spcAft>
-                <a:spcPts val="600"/>
-              </a:spcAft>
-            </a:pPr>
-            <a:r>
-              <a:rPr sz="2800" b="1" i="0">
-                <a:solidFill>
-                  <a:srgbClr val="2C5F2D"/>
-                </a:solidFill>
-                <a:latin typeface="Cambria"/>
-              </a:rPr>
-              <a:t>Closing the Container + Aaronic Blessing</a:t>
-            </a:r>
-          </a:p>
-        </p:txBody>
-      </p:sp>
-      <p:sp>
-        <p:nvSpPr>
-          <p:cNvPr id="4" name="TextBox 4"/>
-          <p:cNvSpPr txBox="1"/>
-          <p:nvPr/>
-        </p:nvSpPr>
-        <p:spPr>
-          <a:xfrm>
-            <a:off x="822960" y="1600200"/>
-            <a:ext cx="5669280" cy="4206240"/>
-          </a:xfrm>
-          <a:prstGeom prst="rect">
-            <a:avLst/>
-          </a:prstGeom>
-          <a:noFill/>
-        </p:spPr>
-        <p:txBody>
-          <a:bodyPr wrap="square" lIns="91440" tIns="91440" rIns="91440" bIns="91440"/>
-          <a:lstStyle/>
-          <a:p>
-            <a:pPr marL="274320" indent="-274320">
-              <a:spcAft>
-                <a:spcPts val="900"/>
-              </a:spcAft>
-            </a:pPr>
-            <a:r>
-              <a:rPr sz="2200" b="1" i="0">
-                <a:solidFill>
-                  <a:srgbClr val="97BC62"/>
-                </a:solidFill>
-                <a:latin typeface="Calibri"/>
-              </a:rPr>
-              <a:t>•  </a:t>
-            </a:r>
-            <a:r>
-              <a:rPr sz="2200" b="0" i="0">
-                <a:solidFill>
-                  <a:srgbClr val="222B22"/>
-                </a:solidFill>
-                <a:latin typeface="Calibri"/>
-              </a:rPr>
-              <a:t>We close the way we opened — the container, six steps:</a:t>
-            </a:r>
-          </a:p>
-          <a:p>
-            <a:pPr marL="685800" indent="-274320">
-              <a:spcAft>
-                <a:spcPts val="700"/>
-              </a:spcAft>
-            </a:pPr>
-            <a:r>
-              <a:rPr sz="2000" b="1" i="0">
-                <a:solidFill>
-                  <a:srgbClr val="97BC62"/>
-                </a:solidFill>
-                <a:latin typeface="Calibri"/>
-              </a:rPr>
-              <a:t>1   </a:t>
-            </a:r>
-            <a:r>
-              <a:rPr sz="2000" b="0" i="0">
-                <a:solidFill>
-                  <a:srgbClr val="222B22"/>
-                </a:solidFill>
-                <a:latin typeface="Calibri"/>
-              </a:rPr>
-              <a:t>Stand again — same circle, same posture as the open</a:t>
-            </a:r>
-          </a:p>
-          <a:p>
-            <a:pPr marL="685800" indent="-274320">
-              <a:spcAft>
-                <a:spcPts val="700"/>
-              </a:spcAft>
-            </a:pPr>
-            <a:r>
-              <a:rPr sz="2000" b="1" i="0">
-                <a:solidFill>
-                  <a:srgbClr val="97BC62"/>
-                </a:solidFill>
-                <a:latin typeface="Calibri"/>
-              </a:rPr>
-              <a:t>2   </a:t>
-            </a:r>
-            <a:r>
-              <a:rPr sz="2000" b="0" i="0">
-                <a:solidFill>
-                  <a:srgbClr val="222B22"/>
-                </a:solidFill>
-                <a:latin typeface="Calibri"/>
-              </a:rPr>
-              <a:t>One-word landing — compare it to your opening word</a:t>
-            </a:r>
-          </a:p>
-          <a:p>
-            <a:pPr marL="685800" indent="-274320">
-              <a:spcAft>
-                <a:spcPts val="700"/>
-              </a:spcAft>
-            </a:pPr>
-            <a:r>
-              <a:rPr sz="2000" b="1" i="0">
-                <a:solidFill>
-                  <a:srgbClr val="97BC62"/>
-                </a:solidFill>
-                <a:latin typeface="Calibri"/>
-              </a:rPr>
-              <a:t>3   </a:t>
-            </a:r>
-            <a:r>
-              <a:rPr sz="2000" b="0" i="0">
-                <a:solidFill>
-                  <a:srgbClr val="222B22"/>
-                </a:solidFill>
-                <a:latin typeface="Calibri"/>
-              </a:rPr>
-              <a:t>The one thing you are taking from tonight</a:t>
-            </a:r>
-          </a:p>
-          <a:p>
-            <a:pPr marL="685800" indent="-274320">
-              <a:spcAft>
-                <a:spcPts val="700"/>
-              </a:spcAft>
-            </a:pPr>
-            <a:r>
-              <a:rPr sz="2000" b="1" i="0">
-                <a:solidFill>
-                  <a:srgbClr val="97BC62"/>
-                </a:solidFill>
-                <a:latin typeface="Calibri"/>
-              </a:rPr>
-              <a:t>4   </a:t>
-            </a:r>
-            <a:r>
-              <a:rPr sz="2000" b="0" i="0">
-                <a:solidFill>
-                  <a:srgbClr val="222B22"/>
-                </a:solidFill>
-                <a:latin typeface="Calibri"/>
-              </a:rPr>
-              <a:t>The one practice — committed aloud, or modified to one you will actually keep</a:t>
-            </a:r>
-          </a:p>
-          <a:p>
-            <a:pPr marL="685800" indent="-274320">
-              <a:spcAft>
-                <a:spcPts val="700"/>
-              </a:spcAft>
-            </a:pPr>
-            <a:r>
-              <a:rPr sz="2000" b="1" i="0">
-                <a:solidFill>
-                  <a:srgbClr val="97BC62"/>
-                </a:solidFill>
-                <a:latin typeface="Calibri"/>
-              </a:rPr>
-              <a:t>5   </a:t>
-            </a:r>
-            <a:r>
-              <a:rPr sz="2000" b="0" i="0">
-                <a:solidFill>
-                  <a:srgbClr val="222B22"/>
-                </a:solidFill>
-                <a:latin typeface="Calibri"/>
-              </a:rPr>
-              <a:t>Blessings — specific, witnessed, short</a:t>
-            </a:r>
-          </a:p>
-          <a:p>
-            <a:pPr marL="685800" indent="-274320">
-              <a:spcAft>
-                <a:spcPts val="700"/>
-              </a:spcAft>
-            </a:pPr>
-            <a:r>
-              <a:rPr sz="2000" b="1" i="0">
-                <a:solidFill>
-                  <a:srgbClr val="97BC62"/>
-                </a:solidFill>
-                <a:latin typeface="Calibri"/>
-              </a:rPr>
-              <a:t>6   </a:t>
-            </a:r>
-            <a:r>
-              <a:rPr sz="2000" b="0" i="0">
-                <a:solidFill>
-                  <a:srgbClr val="222B22"/>
-                </a:solidFill>
-                <a:latin typeface="Calibri"/>
-              </a:rPr>
-              <a:t>Closing prayer — and the Aaronic blessing, spoken over each other, face to face</a:t>
-            </a:r>
-          </a:p>
-        </p:txBody>
-      </p:sp>
-      <p:sp>
-        <p:nvSpPr>
-          <p:cNvPr id="6" name="TextBox 6"/>
-          <p:cNvSpPr txBox="1"/>
-          <p:nvPr/>
-        </p:nvSpPr>
-        <p:spPr>
-          <a:xfrm>
-            <a:off x="6766560" y="1737360"/>
-            <a:ext cx="4663440" cy="3657600"/>
-          </a:xfrm>
-          <a:prstGeom prst="rect">
-            <a:avLst/>
-          </a:prstGeom>
-          <a:solidFill>
-            <a:srgbClr val="F1F6EC"/>
-          </a:solidFill>
-        </p:spPr>
-        <p:txBody>
-          <a:bodyPr wrap="square" lIns="91440" tIns="91440" rIns="91440" bIns="91440" anchor="ctr"/>
-          <a:lstStyle/>
-          <a:p>
-            <a:pPr>
-              <a:spcAft>
-                <a:spcPts val="1000"/>
-              </a:spcAft>
-            </a:pPr>
-            <a:r>
-              <a:rPr sz="1200" b="1" i="0">
-                <a:solidFill>
-                  <a:srgbClr val="97BC62"/>
-                </a:solidFill>
-                <a:latin typeface="Calibri"/>
-              </a:rPr>
-              <a:t>THE AARONIC BLESSING — NUMBERS 6:24–26</a:t>
-            </a:r>
-          </a:p>
-          <a:p>
-            <a:pPr>
-              <a:spcAft>
-                <a:spcPts val="700"/>
-              </a:spcAft>
-            </a:pPr>
-            <a:r>
-              <a:rPr sz="2400" b="0" i="1">
-                <a:solidFill>
-                  <a:srgbClr val="222B22"/>
-                </a:solidFill>
-                <a:latin typeface="Cambria"/>
-              </a:rPr>
-              <a:t>“The Lord bless you and keep you;</a:t>
-            </a:r>
-          </a:p>
-          <a:p>
-            <a:pPr>
-              <a:spcAft>
-                <a:spcPts val="700"/>
-              </a:spcAft>
-            </a:pPr>
-            <a:r>
-              <a:rPr sz="2400" b="0" i="1">
-                <a:solidFill>
-                  <a:srgbClr val="222B22"/>
-                </a:solidFill>
-                <a:latin typeface="Cambria"/>
-              </a:rPr>
-              <a:t>the Lord make his face to shine upon you, and be gracious to you;</a:t>
-            </a:r>
-          </a:p>
-          <a:p>
-            <a:pPr>
-              <a:spcAft>
-                <a:spcPts val="700"/>
-              </a:spcAft>
-            </a:pPr>
-            <a:r>
-              <a:rPr sz="2400" b="0" i="1">
-                <a:solidFill>
-                  <a:srgbClr val="222B22"/>
-                </a:solidFill>
-                <a:latin typeface="Cambria"/>
-              </a:rPr>
-              <a:t>the Lord lift up his countenance upon you, and give you peace.”</a:t>
-            </a:r>
-          </a:p>
-        </p:txBody>
-      </p:sp>
-      <p:sp>
-        <p:nvSpPr>
-          <p:cNvPr id="90" name="SlideNum"/>
-          <p:cNvSpPr txBox="1"/>
-          <p:nvPr/>
-        </p:nvSpPr>
-        <p:spPr>
-          <a:xfrm>
-            <a:off x="11384280" y="6446520"/>
-            <a:ext cx="640080" cy="292608"/>
-          </a:xfrm>
-          <a:prstGeom prst="rect">
-            <a:avLst/>
-          </a:prstGeom>
-          <a:noFill/>
-        </p:spPr>
-        <p:txBody>
-          <a:bodyPr wrap="none" lIns="0" tIns="0" rIns="45720" bIns="0" anchor="ctr"/>
-          <a:lstStyle/>
-          <a:p>
-            <a:pPr algn="r"/>
-            <a:r>
-              <a:t>33</a:t>
-            </a:r>
-            <a:endParaRPr sz="1000" b="1">
-              <a:solidFill>
-                <a:srgbClr val="7A8A6E"/>
-              </a:solidFill>
-              <a:latin typeface="Calibri"/>
-            </a:endParaRPr>
-          </a:p>
-        </p:txBody>
-      </p:sp>
     </p:spTree>
   </p:cSld>
   <p:clrMapOvr>

--- a/_implementation-notes/evening-series/FotH Evening Session 2 Slides DRAFT v1.pptx
+++ b/_implementation-notes/evening-series/FotH Evening Session 2 Slides DRAFT v1.pptx
@@ -5139,7 +5139,7 @@
                 </a:solidFill>
                 <a:latin typeface="Cambria"/>
               </a:rPr>
-              <a:t>Re-Merge — One Word, Then the Verse</a:t>
+              <a:t>pairs — the Heart Soil Diagnostic</a:t>
             </a:r>
           </a:p>
         </p:txBody>
@@ -5152,8 +5152,8 @@
         </p:nvSpPr>
         <p:spPr>
           <a:xfrm>
-            <a:off x="822960" y="1600200"/>
-            <a:ext cx="5669280" cy="4023360"/>
+            <a:off x="822960" y="1508760"/>
+            <a:ext cx="6675120" cy="4937760"/>
           </a:xfrm>
           <a:prstGeom prst="rect">
             <a:avLst/>
@@ -5170,13 +5170,56 @@
               </a:spcAft>
             </a:pPr>
             <a:r>
+              <a:rPr sz="2200" b="1" i="0">
+                <a:solidFill>
+                  <a:srgbClr val="97BC62"/>
+                </a:solidFill>
+                <a:latin typeface="Calibri"/>
+              </a:rPr>
+              <a:t>•  </a:t>
+            </a:r>
+            <a:r>
+              <a:rPr sz="2000" b="0" i="0">
+                <a:solidFill>
+                  <a:srgbClr val="222B22"/>
+                </a:solidFill>
+                <a:latin typeface="Calibri"/>
+              </a:rPr>
+              <a:t>Not </a:t>
+            </a:r>
+            <a:r>
+              <a:rPr sz="2000" b="0" i="1">
+                <a:solidFill>
+                  <a:srgbClr val="222B22"/>
+                </a:solidFill>
+                <a:latin typeface="Calibri"/>
+              </a:rPr>
+              <a:t>“which soil am I?”</a:t>
+            </a:r>
+            <a:r>
+              <a:rPr sz="2000" b="0" i="0">
+                <a:solidFill>
+                  <a:srgbClr val="222B22"/>
+                </a:solidFill>
+                <a:latin typeface="Calibri"/>
+              </a:rPr>
+              <a:t> — where does each soil show up in my life right now? Specifically.</a:t>
+            </a:r>
+          </a:p>
+          <a:p>
+            <a:pPr marL="342900" indent="-342900">
+              <a:spcAft>
+                <a:spcPts val="650"/>
+              </a:spcAft>
+            </a:pPr>
+            <a:r>
               <a:rPr sz="2000" b="1" i="0">
                 <a:solidFill>
                   <a:srgbClr val="97BC62"/>
                 </a:solidFill>
                 <a:latin typeface="Calibri"/>
               </a:rPr>
-              <a:t>•  </a:t>
+              <a:t>1   </a:t>
             </a:r>
             <a:r>
               <a:rPr sz="2000" b="0" i="0">
@@ -5185,13 +5228,88 @@
                 </a:solidFill>
                 <a:latin typeface="Calibri"/>
               </a:rPr>
-              <a:t>What surfaced stays in your pair — here, just one word from each of us</a:t>
+              <a:t>Path — where is the ground hard right now? One specific place, this week</a:t>
+            </a:r>
+          </a:p>
+          <a:p>
+            <a:pPr marL="342900" indent="-342900">
+              <a:spcAft>
+                <a:spcPts val="650"/>
+              </a:spcAft>
+            </a:pPr>
+            <a:r>
+              <a:rPr sz="2000" b="1" i="0">
+                <a:solidFill>
+                  <a:srgbClr val="97BC62"/>
+                </a:solidFill>
+                <a:latin typeface="Calibri"/>
+              </a:rPr>
+              <a:t>2   </a:t>
+            </a:r>
+            <a:r>
+              <a:rPr sz="2000" b="0" i="0">
+                <a:solidFill>
+                  <a:srgbClr val="222B22"/>
+                </a:solidFill>
+                <a:latin typeface="Calibri"/>
+              </a:rPr>
+              <a:t>Rocky — where has a season with God not lasted? What sun revealed the missing roots?</a:t>
+            </a:r>
+          </a:p>
+          <a:p>
+            <a:pPr marL="342900" indent="-342900">
+              <a:spcAft>
+                <a:spcPts val="650"/>
+              </a:spcAft>
+            </a:pPr>
+            <a:r>
+              <a:rPr sz="2000" b="1" i="0">
+                <a:solidFill>
+                  <a:srgbClr val="97BC62"/>
+                </a:solidFill>
+                <a:latin typeface="Calibri"/>
+              </a:rPr>
+              <a:t>3   </a:t>
+            </a:r>
+            <a:r>
+              <a:rPr sz="2000" b="0" i="0">
+                <a:solidFill>
+                  <a:srgbClr val="222B22"/>
+                </a:solidFill>
+                <a:latin typeface="Calibri"/>
+              </a:rPr>
+              <a:t>Thorny — what is choking me right now: cares, riches, other desires? Which is loudest?</a:t>
+            </a:r>
+          </a:p>
+          <a:p>
+            <a:pPr marL="342900" indent="-342900">
+              <a:spcAft>
+                <a:spcPts val="650"/>
+              </a:spcAft>
+            </a:pPr>
+            <a:r>
+              <a:rPr sz="2000" b="1" i="0">
+                <a:solidFill>
+                  <a:srgbClr val="97BC62"/>
+                </a:solidFill>
+                <a:latin typeface="Calibri"/>
+              </a:rPr>
+              <a:t>4   </a:t>
+            </a:r>
+            <a:r>
+              <a:rPr sz="2000" b="0" i="0">
+                <a:solidFill>
+                  <a:srgbClr val="222B22"/>
+                </a:solidFill>
+                <a:latin typeface="Calibri"/>
+              </a:rPr>
+              <a:t>Good — where has something God planted actually grown? Name one real piece of fruit</a:t>
             </a:r>
           </a:p>
           <a:p>
             <a:pPr marL="274320" indent="-274320">
               <a:spcAft>
-                <a:spcPts val="800"/>
+                <a:spcPts val="650"/>
               </a:spcAft>
             </a:pPr>
             <a:r>
@@ -5210,13 +5328,13 @@
                 </a:solidFill>
                 <a:latin typeface="Calibri"/>
               </a:rPr>
-              <a:t>Then the verse Jesus ends with, read slowly — listen for the word that lands</a:t>
+              <a:t>Journal two minutes, then share — a parent answers first, every round</a:t>
             </a:r>
           </a:p>
           <a:p>
             <a:pPr marL="274320" indent="-274320">
               <a:spcAft>
-                <a:spcPts val="800"/>
+                <a:spcPts val="650"/>
               </a:spcAft>
             </a:pPr>
             <a:r>
@@ -5235,62 +5353,7 @@
                 </a:solidFill>
                 <a:latin typeface="Calibri"/>
               </a:rPr>
-              <a:t>Noticing rocks and thorns is not the opposite of good soil — it is what good soil does</a:t>
-            </a:r>
-          </a:p>
-        </p:txBody>
-      </p:sp>
-      <p:sp>
-        <p:nvSpPr>
-          <p:cNvPr id="6" name="TextBox 6"/>
-          <p:cNvSpPr txBox="1"/>
-          <p:nvPr/>
-        </p:nvSpPr>
-        <p:spPr>
-          <a:xfrm>
-            <a:off x="6766560" y="1737360"/>
-            <a:ext cx="4663440" cy="3291840"/>
-          </a:xfrm>
-          <a:prstGeom prst="rect">
-            <a:avLst/>
-          </a:prstGeom>
-          <a:solidFill>
-            <a:srgbClr val="F1F6EC"/>
-          </a:solidFill>
-        </p:spPr>
-        <p:txBody>
-          <a:bodyPr wrap="square" lIns="91440" tIns="91440" rIns="91440" bIns="91440" anchor="ctr"/>
-          <a:lstStyle/>
-          <a:p>
-            <a:pPr>
-              <a:spcAft>
-                <a:spcPts val="1000"/>
-              </a:spcAft>
-            </a:pPr>
-            <a:r>
-              <a:rPr sz="1200" b="1" i="0">
-                <a:solidFill>
-                  <a:srgbClr val="97BC62"/>
-                </a:solidFill>
-                <a:latin typeface="Calibri"/>
-              </a:rPr>
-              <a:t>MARK 4:20</a:t>
-            </a:r>
-          </a:p>
-          <a:p>
-            <a:pPr>
-              <a:spcAft>
-                <a:spcPts val="600"/>
-              </a:spcAft>
-            </a:pPr>
-            <a:r>
-              <a:rPr sz="2400" b="0" i="1">
-                <a:solidFill>
-                  <a:srgbClr val="222B22"/>
-                </a:solidFill>
-                <a:latin typeface="Cambria"/>
-              </a:rPr>
-              <a:t>“But those that were sown on the good soil are the ones who hear the word and accept it and bear fruit, thirtyfold and sixtyfold and a hundredfold.”</a:t>
+              <a:t>“I’d rather not share that one” is a complete answer — a gift, not ammunition</a:t>
             </a:r>
           </a:p>
         </p:txBody>
@@ -5317,7 +5380,7 @@
           <a:p>
             <a:pPr algn="r"/>
             <a:r>
-              <a:t>29</a:t>
+              <a:t>28</a:t>
             </a:r>
             <a:endParaRPr sz="1000" b="1">
               <a:solidFill>
@@ -5330,7 +5393,7 @@
       </p:sp>
       <p:pic>
         <p:nvPicPr>
-          <p:cNvPr id="30" name="Picture 30" descr="a single apple on the branch"/>
+          <p:cNvPr id="30" name="Picture 30" descr="hands examining soil and seed"/>
           <p:cNvPicPr>
             <a:picLocks noChangeAspect="1"/>
           </p:cNvPicPr>
@@ -5344,8 +5407,8 @@
         </p:blipFill>
         <p:spPr>
           <a:xfrm>
-            <a:off x="822960" y="4160520"/>
-            <a:ext cx="4206240" cy="2368296"/>
+            <a:off x="7818120" y="1463040"/>
+            <a:ext cx="3264408" cy="4892040"/>
           </a:xfrm>
           <a:prstGeom prst="rect">
             <a:avLst/>
@@ -5452,7 +5515,7 @@
                 </a:solidFill>
                 <a:latin typeface="Cambria"/>
               </a:rPr>
-              <a:t>Homework — Two Weeks, Four Parts</a:t>
+              <a:t>Re-Merge — One Word, Then the Verse</a:t>
             </a:r>
           </a:p>
         </p:txBody>
@@ -5465,8 +5528,8 @@
         </p:nvSpPr>
         <p:spPr>
           <a:xfrm>
-            <a:off x="822960" y="1554480"/>
-            <a:ext cx="6675120" cy="4754880"/>
+            <a:off x="822960" y="1600200"/>
+            <a:ext cx="5669280" cy="4023360"/>
           </a:xfrm>
           <a:prstGeom prst="rect">
             <a:avLst/>
@@ -5479,11 +5542,11 @@
           <a:p>
             <a:pPr marL="274320" indent="-274320">
               <a:spcAft>
-                <a:spcPts val="900"/>
+                <a:spcPts val="800"/>
               </a:spcAft>
             </a:pPr>
             <a:r>
-              <a:rPr sz="2200" b="1" i="0" dirty="0">
+              <a:rPr sz="2000" b="1" i="0">
                 <a:solidFill>
                   <a:srgbClr val="97BC62"/>
                 </a:solidFill>
@@ -5492,131 +5555,118 @@
               <a:t>•  </a:t>
             </a:r>
             <a:r>
-              <a:rPr sz="2200" b="0" i="0" dirty="0">
+              <a:rPr sz="2000" b="0" i="0">
                 <a:solidFill>
                   <a:srgbClr val="222B22"/>
                 </a:solidFill>
                 <a:latin typeface="Calibri"/>
               </a:rPr>
-              <a:t>The Soil Journal — three times this week, five minutes each. Not every day; three times.</a:t>
-            </a:r>
-          </a:p>
-          <a:p>
-            <a:pPr marL="685800" indent="-274320">
+              <a:t>What surfaced stays in your pair — here, just one word from each of us</a:t>
+            </a:r>
+          </a:p>
+          <a:p>
+            <a:pPr marL="274320" indent="-274320">
               <a:spcAft>
-                <a:spcPts val="700"/>
+                <a:spcPts val="800"/>
               </a:spcAft>
             </a:pPr>
             <a:r>
-              <a:rPr sz="1800" b="1" i="0" dirty="0">
+              <a:rPr sz="2000" b="1" i="0">
                 <a:solidFill>
                   <a:srgbClr val="97BC62"/>
                 </a:solidFill>
                 <a:latin typeface="Calibri"/>
               </a:rPr>
-              <a:t>–  </a:t>
-            </a:r>
-            <a:r>
-              <a:rPr sz="2400" b="0" i="1" dirty="0">
+              <a:t>•  </a:t>
+            </a:r>
+            <a:r>
+              <a:rPr sz="2000" b="0" i="0">
                 <a:solidFill>
                   <a:srgbClr val="222B22"/>
                 </a:solidFill>
                 <a:latin typeface="Calibri"/>
               </a:rPr>
-              <a:t>Today, where did the path show up? The rocky? The thorny? The good soil?</a:t>
-            </a:r>
-          </a:p>
-          <a:p>
-            <a:pPr marL="685800" indent="-274320">
+              <a:t>Then the verse Jesus ends with, read slowly — listen for the word that lands</a:t>
+            </a:r>
+          </a:p>
+          <a:p>
+            <a:pPr marL="274320" indent="-274320">
               <a:spcAft>
-                <a:spcPts val="700"/>
+                <a:spcPts val="800"/>
               </a:spcAft>
             </a:pPr>
             <a:r>
-              <a:rPr sz="2400" b="1" i="0" dirty="0">
+              <a:rPr sz="2000" b="1" i="0">
                 <a:solidFill>
                   <a:srgbClr val="97BC62"/>
                 </a:solidFill>
                 <a:latin typeface="Calibri"/>
               </a:rPr>
-              <a:t>–  </a:t>
-            </a:r>
-            <a:r>
-              <a:rPr sz="2400" b="0" i="0" dirty="0">
+              <a:t>•  </a:t>
+            </a:r>
+            <a:r>
+              <a:rPr sz="2000" b="0" i="0">
                 <a:solidFill>
                   <a:srgbClr val="222B22"/>
                 </a:solidFill>
                 <a:latin typeface="Calibri"/>
               </a:rPr>
-              <a:t>One sentence per soil. Specific, not general.</a:t>
-            </a:r>
-          </a:p>
-          <a:p>
-            <a:pPr marL="274320" indent="-274320">
+              <a:t>Noticing rocks and thorns is not the opposite of good soil — it is what good soil does</a:t>
+            </a:r>
+          </a:p>
+        </p:txBody>
+      </p:sp>
+      <p:sp>
+        <p:nvSpPr>
+          <p:cNvPr id="6" name="TextBox 6"/>
+          <p:cNvSpPr txBox="1"/>
+          <p:nvPr/>
+        </p:nvSpPr>
+        <p:spPr>
+          <a:xfrm>
+            <a:off x="6766560" y="1737360"/>
+            <a:ext cx="4663440" cy="3291840"/>
+          </a:xfrm>
+          <a:prstGeom prst="rect">
+            <a:avLst/>
+          </a:prstGeom>
+          <a:solidFill>
+            <a:srgbClr val="F1F6EC"/>
+          </a:solidFill>
+        </p:spPr>
+        <p:txBody>
+          <a:bodyPr wrap="square" lIns="91440" tIns="91440" rIns="91440" bIns="91440" anchor="ctr"/>
+          <a:lstStyle/>
+          <a:p>
+            <a:pPr>
               <a:spcAft>
-                <a:spcPts val="900"/>
+                <a:spcPts val="1000"/>
               </a:spcAft>
             </a:pPr>
             <a:r>
-              <a:rPr sz="2200" b="1" i="0" dirty="0">
+              <a:rPr sz="1200" b="1" i="0">
                 <a:solidFill>
                   <a:srgbClr val="97BC62"/>
                 </a:solidFill>
                 <a:latin typeface="Calibri"/>
               </a:rPr>
-              <a:t>•  </a:t>
-            </a:r>
-            <a:r>
-              <a:rPr sz="2200" b="0" i="0" dirty="0">
-                <a:solidFill>
-                  <a:srgbClr val="222B22"/>
-                </a:solidFill>
-                <a:latin typeface="Calibri"/>
-              </a:rPr>
-              <a:t>No fixing. We notice; the Spirit fixes.</a:t>
-            </a:r>
-          </a:p>
-          <a:p>
-            <a:pPr marL="274320" indent="-274320">
+              <a:t>MARK 4:20</a:t>
+            </a:r>
+          </a:p>
+          <a:p>
+            <a:pPr>
               <a:spcAft>
-                <a:spcPts val="900"/>
+                <a:spcPts val="600"/>
               </a:spcAft>
             </a:pPr>
             <a:r>
-              <a:rPr sz="2200" b="1" i="0" dirty="0">
-                <a:solidFill>
-                  <a:srgbClr val="97BC62"/>
-                </a:solidFill>
-                <a:latin typeface="Calibri"/>
-              </a:rPr>
-              <a:t>•  </a:t>
-            </a:r>
-            <a:r>
-              <a:rPr sz="2200" b="0" i="0" dirty="0">
+              <a:rPr sz="2400" b="0" i="1">
                 <a:solidFill>
                   <a:srgbClr val="222B22"/>
                 </a:solidFill>
-                <a:latin typeface="Calibri"/>
-              </a:rPr>
-              <a:t>Keep the morning question going too: </a:t>
-            </a:r>
-            <a:r>
-              <a:rPr sz="2200" b="0" i="1" dirty="0">
-                <a:solidFill>
-                  <a:srgbClr val="222B22"/>
-                </a:solidFill>
-                <a:latin typeface="Calibri"/>
-              </a:rPr>
-              <a:t>“Father, what are you up to today?”</a:t>
-            </a:r>
-            <a:r>
-              <a:rPr sz="2200" b="0" i="0" dirty="0">
-                <a:solidFill>
-                  <a:srgbClr val="222B22"/>
-                </a:solidFill>
-                <a:latin typeface="Calibri"/>
-              </a:rPr>
-              <a:t> The practices stack.</a:t>
+                <a:latin typeface="Cambria"/>
+              </a:rPr>
+              <a:t>“But those that were sown on the good soil are the ones who hear the word and accept it and bear fruit, thirtyfold and sixtyfold and a hundredfold.”</a:t>
             </a:r>
           </a:p>
         </p:txBody>
@@ -5643,7 +5693,7 @@
           <a:p>
             <a:pPr algn="r"/>
             <a:r>
-              <a:t>30</a:t>
+              <a:t>29</a:t>
             </a:r>
             <a:endParaRPr sz="1000" b="1">
               <a:solidFill>
@@ -5656,7 +5706,7 @@
       </p:sp>
       <p:pic>
         <p:nvPicPr>
-          <p:cNvPr id="30" name="Picture 30" descr="sprouts emerging from dark soil"/>
+          <p:cNvPr id="30" name="Picture 30" descr="a single apple on the branch"/>
           <p:cNvPicPr>
             <a:picLocks noChangeAspect="1"/>
           </p:cNvPicPr>
@@ -5670,8 +5720,8 @@
         </p:blipFill>
         <p:spPr>
           <a:xfrm>
-            <a:off x="7818120" y="1463040"/>
-            <a:ext cx="3264408" cy="4892040"/>
+            <a:off x="822960" y="4160520"/>
+            <a:ext cx="4206240" cy="2368296"/>
           </a:xfrm>
           <a:prstGeom prst="rect">
             <a:avLst/>
@@ -5698,7 +5748,7 @@
 </p:sld>
 </file>
 
-<file path=ppt/slides/slide13.xml><?xml version="1.0" encoding="utf-8"?>
+<file path=ppt/slides/slide12.xml><?xml version="1.0" encoding="utf-8"?>
 <p:sld xmlns:a="http://schemas.openxmlformats.org/drawingml/2006/main" xmlns:r="http://schemas.openxmlformats.org/officeDocument/2006/relationships" xmlns:p="http://schemas.openxmlformats.org/presentationml/2006/main">
   <p:cSld>
     <p:spTree>
@@ -5778,7 +5828,7 @@
                 </a:solidFill>
                 <a:latin typeface="Cambria"/>
               </a:rPr>
-              <a:t>The Leader Feedback Round</a:t>
+              <a:t>Homework — Two Weeks, Four Parts</a:t>
             </a:r>
           </a:p>
         </p:txBody>
@@ -5809,7 +5859,7 @@
               </a:spcAft>
             </a:pPr>
             <a:r>
-              <a:rPr sz="2800" b="1" i="0">
+              <a:rPr sz="2200" b="1" i="0" dirty="0">
                 <a:solidFill>
                   <a:srgbClr val="97BC62"/>
                 </a:solidFill>
@@ -5818,13 +5868,13 @@
               <a:t>•  </a:t>
             </a:r>
             <a:r>
-              <a:rPr sz="2800" b="0" i="0">
+              <a:rPr sz="2200" b="0" i="0" dirty="0">
                 <a:solidFill>
                   <a:srgbClr val="222B22"/>
                 </a:solidFill>
                 <a:latin typeface="Calibri"/>
               </a:rPr>
-              <a:t>Two rounds, same as every session — the container holder first, then the content presenter: three things each</a:t>
+              <a:t>The Soil Journal — three times this week, five minutes each. Not every day; three times.</a:t>
             </a:r>
           </a:p>
           <a:p>
@@ -5834,7 +5884,7 @@
               </a:spcAft>
             </a:pPr>
             <a:r>
-              <a:rPr sz="2000" b="1" i="0">
+              <a:rPr sz="1800" b="1" i="0" dirty="0">
                 <a:solidFill>
                   <a:srgbClr val="97BC62"/>
                 </a:solidFill>
@@ -5843,13 +5893,13 @@
               <a:t>–  </a:t>
             </a:r>
             <a:r>
-              <a:rPr sz="2000" b="0" i="1">
+              <a:rPr sz="2400" b="0" i="1" dirty="0">
                 <a:solidFill>
                   <a:srgbClr val="222B22"/>
                 </a:solidFill>
                 <a:latin typeface="Calibri"/>
               </a:rPr>
-              <a:t>“What I think went well tonight: ______”</a:t>
+              <a:t>Today, where did the path show up? The rocky? The thorny? The good soil?</a:t>
             </a:r>
           </a:p>
           <a:p>
@@ -5859,7 +5909,7 @@
               </a:spcAft>
             </a:pPr>
             <a:r>
-              <a:rPr sz="2000" b="1" i="0">
+              <a:rPr sz="2400" b="1" i="0" dirty="0">
                 <a:solidFill>
                   <a:srgbClr val="97BC62"/>
                 </a:solidFill>
@@ -5868,38 +5918,13 @@
               <a:t>–  </a:t>
             </a:r>
             <a:r>
-              <a:rPr sz="2000" b="0" i="1">
+              <a:rPr sz="2400" b="0" i="0" dirty="0">
                 <a:solidFill>
                   <a:srgbClr val="222B22"/>
                 </a:solidFill>
                 <a:latin typeface="Calibri"/>
               </a:rPr>
-              <a:t>“What I’d do differently next time: ______”</a:t>
-            </a:r>
-          </a:p>
-          <a:p>
-            <a:pPr marL="685800" indent="-274320">
-              <a:spcAft>
-                <a:spcPts val="700"/>
-              </a:spcAft>
-            </a:pPr>
-            <a:r>
-              <a:rPr sz="2000" b="1" i="0">
-                <a:solidFill>
-                  <a:srgbClr val="97BC62"/>
-                </a:solidFill>
-                <a:latin typeface="Calibri"/>
-              </a:rPr>
-              <a:t>–  </a:t>
-            </a:r>
-            <a:r>
-              <a:rPr sz="2000" b="0" i="1">
-                <a:solidFill>
-                  <a:srgbClr val="222B22"/>
-                </a:solidFill>
-                <a:latin typeface="Calibri"/>
-              </a:rPr>
-              <a:t>“If I were to teach tonight’s process to someone, I would tell them: ______”</a:t>
+              <a:t>One sentence per soil. Specific, not general.</a:t>
             </a:r>
           </a:p>
           <a:p>
@@ -5909,7 +5934,7 @@
               </a:spcAft>
             </a:pPr>
             <a:r>
-              <a:rPr sz="2800" b="1" i="0">
+              <a:rPr sz="2200" b="1" i="0" dirty="0">
                 <a:solidFill>
                   <a:srgbClr val="97BC62"/>
                 </a:solidFill>
@@ -5918,13 +5943,13 @@
               <a:t>•  </a:t>
             </a:r>
             <a:r>
-              <a:rPr sz="2800" b="0" i="0">
+              <a:rPr sz="2200" b="0" i="0" dirty="0">
                 <a:solidFill>
                   <a:srgbClr val="222B22"/>
                 </a:solidFill>
                 <a:latin typeface="Calibri"/>
               </a:rPr>
-              <a:t>Then the room — the same two questions about tonight</a:t>
+              <a:t>No fixing. We notice; the Spirit fixes.</a:t>
             </a:r>
           </a:p>
           <a:p>
@@ -5934,7 +5959,7 @@
               </a:spcAft>
             </a:pPr>
             <a:r>
-              <a:rPr sz="2800" b="1" i="0">
+              <a:rPr sz="2200" b="1" i="0" dirty="0">
                 <a:solidFill>
                   <a:srgbClr val="97BC62"/>
                 </a:solidFill>
@@ -5943,13 +5968,31 @@
               <a:t>•  </a:t>
             </a:r>
             <a:r>
-              <a:rPr sz="2800" b="0" i="0">
+              <a:rPr sz="2200" b="0" i="0" dirty="0">
                 <a:solidFill>
                   <a:srgbClr val="222B22"/>
                 </a:solidFill>
                 <a:latin typeface="Calibri"/>
               </a:rPr>
-              <a:t>The leaders receive without defending — “thank you” is the whole response</a:t>
+              <a:t>Keep the morning question going too: </a:t>
+            </a:r>
+            <a:r>
+              <a:rPr sz="2200" b="0" i="1" dirty="0">
+                <a:solidFill>
+                  <a:srgbClr val="222B22"/>
+                </a:solidFill>
+                <a:latin typeface="Calibri"/>
+              </a:rPr>
+              <a:t>“Father, what are you up to today?”</a:t>
+            </a:r>
+            <a:r>
+              <a:rPr sz="2200" b="0" i="0" dirty="0">
+                <a:solidFill>
+                  <a:srgbClr val="222B22"/>
+                </a:solidFill>
+                <a:latin typeface="Calibri"/>
+              </a:rPr>
+              <a:t> The practices stack.</a:t>
             </a:r>
           </a:p>
         </p:txBody>
@@ -5976,7 +6019,7 @@
           <a:p>
             <a:pPr algn="r"/>
             <a:r>
-              <a:t>32</a:t>
+              <a:t>30</a:t>
             </a:r>
             <a:endParaRPr sz="1000" b="1">
               <a:solidFill>
@@ -5989,7 +6032,7 @@
       </p:sp>
       <p:pic>
         <p:nvPicPr>
-          <p:cNvPr id="33" name="Picture 33" descr="compass on the trail - the weekly bearing check"/>
+          <p:cNvPr id="30" name="Picture 30" descr="sprouts emerging from dark soil"/>
           <p:cNvPicPr>
             <a:picLocks noChangeAspect="1"/>
           </p:cNvPicPr>
@@ -6003,8 +6046,8 @@
         </p:blipFill>
         <p:spPr>
           <a:xfrm>
-            <a:off x="8106160" y="1463040"/>
-            <a:ext cx="3259831" cy="4892040"/>
+            <a:off x="7818120" y="1463040"/>
+            <a:ext cx="3264408" cy="4892040"/>
           </a:xfrm>
           <a:prstGeom prst="rect">
             <a:avLst/>
@@ -6031,7 +6074,391 @@
 </p:sld>
 </file>
 
+<file path=ppt/slides/slide13.xml><?xml version="1.0" encoding="utf-8"?>
+<p:sld xmlns:a="http://schemas.openxmlformats.org/drawingml/2006/main" xmlns:p="http://schemas.openxmlformats.org/presentationml/2006/main" xmlns:r="http://schemas.openxmlformats.org/officeDocument/2006/relationships">
+  <p:cSld>
+    <p:spTree>
+      <p:nvGrpSpPr>
+        <p:cNvPr id="1" name=""/>
+        <p:cNvGrpSpPr/>
+        <p:nvPr/>
+      </p:nvGrpSpPr>
+      <p:grpSpPr/>
+      <p:sp>
+        <p:nvSpPr>
+          <p:cNvPr id="2" name="Rectangle 1"/>
+          <p:cNvSpPr/>
+          <p:nvPr/>
+        </p:nvSpPr>
+        <p:spPr>
+          <a:xfrm>
+            <a:off x="0" y="0"/>
+            <a:ext cx="12192000" cy="6858000"/>
+          </a:xfrm>
+          <a:prstGeom prst="rect">
+            <a:avLst/>
+          </a:prstGeom>
+          <a:solidFill>
+            <a:srgbClr val="FFFFFF"/>
+          </a:solidFill>
+          <a:ln>
+            <a:noFill/>
+          </a:ln>
+          <a:effectLst/>
+        </p:spPr>
+        <p:style>
+          <a:lnRef idx="1">
+            <a:schemeClr val="accent1"/>
+          </a:lnRef>
+          <a:fillRef idx="3">
+            <a:schemeClr val="accent1"/>
+          </a:fillRef>
+          <a:effectRef idx="2">
+            <a:schemeClr val="accent1"/>
+          </a:effectRef>
+          <a:fontRef idx="minor">
+            <a:schemeClr val="lt1"/>
+          </a:fontRef>
+        </p:style>
+        <p:txBody>
+          <a:bodyPr rtlCol="0" anchor="ctr"/>
+          <a:lstStyle/>
+          <a:p>
+            <a:pPr algn="ctr"/>
+          </a:p>
+        </p:txBody>
+      </p:sp>
+      <p:sp>
+        <p:nvSpPr>
+          <p:cNvPr id="3" name="TextBox 2"/>
+          <p:cNvSpPr txBox="1"/>
+          <p:nvPr/>
+        </p:nvSpPr>
+        <p:spPr>
+          <a:xfrm>
+            <a:off x="822960" y="502920"/>
+            <a:ext cx="10515600" cy="822960"/>
+          </a:xfrm>
+          <a:prstGeom prst="rect">
+            <a:avLst/>
+          </a:prstGeom>
+          <a:noFill/>
+        </p:spPr>
+        <p:txBody>
+          <a:bodyPr wrap="square">
+            <a:spAutoFit/>
+          </a:bodyPr>
+          <a:lstStyle/>
+          <a:p>
+            <a:r>
+              <a:rPr sz="2800" b="1">
+                <a:solidFill>
+                  <a:srgbClr val="2C5F2D"/>
+                </a:solidFill>
+                <a:latin typeface="Cambria"/>
+              </a:rPr>
+              <a:t>The Take-Home Sheet — the Daily Rhythm</a:t>
+            </a:r>
+          </a:p>
+        </p:txBody>
+      </p:sp>
+      <p:pic>
+        <p:nvPicPr>
+          <p:cNvPr id="4" name="Picture 3" descr="s2_part1.png"/>
+          <p:cNvPicPr>
+            <a:picLocks noChangeAspect="1"/>
+          </p:cNvPicPr>
+          <p:nvPr/>
+        </p:nvPicPr>
+        <p:blipFill>
+          <a:blip r:embed="rId2"/>
+          <a:stretch>
+            <a:fillRect/>
+          </a:stretch>
+        </p:blipFill>
+        <p:spPr>
+          <a:xfrm>
+            <a:off x="1798167" y="1463040"/>
+            <a:ext cx="8595360" cy="4039819"/>
+          </a:xfrm>
+          <a:prstGeom prst="rect">
+            <a:avLst/>
+          </a:prstGeom>
+          <a:ln w="12700">
+            <a:solidFill>
+              <a:srgbClr val="C8C8C8"/>
+            </a:solidFill>
+          </a:ln>
+        </p:spPr>
+      </p:pic>
+      <p:sp>
+        <p:nvSpPr>
+          <p:cNvPr id="5" name="TextBox 4"/>
+          <p:cNvSpPr txBox="1"/>
+          <p:nvPr/>
+        </p:nvSpPr>
+        <p:spPr>
+          <a:xfrm>
+            <a:off x="822960" y="6355080"/>
+            <a:ext cx="10515600" cy="411480"/>
+          </a:xfrm>
+          <a:prstGeom prst="rect">
+            <a:avLst/>
+          </a:prstGeom>
+          <a:noFill/>
+        </p:spPr>
+        <p:txBody>
+          <a:bodyPr wrap="square">
+            <a:spAutoFit/>
+          </a:bodyPr>
+          <a:lstStyle/>
+          <a:p>
+            <a:r>
+              <a:rPr sz="1400" i="1">
+                <a:solidFill>
+                  <a:srgbClr val="595959"/>
+                </a:solidFill>
+                <a:latin typeface="Calibri"/>
+              </a:rPr>
+              <a:t>Handed out now — this is the sheet in your hands.</a:t>
+            </a:r>
+          </a:p>
+        </p:txBody>
+      </p:sp>
+      <p:sp>
+        <p:nvSpPr>
+          <p:cNvPr id="90" name="SlideNum"/>
+          <p:cNvSpPr txBox="1"/>
+          <p:nvPr/>
+        </p:nvSpPr>
+        <p:spPr>
+          <a:xfrm>
+            <a:off x="11384280" y="6446520"/>
+            <a:ext cx="640080" cy="292608"/>
+          </a:xfrm>
+          <a:prstGeom prst="rect">
+            <a:avLst/>
+          </a:prstGeom>
+          <a:noFill/>
+        </p:spPr>
+        <p:txBody>
+          <a:bodyPr wrap="none" lIns="0" tIns="0" rIns="45720" bIns="0" anchor="ctr"/>
+          <a:lstStyle/>
+          <a:p>
+            <a:pPr algn="r"/>
+            <a:r>
+              <a:t>31</a:t>
+            </a:r>
+            <a:endParaRPr sz="1000" b="1">
+              <a:solidFill>
+                <a:srgbClr val="7A8A6E"/>
+              </a:solidFill>
+              <a:latin typeface="Calibri"/>
+            </a:endParaRPr>
+          </a:p>
+        </p:txBody>
+      </p:sp>
+    </p:spTree>
+  </p:cSld>
+  <p:clrMapOvr>
+    <a:masterClrMapping/>
+  </p:clrMapOvr>
+</p:sld>
+</file>
+
 <file path=ppt/slides/slide14.xml><?xml version="1.0" encoding="utf-8"?>
+<p:sld xmlns:a="http://schemas.openxmlformats.org/drawingml/2006/main" xmlns:p="http://schemas.openxmlformats.org/presentationml/2006/main" xmlns:r="http://schemas.openxmlformats.org/officeDocument/2006/relationships">
+  <p:cSld>
+    <p:spTree>
+      <p:nvGrpSpPr>
+        <p:cNvPr id="1" name=""/>
+        <p:cNvGrpSpPr/>
+        <p:nvPr/>
+      </p:nvGrpSpPr>
+      <p:grpSpPr/>
+      <p:sp>
+        <p:nvSpPr>
+          <p:cNvPr id="2" name="Rectangle 1"/>
+          <p:cNvSpPr/>
+          <p:nvPr/>
+        </p:nvSpPr>
+        <p:spPr>
+          <a:xfrm>
+            <a:off x="0" y="0"/>
+            <a:ext cx="12192000" cy="6858000"/>
+          </a:xfrm>
+          <a:prstGeom prst="rect">
+            <a:avLst/>
+          </a:prstGeom>
+          <a:solidFill>
+            <a:srgbClr val="FFFFFF"/>
+          </a:solidFill>
+          <a:ln>
+            <a:noFill/>
+          </a:ln>
+          <a:effectLst/>
+        </p:spPr>
+        <p:style>
+          <a:lnRef idx="1">
+            <a:schemeClr val="accent1"/>
+          </a:lnRef>
+          <a:fillRef idx="3">
+            <a:schemeClr val="accent1"/>
+          </a:fillRef>
+          <a:effectRef idx="2">
+            <a:schemeClr val="accent1"/>
+          </a:effectRef>
+          <a:fontRef idx="minor">
+            <a:schemeClr val="lt1"/>
+          </a:fontRef>
+        </p:style>
+        <p:txBody>
+          <a:bodyPr rtlCol="0" anchor="ctr"/>
+          <a:lstStyle/>
+          <a:p>
+            <a:pPr algn="ctr"/>
+          </a:p>
+        </p:txBody>
+      </p:sp>
+      <p:sp>
+        <p:nvSpPr>
+          <p:cNvPr id="3" name="TextBox 2"/>
+          <p:cNvSpPr txBox="1"/>
+          <p:nvPr/>
+        </p:nvSpPr>
+        <p:spPr>
+          <a:xfrm>
+            <a:off x="822960" y="502920"/>
+            <a:ext cx="10515600" cy="822960"/>
+          </a:xfrm>
+          <a:prstGeom prst="rect">
+            <a:avLst/>
+          </a:prstGeom>
+          <a:noFill/>
+        </p:spPr>
+        <p:txBody>
+          <a:bodyPr wrap="square">
+            <a:spAutoFit/>
+          </a:bodyPr>
+          <a:lstStyle/>
+          <a:p>
+            <a:r>
+              <a:rPr sz="2800" b="1">
+                <a:solidFill>
+                  <a:srgbClr val="2C5F2D"/>
+                </a:solidFill>
+                <a:latin typeface="Cambria"/>
+              </a:rPr>
+              <a:t>The Take-Home Sheet — the Four Parts</a:t>
+            </a:r>
+          </a:p>
+        </p:txBody>
+      </p:sp>
+      <p:pic>
+        <p:nvPicPr>
+          <p:cNvPr id="4" name="Picture 3" descr="s2_part2.png"/>
+          <p:cNvPicPr>
+            <a:picLocks noChangeAspect="1"/>
+          </p:cNvPicPr>
+          <p:nvPr/>
+        </p:nvPicPr>
+        <p:blipFill>
+          <a:blip r:embed="rId2"/>
+          <a:stretch>
+            <a:fillRect/>
+          </a:stretch>
+        </p:blipFill>
+        <p:spPr>
+          <a:xfrm>
+            <a:off x="2066004" y="1463040"/>
+            <a:ext cx="8059687" cy="4709160"/>
+          </a:xfrm>
+          <a:prstGeom prst="rect">
+            <a:avLst/>
+          </a:prstGeom>
+          <a:ln w="12700">
+            <a:solidFill>
+              <a:srgbClr val="C8C8C8"/>
+            </a:solidFill>
+          </a:ln>
+        </p:spPr>
+      </p:pic>
+      <p:sp>
+        <p:nvSpPr>
+          <p:cNvPr id="5" name="TextBox 4"/>
+          <p:cNvSpPr txBox="1"/>
+          <p:nvPr/>
+        </p:nvSpPr>
+        <p:spPr>
+          <a:xfrm>
+            <a:off x="822960" y="6355080"/>
+            <a:ext cx="10515600" cy="411480"/>
+          </a:xfrm>
+          <a:prstGeom prst="rect">
+            <a:avLst/>
+          </a:prstGeom>
+          <a:noFill/>
+        </p:spPr>
+        <p:txBody>
+          <a:bodyPr wrap="square">
+            <a:spAutoFit/>
+          </a:bodyPr>
+          <a:lstStyle/>
+          <a:p>
+            <a:r>
+              <a:rPr sz="1400" i="1">
+                <a:solidFill>
+                  <a:srgbClr val="595959"/>
+                </a:solidFill>
+                <a:latin typeface="Calibri"/>
+              </a:rPr>
+              <a:t>One practice at a time — and a partner expecting you at the end of week one.</a:t>
+            </a:r>
+          </a:p>
+        </p:txBody>
+      </p:sp>
+      <p:sp>
+        <p:nvSpPr>
+          <p:cNvPr id="90" name="SlideNum"/>
+          <p:cNvSpPr txBox="1"/>
+          <p:nvPr/>
+        </p:nvSpPr>
+        <p:spPr>
+          <a:xfrm>
+            <a:off x="11384280" y="6446520"/>
+            <a:ext cx="640080" cy="292608"/>
+          </a:xfrm>
+          <a:prstGeom prst="rect">
+            <a:avLst/>
+          </a:prstGeom>
+          <a:noFill/>
+        </p:spPr>
+        <p:txBody>
+          <a:bodyPr wrap="none" lIns="0" tIns="0" rIns="45720" bIns="0" anchor="ctr"/>
+          <a:lstStyle/>
+          <a:p>
+            <a:pPr algn="r"/>
+            <a:r>
+              <a:t>31a</a:t>
+            </a:r>
+            <a:endParaRPr sz="1000" b="1">
+              <a:solidFill>
+                <a:srgbClr val="7A8A6E"/>
+              </a:solidFill>
+              <a:latin typeface="Calibri"/>
+            </a:endParaRPr>
+          </a:p>
+        </p:txBody>
+      </p:sp>
+    </p:spTree>
+  </p:cSld>
+  <p:clrMapOvr>
+    <a:masterClrMapping/>
+  </p:clrMapOvr>
+</p:sld>
+</file>
+
+<file path=ppt/slides/slide15.xml><?xml version="1.0" encoding="utf-8"?>
 <p:sld xmlns:a="http://schemas.openxmlformats.org/drawingml/2006/main" xmlns:r="http://schemas.openxmlformats.org/officeDocument/2006/relationships" xmlns:p="http://schemas.openxmlformats.org/presentationml/2006/main">
   <p:cSld>
     <p:spTree>
@@ -6111,7 +6538,7 @@
                 </a:solidFill>
                 <a:latin typeface="Cambria"/>
               </a:rPr>
-              <a:t>Closing the Container + Aaronic Blessing</a:t>
+              <a:t>The Leader Feedback Round</a:t>
             </a:r>
           </a:p>
         </p:txBody>
@@ -6124,8 +6551,8 @@
         </p:nvSpPr>
         <p:spPr>
           <a:xfrm>
-            <a:off x="822960" y="1600200"/>
-            <a:ext cx="5669280" cy="4206240"/>
+            <a:off x="822960" y="1554480"/>
+            <a:ext cx="6675120" cy="4754880"/>
           </a:xfrm>
           <a:prstGeom prst="rect">
             <a:avLst/>
@@ -6142,7 +6569,7 @@
               </a:spcAft>
             </a:pPr>
             <a:r>
-              <a:rPr sz="2200" b="1" i="0">
+              <a:rPr sz="2800" b="1" i="0">
                 <a:solidFill>
                   <a:srgbClr val="97BC62"/>
                 </a:solidFill>
@@ -6151,13 +6578,13 @@
               <a:t>•  </a:t>
             </a:r>
             <a:r>
-              <a:rPr sz="2200" b="0" i="0">
+              <a:rPr sz="2800" b="0" i="0">
                 <a:solidFill>
                   <a:srgbClr val="222B22"/>
                 </a:solidFill>
                 <a:latin typeface="Calibri"/>
               </a:rPr>
-              <a:t>We close the way we opened — the container, six steps:</a:t>
+              <a:t>Two rounds, same as every session — the container holder first, then the content presenter: three things each</a:t>
             </a:r>
           </a:p>
           <a:p>
@@ -6173,16 +6600,16 @@
                 </a:solidFill>
                 <a:latin typeface="Calibri"/>
               </a:rPr>
-              <a:t>1   </a:t>
-            </a:r>
-            <a:r>
-              <a:rPr sz="2000" b="0" i="0">
+              <a:t>–  </a:t>
+            </a:r>
+            <a:r>
+              <a:rPr sz="2000" b="0" i="1">
                 <a:solidFill>
                   <a:srgbClr val="222B22"/>
                 </a:solidFill>
                 <a:latin typeface="Calibri"/>
               </a:rPr>
-              <a:t>Stand again — same circle, same posture as the open</a:t>
+              <a:t>“What I think went well tonight: ______”</a:t>
             </a:r>
           </a:p>
           <a:p>
@@ -6198,16 +6625,16 @@
                 </a:solidFill>
                 <a:latin typeface="Calibri"/>
               </a:rPr>
-              <a:t>2   </a:t>
-            </a:r>
-            <a:r>
-              <a:rPr sz="2000" b="0" i="0">
+              <a:t>–  </a:t>
+            </a:r>
+            <a:r>
+              <a:rPr sz="2000" b="0" i="1">
                 <a:solidFill>
                   <a:srgbClr val="222B22"/>
                 </a:solidFill>
                 <a:latin typeface="Calibri"/>
               </a:rPr>
-              <a:t>One-word landing — compare it to your opening word</a:t>
+              <a:t>“What I’d do differently next time: ______”</a:t>
             </a:r>
           </a:p>
           <a:p>
@@ -6223,178 +6650,66 @@
                 </a:solidFill>
                 <a:latin typeface="Calibri"/>
               </a:rPr>
-              <a:t>3   </a:t>
-            </a:r>
-            <a:r>
-              <a:rPr sz="2000" b="0" i="0">
+              <a:t>–  </a:t>
+            </a:r>
+            <a:r>
+              <a:rPr sz="2000" b="0" i="1">
                 <a:solidFill>
                   <a:srgbClr val="222B22"/>
                 </a:solidFill>
                 <a:latin typeface="Calibri"/>
               </a:rPr>
-              <a:t>The one thing you are taking from tonight</a:t>
-            </a:r>
-          </a:p>
-          <a:p>
-            <a:pPr marL="685800" indent="-274320">
+              <a:t>“If I were to teach tonight’s process to someone, I would tell them: ______”</a:t>
+            </a:r>
+          </a:p>
+          <a:p>
+            <a:pPr marL="274320" indent="-274320">
               <a:spcAft>
-                <a:spcPts val="700"/>
+                <a:spcPts val="900"/>
               </a:spcAft>
             </a:pPr>
             <a:r>
-              <a:rPr sz="2000" b="1" i="0">
+              <a:rPr sz="2800" b="1" i="0">
                 <a:solidFill>
                   <a:srgbClr val="97BC62"/>
                 </a:solidFill>
                 <a:latin typeface="Calibri"/>
               </a:rPr>
-              <a:t>4   </a:t>
-            </a:r>
-            <a:r>
-              <a:rPr sz="2000" b="0" i="0">
+              <a:t>•  </a:t>
+            </a:r>
+            <a:r>
+              <a:rPr sz="2800" b="0" i="0">
                 <a:solidFill>
                   <a:srgbClr val="222B22"/>
                 </a:solidFill>
                 <a:latin typeface="Calibri"/>
               </a:rPr>
-              <a:t>The one practice — committed aloud, or modified to one you will actually keep</a:t>
-            </a:r>
-          </a:p>
-          <a:p>
-            <a:pPr marL="685800" indent="-274320">
+              <a:t>Then the room — the same two questions about tonight</a:t>
+            </a:r>
+          </a:p>
+          <a:p>
+            <a:pPr marL="274320" indent="-274320">
               <a:spcAft>
-                <a:spcPts val="700"/>
+                <a:spcPts val="900"/>
               </a:spcAft>
             </a:pPr>
             <a:r>
-              <a:rPr sz="2000" b="1" i="0">
+              <a:rPr sz="2800" b="1" i="0">
                 <a:solidFill>
                   <a:srgbClr val="97BC62"/>
                 </a:solidFill>
                 <a:latin typeface="Calibri"/>
               </a:rPr>
-              <a:t>5   </a:t>
-            </a:r>
-            <a:r>
-              <a:rPr sz="2000" b="0" i="0">
+              <a:t>•  </a:t>
+            </a:r>
+            <a:r>
+              <a:rPr sz="2800" b="0" i="0">
                 <a:solidFill>
                   <a:srgbClr val="222B22"/>
                 </a:solidFill>
                 <a:latin typeface="Calibri"/>
               </a:rPr>
-              <a:t>Blessings — specific, witnessed, short</a:t>
-            </a:r>
-          </a:p>
-          <a:p>
-            <a:pPr marL="685800" indent="-274320">
-              <a:spcAft>
-                <a:spcPts val="700"/>
-              </a:spcAft>
-            </a:pPr>
-            <a:r>
-              <a:rPr sz="2000" b="1" i="0">
-                <a:solidFill>
-                  <a:srgbClr val="97BC62"/>
-                </a:solidFill>
-                <a:latin typeface="Calibri"/>
-              </a:rPr>
-              <a:t>6   </a:t>
-            </a:r>
-            <a:r>
-              <a:rPr sz="2000" b="0" i="0">
-                <a:solidFill>
-                  <a:srgbClr val="222B22"/>
-                </a:solidFill>
-                <a:latin typeface="Calibri"/>
-              </a:rPr>
-              <a:t>Closing prayer — and the Aaronic blessing, spoken over each other, face to face</a:t>
-            </a:r>
-          </a:p>
-        </p:txBody>
-      </p:sp>
-      <p:sp>
-        <p:nvSpPr>
-          <p:cNvPr id="6" name="TextBox 6"/>
-          <p:cNvSpPr txBox="1"/>
-          <p:nvPr/>
-        </p:nvSpPr>
-        <p:spPr>
-          <a:xfrm>
-            <a:off x="6766560" y="1737360"/>
-            <a:ext cx="4663440" cy="3657600"/>
-          </a:xfrm>
-          <a:prstGeom prst="rect">
-            <a:avLst/>
-          </a:prstGeom>
-          <a:solidFill>
-            <a:srgbClr val="F1F6EC"/>
-          </a:solidFill>
-        </p:spPr>
-        <p:txBody>
-          <a:bodyPr wrap="square" lIns="91440" tIns="91440" rIns="91440" bIns="91440" anchor="ctr"/>
-          <a:lstStyle/>
-          <a:p>
-            <a:pPr>
-              <a:spcAft>
-                <a:spcPts val="1000"/>
-              </a:spcAft>
-            </a:pPr>
-            <a:r>
-              <a:rPr sz="1200" b="1" i="0">
-                <a:solidFill>
-                  <a:srgbClr val="97BC62"/>
-                </a:solidFill>
-                <a:latin typeface="Calibri"/>
-              </a:rPr>
-              <a:t>THE AARONIC BLESSING — NUMBERS 6:24–26</a:t>
-            </a:r>
-          </a:p>
-          <a:p>
-            <a:pPr>
-              <a:spcAft>
-                <a:spcPts val="700"/>
-              </a:spcAft>
-            </a:pPr>
-            <a:r>
-              <a:rPr sz="2400" b="0" i="1">
-                <a:solidFill>
-                  <a:srgbClr val="222B22"/>
-                </a:solidFill>
-                <a:latin typeface="Cambria"/>
-              </a:rPr>
-              <a:t>“The Lord bless you and keep you;</a:t>
-            </a:r>
-          </a:p>
-          <a:p>
-            <a:pPr>
-              <a:spcAft>
-                <a:spcPts val="700"/>
-              </a:spcAft>
-            </a:pPr>
-            <a:r>
-              <a:rPr sz="2400" b="0" i="1">
-                <a:solidFill>
-                  <a:srgbClr val="222B22"/>
-                </a:solidFill>
-                <a:latin typeface="Cambria"/>
-              </a:rPr>
-              <a:t>the Lord make his face to shine upon you, and be gracious to you;</a:t>
-            </a:r>
-          </a:p>
-          <a:p>
-            <a:pPr>
-              <a:spcAft>
-                <a:spcPts val="700"/>
-              </a:spcAft>
-            </a:pPr>
-            <a:r>
-              <a:rPr sz="2400" b="0" i="1">
-                <a:solidFill>
-                  <a:srgbClr val="222B22"/>
-                </a:solidFill>
-                <a:latin typeface="Cambria"/>
-              </a:rPr>
-              <a:t>the Lord lift up his countenance upon you, and give you peace.”</a:t>
+              <a:t>The leaders receive without defending — “thank you” is the whole response</a:t>
             </a:r>
           </a:p>
         </p:txBody>
@@ -6421,7 +6736,7 @@
           <a:p>
             <a:pPr algn="r"/>
             <a:r>
-              <a:t>33</a:t>
+              <a:t>32</a:t>
             </a:r>
             <a:endParaRPr sz="1000" b="1">
               <a:solidFill>
@@ -6432,6 +6747,42 @@
           </a:p>
         </p:txBody>
       </p:sp>
+      <p:pic>
+        <p:nvPicPr>
+          <p:cNvPr id="33" name="Picture 33" descr="compass on the trail - the weekly bearing check"/>
+          <p:cNvPicPr>
+            <a:picLocks noChangeAspect="1"/>
+          </p:cNvPicPr>
+          <p:nvPr/>
+        </p:nvPicPr>
+        <p:blipFill>
+          <a:blip r:embed="rId3"/>
+          <a:stretch>
+            <a:fillRect/>
+          </a:stretch>
+        </p:blipFill>
+        <p:spPr>
+          <a:xfrm>
+            <a:off x="8106160" y="1463040"/>
+            <a:ext cx="3259831" cy="4892040"/>
+          </a:xfrm>
+          <a:prstGeom prst="rect">
+            <a:avLst/>
+          </a:prstGeom>
+          <a:ln w="76200">
+            <a:solidFill>
+              <a:srgbClr val="FFFFFF"/>
+            </a:solidFill>
+          </a:ln>
+          <a:effectLst>
+            <a:outerShdw blurRad="63500" dist="25400" dir="5400000" rotWithShape="0">
+              <a:srgbClr val="000000">
+                <a:alpha val="35000"/>
+              </a:srgbClr>
+            </a:outerShdw>
+          </a:effectLst>
+        </p:spPr>
+      </p:pic>
     </p:spTree>
   </p:cSld>
   <p:clrMapOvr>
@@ -6440,8 +6791,8 @@
 </p:sld>
 </file>
 
-<file path=ppt/slides/slide15.xml><?xml version="1.0" encoding="utf-8"?>
-<p:sld xmlns:a="http://schemas.openxmlformats.org/drawingml/2006/main" xmlns:p="http://schemas.openxmlformats.org/presentationml/2006/main" xmlns:r="http://schemas.openxmlformats.org/officeDocument/2006/relationships">
+<file path=ppt/slides/slide16.xml><?xml version="1.0" encoding="utf-8"?>
+<p:sld xmlns:a="http://schemas.openxmlformats.org/drawingml/2006/main" xmlns:r="http://schemas.openxmlformats.org/officeDocument/2006/relationships" xmlns:p="http://schemas.openxmlformats.org/presentationml/2006/main">
   <p:cSld>
     <p:spTree>
       <p:nvGrpSpPr>
@@ -6449,7 +6800,14 @@
         <p:cNvGrpSpPr/>
         <p:nvPr/>
       </p:nvGrpSpPr>
-      <p:grpSpPr/>
+      <p:grpSpPr>
+        <a:xfrm>
+          <a:off x="0" y="0"/>
+          <a:ext cx="0" cy="0"/>
+          <a:chOff x="0" y="0"/>
+          <a:chExt cx="0" cy="0"/>
+        </a:xfrm>
+      </p:grpSpPr>
       <p:sp>
         <p:nvSpPr>
           <p:cNvPr id="2" name="Rectangle 1"/>
@@ -6459,7 +6817,7 @@
         <p:spPr>
           <a:xfrm>
             <a:off x="0" y="0"/>
-            <a:ext cx="12192000" cy="6858000"/>
+            <a:ext cx="12191695" cy="6858000"/>
           </a:xfrm>
           <a:prstGeom prst="rect">
             <a:avLst/>
@@ -6470,27 +6828,12 @@
           <a:ln>
             <a:noFill/>
           </a:ln>
-          <a:effectLst/>
-        </p:spPr>
-        <p:style>
-          <a:lnRef idx="1">
-            <a:schemeClr val="accent1"/>
-          </a:lnRef>
-          <a:fillRef idx="3">
-            <a:schemeClr val="accent1"/>
-          </a:fillRef>
-          <a:effectRef idx="2">
-            <a:schemeClr val="accent1"/>
-          </a:effectRef>
-          <a:fontRef idx="minor">
-            <a:schemeClr val="lt1"/>
-          </a:fontRef>
-        </p:style>
-        <p:txBody>
-          <a:bodyPr rtlCol="0" anchor="ctr"/>
-          <a:lstStyle/>
-          <a:p>
-            <a:pPr algn="ctr"/>
+        </p:spPr>
+        <p:txBody>
+          <a:bodyPr/>
+          <a:lstStyle/>
+          <a:p>
+            <a:endParaRPr/>
           </a:p>
         </p:txBody>
       </p:sp>
@@ -6516,52 +6859,33 @@
           </a:bodyPr>
           <a:lstStyle/>
           <a:p>
-            <a:r>
-              <a:rPr sz="2800" b="1">
+            <a:pPr algn="l">
+              <a:spcAft>
+                <a:spcPts val="600"/>
+              </a:spcAft>
+            </a:pPr>
+            <a:r>
+              <a:rPr sz="2800" b="1" i="0">
                 <a:solidFill>
                   <a:srgbClr val="2C5F2D"/>
                 </a:solidFill>
                 <a:latin typeface="Cambria"/>
               </a:rPr>
-              <a:t>Where We Are — the Four Connects</a:t>
-            </a:r>
-          </a:p>
-        </p:txBody>
-      </p:sp>
-      <p:pic>
-        <p:nvPicPr>
-          <p:cNvPr id="4" name="Picture 3" descr="four-connects.png"/>
-          <p:cNvPicPr>
-            <a:picLocks noChangeAspect="1"/>
-          </p:cNvPicPr>
-          <p:nvPr/>
-        </p:nvPicPr>
-        <p:blipFill>
-          <a:blip r:embed="rId2"/>
-          <a:stretch>
-            <a:fillRect/>
-          </a:stretch>
-        </p:blipFill>
-        <p:spPr>
-          <a:xfrm>
-            <a:off x="932688" y="1645920"/>
-            <a:ext cx="10332720" cy="3708663"/>
-          </a:xfrm>
-          <a:prstGeom prst="rect">
-            <a:avLst/>
-          </a:prstGeom>
-        </p:spPr>
-      </p:pic>
-      <p:sp>
-        <p:nvSpPr>
-          <p:cNvPr id="5" name="TextBox 4"/>
+              <a:t>Closing the Container + Aaronic Blessing</a:t>
+            </a:r>
+          </a:p>
+        </p:txBody>
+      </p:sp>
+      <p:sp>
+        <p:nvSpPr>
+          <p:cNvPr id="4" name="TextBox 4"/>
           <p:cNvSpPr txBox="1"/>
           <p:nvPr/>
         </p:nvSpPr>
         <p:spPr>
           <a:xfrm>
-            <a:off x="822960" y="5623560"/>
-            <a:ext cx="10515600" cy="914400"/>
+            <a:off x="822960" y="1600200"/>
+            <a:ext cx="5669280" cy="4206240"/>
           </a:xfrm>
           <a:prstGeom prst="rect">
             <a:avLst/>
@@ -6569,37 +6893,268 @@
           <a:noFill/>
         </p:spPr>
         <p:txBody>
-          <a:bodyPr wrap="square">
-            <a:spAutoFit/>
-          </a:bodyPr>
-          <a:lstStyle/>
-          <a:p>
-            <a:r>
-              <a:rPr sz="1800" b="0">
+          <a:bodyPr wrap="square" lIns="91440" tIns="91440" rIns="91440" bIns="91440"/>
+          <a:lstStyle/>
+          <a:p>
+            <a:pPr marL="274320" indent="-274320">
+              <a:spcAft>
+                <a:spcPts val="900"/>
+              </a:spcAft>
+            </a:pPr>
+            <a:r>
+              <a:rPr sz="2200" b="1" i="0">
+                <a:solidFill>
+                  <a:srgbClr val="97BC62"/>
+                </a:solidFill>
+                <a:latin typeface="Calibri"/>
+              </a:rPr>
+              <a:t>•  </a:t>
+            </a:r>
+            <a:r>
+              <a:rPr sz="2200" b="0" i="0">
                 <a:solidFill>
                   <a:srgbClr val="222B22"/>
                 </a:solidFill>
                 <a:latin typeface="Calibri"/>
               </a:rPr>
-              <a:t>Session 2 stands in the first box — </a:t>
-            </a:r>
-            <a:r>
-              <a:rPr sz="1800" b="1">
-                <a:solidFill>
-                  <a:srgbClr val="2C5F2D"/>
-                </a:solidFill>
-                <a:latin typeface="Calibri"/>
-              </a:rPr>
-              <a:t>Connect with Self</a:t>
-            </a:r>
-            <a:r>
-              <a:rPr sz="1800" b="0">
+              <a:t>We close the way we opened — the container, six steps:</a:t>
+            </a:r>
+          </a:p>
+          <a:p>
+            <a:pPr marL="685800" indent="-274320">
+              <a:spcAft>
+                <a:spcPts val="700"/>
+              </a:spcAft>
+            </a:pPr>
+            <a:r>
+              <a:rPr sz="2000" b="1" i="0">
+                <a:solidFill>
+                  <a:srgbClr val="97BC62"/>
+                </a:solidFill>
+                <a:latin typeface="Calibri"/>
+              </a:rPr>
+              <a:t>1   </a:t>
+            </a:r>
+            <a:r>
+              <a:rPr sz="2000" b="0" i="0">
                 <a:solidFill>
                   <a:srgbClr val="222B22"/>
                 </a:solidFill>
                 <a:latin typeface="Calibri"/>
               </a:rPr>
-              <a:t>. Each connection makes the next one real (Matt. 22:37–40).</a:t>
+              <a:t>Stand again — same circle, same posture as the open</a:t>
+            </a:r>
+          </a:p>
+          <a:p>
+            <a:pPr marL="685800" indent="-274320">
+              <a:spcAft>
+                <a:spcPts val="700"/>
+              </a:spcAft>
+            </a:pPr>
+            <a:r>
+              <a:rPr sz="2000" b="1" i="0">
+                <a:solidFill>
+                  <a:srgbClr val="97BC62"/>
+                </a:solidFill>
+                <a:latin typeface="Calibri"/>
+              </a:rPr>
+              <a:t>2   </a:t>
+            </a:r>
+            <a:r>
+              <a:rPr sz="2000" b="0" i="0">
+                <a:solidFill>
+                  <a:srgbClr val="222B22"/>
+                </a:solidFill>
+                <a:latin typeface="Calibri"/>
+              </a:rPr>
+              <a:t>One-word landing — compare it to your opening word</a:t>
+            </a:r>
+          </a:p>
+          <a:p>
+            <a:pPr marL="685800" indent="-274320">
+              <a:spcAft>
+                <a:spcPts val="700"/>
+              </a:spcAft>
+            </a:pPr>
+            <a:r>
+              <a:rPr sz="2000" b="1" i="0">
+                <a:solidFill>
+                  <a:srgbClr val="97BC62"/>
+                </a:solidFill>
+                <a:latin typeface="Calibri"/>
+              </a:rPr>
+              <a:t>3   </a:t>
+            </a:r>
+            <a:r>
+              <a:rPr sz="2000" b="0" i="0">
+                <a:solidFill>
+                  <a:srgbClr val="222B22"/>
+                </a:solidFill>
+                <a:latin typeface="Calibri"/>
+              </a:rPr>
+              <a:t>The one thing you are taking from tonight</a:t>
+            </a:r>
+          </a:p>
+          <a:p>
+            <a:pPr marL="685800" indent="-274320">
+              <a:spcAft>
+                <a:spcPts val="700"/>
+              </a:spcAft>
+            </a:pPr>
+            <a:r>
+              <a:rPr sz="2000" b="1" i="0">
+                <a:solidFill>
+                  <a:srgbClr val="97BC62"/>
+                </a:solidFill>
+                <a:latin typeface="Calibri"/>
+              </a:rPr>
+              <a:t>4   </a:t>
+            </a:r>
+            <a:r>
+              <a:rPr sz="2000" b="0" i="0">
+                <a:solidFill>
+                  <a:srgbClr val="222B22"/>
+                </a:solidFill>
+                <a:latin typeface="Calibri"/>
+              </a:rPr>
+              <a:t>The one practice — committed aloud, or modified to one you will actually keep</a:t>
+            </a:r>
+          </a:p>
+          <a:p>
+            <a:pPr marL="685800" indent="-274320">
+              <a:spcAft>
+                <a:spcPts val="700"/>
+              </a:spcAft>
+            </a:pPr>
+            <a:r>
+              <a:rPr sz="2000" b="1" i="0">
+                <a:solidFill>
+                  <a:srgbClr val="97BC62"/>
+                </a:solidFill>
+                <a:latin typeface="Calibri"/>
+              </a:rPr>
+              <a:t>5   </a:t>
+            </a:r>
+            <a:r>
+              <a:rPr sz="2000" b="0" i="0">
+                <a:solidFill>
+                  <a:srgbClr val="222B22"/>
+                </a:solidFill>
+                <a:latin typeface="Calibri"/>
+              </a:rPr>
+              <a:t>Blessings — specific, witnessed, short</a:t>
+            </a:r>
+          </a:p>
+          <a:p>
+            <a:pPr marL="685800" indent="-274320">
+              <a:spcAft>
+                <a:spcPts val="700"/>
+              </a:spcAft>
+            </a:pPr>
+            <a:r>
+              <a:rPr sz="2000" b="1" i="0">
+                <a:solidFill>
+                  <a:srgbClr val="97BC62"/>
+                </a:solidFill>
+                <a:latin typeface="Calibri"/>
+              </a:rPr>
+              <a:t>6   </a:t>
+            </a:r>
+            <a:r>
+              <a:rPr sz="2000" b="0" i="0">
+                <a:solidFill>
+                  <a:srgbClr val="222B22"/>
+                </a:solidFill>
+                <a:latin typeface="Calibri"/>
+              </a:rPr>
+              <a:t>Closing prayer — and the Aaronic blessing, spoken over each other, face to face</a:t>
+            </a:r>
+          </a:p>
+        </p:txBody>
+      </p:sp>
+      <p:sp>
+        <p:nvSpPr>
+          <p:cNvPr id="6" name="TextBox 6"/>
+          <p:cNvSpPr txBox="1"/>
+          <p:nvPr/>
+        </p:nvSpPr>
+        <p:spPr>
+          <a:xfrm>
+            <a:off x="6766560" y="1737360"/>
+            <a:ext cx="4663440" cy="3657600"/>
+          </a:xfrm>
+          <a:prstGeom prst="rect">
+            <a:avLst/>
+          </a:prstGeom>
+          <a:solidFill>
+            <a:srgbClr val="F1F6EC"/>
+          </a:solidFill>
+        </p:spPr>
+        <p:txBody>
+          <a:bodyPr wrap="square" lIns="91440" tIns="91440" rIns="91440" bIns="91440" anchor="ctr"/>
+          <a:lstStyle/>
+          <a:p>
+            <a:pPr>
+              <a:spcAft>
+                <a:spcPts val="1000"/>
+              </a:spcAft>
+            </a:pPr>
+            <a:r>
+              <a:rPr sz="1200" b="1" i="0">
+                <a:solidFill>
+                  <a:srgbClr val="97BC62"/>
+                </a:solidFill>
+                <a:latin typeface="Calibri"/>
+              </a:rPr>
+              <a:t>THE AARONIC BLESSING — NUMBERS 6:24–26</a:t>
+            </a:r>
+          </a:p>
+          <a:p>
+            <a:pPr>
+              <a:spcAft>
+                <a:spcPts val="700"/>
+              </a:spcAft>
+            </a:pPr>
+            <a:r>
+              <a:rPr sz="2400" b="0" i="1">
+                <a:solidFill>
+                  <a:srgbClr val="222B22"/>
+                </a:solidFill>
+                <a:latin typeface="Cambria"/>
+              </a:rPr>
+              <a:t>“The Lord bless you and keep you;</a:t>
+            </a:r>
+          </a:p>
+          <a:p>
+            <a:pPr>
+              <a:spcAft>
+                <a:spcPts val="700"/>
+              </a:spcAft>
+            </a:pPr>
+            <a:r>
+              <a:rPr sz="2400" b="0" i="1">
+                <a:solidFill>
+                  <a:srgbClr val="222B22"/>
+                </a:solidFill>
+                <a:latin typeface="Cambria"/>
+              </a:rPr>
+              <a:t>the Lord make his face to shine upon you, and be gracious to you;</a:t>
+            </a:r>
+          </a:p>
+          <a:p>
+            <a:pPr>
+              <a:spcAft>
+                <a:spcPts val="700"/>
+              </a:spcAft>
+            </a:pPr>
+            <a:r>
+              <a:rPr sz="2400" b="0" i="1">
+                <a:solidFill>
+                  <a:srgbClr val="222B22"/>
+                </a:solidFill>
+                <a:latin typeface="Cambria"/>
+              </a:rPr>
+              <a:t>the Lord lift up his countenance upon you, and give you peace.”</a:t>
             </a:r>
           </a:p>
         </p:txBody>
@@ -6626,391 +7181,7 @@
           <a:p>
             <a:pPr algn="r"/>
             <a:r>
-              <a:t>21a</a:t>
-            </a:r>
-            <a:endParaRPr sz="1000" b="1">
-              <a:solidFill>
-                <a:srgbClr val="7A8A6E"/>
-              </a:solidFill>
-              <a:latin typeface="Calibri"/>
-            </a:endParaRPr>
-          </a:p>
-        </p:txBody>
-      </p:sp>
-    </p:spTree>
-  </p:cSld>
-  <p:clrMapOvr>
-    <a:masterClrMapping/>
-  </p:clrMapOvr>
-</p:sld>
-</file>
-
-<file path=ppt/slides/slide16.xml><?xml version="1.0" encoding="utf-8"?>
-<p:sld xmlns:a="http://schemas.openxmlformats.org/drawingml/2006/main" xmlns:p="http://schemas.openxmlformats.org/presentationml/2006/main" xmlns:r="http://schemas.openxmlformats.org/officeDocument/2006/relationships">
-  <p:cSld>
-    <p:spTree>
-      <p:nvGrpSpPr>
-        <p:cNvPr id="1" name=""/>
-        <p:cNvGrpSpPr/>
-        <p:nvPr/>
-      </p:nvGrpSpPr>
-      <p:grpSpPr/>
-      <p:sp>
-        <p:nvSpPr>
-          <p:cNvPr id="2" name="Rectangle 1"/>
-          <p:cNvSpPr/>
-          <p:nvPr/>
-        </p:nvSpPr>
-        <p:spPr>
-          <a:xfrm>
-            <a:off x="0" y="0"/>
-            <a:ext cx="12192000" cy="6858000"/>
-          </a:xfrm>
-          <a:prstGeom prst="rect">
-            <a:avLst/>
-          </a:prstGeom>
-          <a:solidFill>
-            <a:srgbClr val="FFFFFF"/>
-          </a:solidFill>
-          <a:ln>
-            <a:noFill/>
-          </a:ln>
-          <a:effectLst/>
-        </p:spPr>
-        <p:style>
-          <a:lnRef idx="1">
-            <a:schemeClr val="accent1"/>
-          </a:lnRef>
-          <a:fillRef idx="3">
-            <a:schemeClr val="accent1"/>
-          </a:fillRef>
-          <a:effectRef idx="2">
-            <a:schemeClr val="accent1"/>
-          </a:effectRef>
-          <a:fontRef idx="minor">
-            <a:schemeClr val="lt1"/>
-          </a:fontRef>
-        </p:style>
-        <p:txBody>
-          <a:bodyPr rtlCol="0" anchor="ctr"/>
-          <a:lstStyle/>
-          <a:p>
-            <a:pPr algn="ctr"/>
-          </a:p>
-        </p:txBody>
-      </p:sp>
-      <p:sp>
-        <p:nvSpPr>
-          <p:cNvPr id="3" name="TextBox 2"/>
-          <p:cNvSpPr txBox="1"/>
-          <p:nvPr/>
-        </p:nvSpPr>
-        <p:spPr>
-          <a:xfrm>
-            <a:off x="822960" y="502920"/>
-            <a:ext cx="10515600" cy="822960"/>
-          </a:xfrm>
-          <a:prstGeom prst="rect">
-            <a:avLst/>
-          </a:prstGeom>
-          <a:noFill/>
-        </p:spPr>
-        <p:txBody>
-          <a:bodyPr wrap="square">
-            <a:spAutoFit/>
-          </a:bodyPr>
-          <a:lstStyle/>
-          <a:p>
-            <a:r>
-              <a:rPr sz="2800" b="1">
-                <a:solidFill>
-                  <a:srgbClr val="2C5F2D"/>
-                </a:solidFill>
-                <a:latin typeface="Cambria"/>
-              </a:rPr>
-              <a:t>The Take-Home Sheet — the Daily Rhythm</a:t>
-            </a:r>
-          </a:p>
-        </p:txBody>
-      </p:sp>
-      <p:pic>
-        <p:nvPicPr>
-          <p:cNvPr id="4" name="Picture 3" descr="s2_part1.png"/>
-          <p:cNvPicPr>
-            <a:picLocks noChangeAspect="1"/>
-          </p:cNvPicPr>
-          <p:nvPr/>
-        </p:nvPicPr>
-        <p:blipFill>
-          <a:blip r:embed="rId2"/>
-          <a:stretch>
-            <a:fillRect/>
-          </a:stretch>
-        </p:blipFill>
-        <p:spPr>
-          <a:xfrm>
-            <a:off x="1798167" y="1463040"/>
-            <a:ext cx="8595360" cy="4039819"/>
-          </a:xfrm>
-          <a:prstGeom prst="rect">
-            <a:avLst/>
-          </a:prstGeom>
-          <a:ln w="12700">
-            <a:solidFill>
-              <a:srgbClr val="C8C8C8"/>
-            </a:solidFill>
-          </a:ln>
-        </p:spPr>
-      </p:pic>
-      <p:sp>
-        <p:nvSpPr>
-          <p:cNvPr id="5" name="TextBox 4"/>
-          <p:cNvSpPr txBox="1"/>
-          <p:nvPr/>
-        </p:nvSpPr>
-        <p:spPr>
-          <a:xfrm>
-            <a:off x="822960" y="6355080"/>
-            <a:ext cx="10515600" cy="411480"/>
-          </a:xfrm>
-          <a:prstGeom prst="rect">
-            <a:avLst/>
-          </a:prstGeom>
-          <a:noFill/>
-        </p:spPr>
-        <p:txBody>
-          <a:bodyPr wrap="square">
-            <a:spAutoFit/>
-          </a:bodyPr>
-          <a:lstStyle/>
-          <a:p>
-            <a:r>
-              <a:rPr sz="1400" i="1">
-                <a:solidFill>
-                  <a:srgbClr val="595959"/>
-                </a:solidFill>
-                <a:latin typeface="Calibri"/>
-              </a:rPr>
-              <a:t>Handed out now — this is the sheet in your hands.</a:t>
-            </a:r>
-          </a:p>
-        </p:txBody>
-      </p:sp>
-      <p:sp>
-        <p:nvSpPr>
-          <p:cNvPr id="90" name="SlideNum"/>
-          <p:cNvSpPr txBox="1"/>
-          <p:nvPr/>
-        </p:nvSpPr>
-        <p:spPr>
-          <a:xfrm>
-            <a:off x="11384280" y="6446520"/>
-            <a:ext cx="640080" cy="292608"/>
-          </a:xfrm>
-          <a:prstGeom prst="rect">
-            <a:avLst/>
-          </a:prstGeom>
-          <a:noFill/>
-        </p:spPr>
-        <p:txBody>
-          <a:bodyPr wrap="none" lIns="0" tIns="0" rIns="45720" bIns="0" anchor="ctr"/>
-          <a:lstStyle/>
-          <a:p>
-            <a:pPr algn="r"/>
-            <a:r>
-              <a:t>31</a:t>
-            </a:r>
-            <a:endParaRPr sz="1000" b="1">
-              <a:solidFill>
-                <a:srgbClr val="7A8A6E"/>
-              </a:solidFill>
-              <a:latin typeface="Calibri"/>
-            </a:endParaRPr>
-          </a:p>
-        </p:txBody>
-      </p:sp>
-    </p:spTree>
-  </p:cSld>
-  <p:clrMapOvr>
-    <a:masterClrMapping/>
-  </p:clrMapOvr>
-</p:sld>
-</file>
-
-<file path=ppt/slides/slide17.xml><?xml version="1.0" encoding="utf-8"?>
-<p:sld xmlns:a="http://schemas.openxmlformats.org/drawingml/2006/main" xmlns:p="http://schemas.openxmlformats.org/presentationml/2006/main" xmlns:r="http://schemas.openxmlformats.org/officeDocument/2006/relationships">
-  <p:cSld>
-    <p:spTree>
-      <p:nvGrpSpPr>
-        <p:cNvPr id="1" name=""/>
-        <p:cNvGrpSpPr/>
-        <p:nvPr/>
-      </p:nvGrpSpPr>
-      <p:grpSpPr/>
-      <p:sp>
-        <p:nvSpPr>
-          <p:cNvPr id="2" name="Rectangle 1"/>
-          <p:cNvSpPr/>
-          <p:nvPr/>
-        </p:nvSpPr>
-        <p:spPr>
-          <a:xfrm>
-            <a:off x="0" y="0"/>
-            <a:ext cx="12192000" cy="6858000"/>
-          </a:xfrm>
-          <a:prstGeom prst="rect">
-            <a:avLst/>
-          </a:prstGeom>
-          <a:solidFill>
-            <a:srgbClr val="FFFFFF"/>
-          </a:solidFill>
-          <a:ln>
-            <a:noFill/>
-          </a:ln>
-          <a:effectLst/>
-        </p:spPr>
-        <p:style>
-          <a:lnRef idx="1">
-            <a:schemeClr val="accent1"/>
-          </a:lnRef>
-          <a:fillRef idx="3">
-            <a:schemeClr val="accent1"/>
-          </a:fillRef>
-          <a:effectRef idx="2">
-            <a:schemeClr val="accent1"/>
-          </a:effectRef>
-          <a:fontRef idx="minor">
-            <a:schemeClr val="lt1"/>
-          </a:fontRef>
-        </p:style>
-        <p:txBody>
-          <a:bodyPr rtlCol="0" anchor="ctr"/>
-          <a:lstStyle/>
-          <a:p>
-            <a:pPr algn="ctr"/>
-          </a:p>
-        </p:txBody>
-      </p:sp>
-      <p:sp>
-        <p:nvSpPr>
-          <p:cNvPr id="3" name="TextBox 2"/>
-          <p:cNvSpPr txBox="1"/>
-          <p:nvPr/>
-        </p:nvSpPr>
-        <p:spPr>
-          <a:xfrm>
-            <a:off x="822960" y="502920"/>
-            <a:ext cx="10515600" cy="822960"/>
-          </a:xfrm>
-          <a:prstGeom prst="rect">
-            <a:avLst/>
-          </a:prstGeom>
-          <a:noFill/>
-        </p:spPr>
-        <p:txBody>
-          <a:bodyPr wrap="square">
-            <a:spAutoFit/>
-          </a:bodyPr>
-          <a:lstStyle/>
-          <a:p>
-            <a:r>
-              <a:rPr sz="2800" b="1">
-                <a:solidFill>
-                  <a:srgbClr val="2C5F2D"/>
-                </a:solidFill>
-                <a:latin typeface="Cambria"/>
-              </a:rPr>
-              <a:t>The Take-Home Sheet — the Four Parts</a:t>
-            </a:r>
-          </a:p>
-        </p:txBody>
-      </p:sp>
-      <p:pic>
-        <p:nvPicPr>
-          <p:cNvPr id="4" name="Picture 3" descr="s2_part2.png"/>
-          <p:cNvPicPr>
-            <a:picLocks noChangeAspect="1"/>
-          </p:cNvPicPr>
-          <p:nvPr/>
-        </p:nvPicPr>
-        <p:blipFill>
-          <a:blip r:embed="rId2"/>
-          <a:stretch>
-            <a:fillRect/>
-          </a:stretch>
-        </p:blipFill>
-        <p:spPr>
-          <a:xfrm>
-            <a:off x="2066004" y="1463040"/>
-            <a:ext cx="8059687" cy="4709160"/>
-          </a:xfrm>
-          <a:prstGeom prst="rect">
-            <a:avLst/>
-          </a:prstGeom>
-          <a:ln w="12700">
-            <a:solidFill>
-              <a:srgbClr val="C8C8C8"/>
-            </a:solidFill>
-          </a:ln>
-        </p:spPr>
-      </p:pic>
-      <p:sp>
-        <p:nvSpPr>
-          <p:cNvPr id="5" name="TextBox 4"/>
-          <p:cNvSpPr txBox="1"/>
-          <p:nvPr/>
-        </p:nvSpPr>
-        <p:spPr>
-          <a:xfrm>
-            <a:off x="822960" y="6355080"/>
-            <a:ext cx="10515600" cy="411480"/>
-          </a:xfrm>
-          <a:prstGeom prst="rect">
-            <a:avLst/>
-          </a:prstGeom>
-          <a:noFill/>
-        </p:spPr>
-        <p:txBody>
-          <a:bodyPr wrap="square">
-            <a:spAutoFit/>
-          </a:bodyPr>
-          <a:lstStyle/>
-          <a:p>
-            <a:r>
-              <a:rPr sz="1400" i="1">
-                <a:solidFill>
-                  <a:srgbClr val="595959"/>
-                </a:solidFill>
-                <a:latin typeface="Calibri"/>
-              </a:rPr>
-              <a:t>One practice at a time — and a partner expecting you at the end of week one.</a:t>
-            </a:r>
-          </a:p>
-        </p:txBody>
-      </p:sp>
-      <p:sp>
-        <p:nvSpPr>
-          <p:cNvPr id="90" name="SlideNum"/>
-          <p:cNvSpPr txBox="1"/>
-          <p:nvPr/>
-        </p:nvSpPr>
-        <p:spPr>
-          <a:xfrm>
-            <a:off x="11384280" y="6446520"/>
-            <a:ext cx="640080" cy="292608"/>
-          </a:xfrm>
-          <a:prstGeom prst="rect">
-            <a:avLst/>
-          </a:prstGeom>
-          <a:noFill/>
-        </p:spPr>
-        <p:txBody>
-          <a:bodyPr wrap="none" lIns="0" tIns="0" rIns="45720" bIns="0" anchor="ctr"/>
-          <a:lstStyle/>
-          <a:p>
-            <a:pPr algn="r"/>
-            <a:r>
-              <a:t>31a</a:t>
+              <a:t>33</a:t>
             </a:r>
             <a:endParaRPr sz="1000" b="1">
               <a:solidFill>
@@ -7279,7 +7450,7 @@
 </file>
 
 <file path=ppt/slides/slide3.xml><?xml version="1.0" encoding="utf-8"?>
-<p:sld xmlns:a="http://schemas.openxmlformats.org/drawingml/2006/main" xmlns:r="http://schemas.openxmlformats.org/officeDocument/2006/relationships" xmlns:p="http://schemas.openxmlformats.org/presentationml/2006/main">
+<p:sld xmlns:a="http://schemas.openxmlformats.org/drawingml/2006/main" xmlns:p="http://schemas.openxmlformats.org/presentationml/2006/main" xmlns:r="http://schemas.openxmlformats.org/officeDocument/2006/relationships">
   <p:cSld>
     <p:spTree>
       <p:nvGrpSpPr>
@@ -7287,14 +7458,7 @@
         <p:cNvGrpSpPr/>
         <p:nvPr/>
       </p:nvGrpSpPr>
-      <p:grpSpPr>
-        <a:xfrm>
-          <a:off x="0" y="0"/>
-          <a:ext cx="0" cy="0"/>
-          <a:chOff x="0" y="0"/>
-          <a:chExt cx="0" cy="0"/>
-        </a:xfrm>
-      </p:grpSpPr>
+      <p:grpSpPr/>
       <p:sp>
         <p:nvSpPr>
           <p:cNvPr id="2" name="Rectangle 1"/>
@@ -7304,7 +7468,7 @@
         <p:spPr>
           <a:xfrm>
             <a:off x="0" y="0"/>
-            <a:ext cx="12191695" cy="6858000"/>
+            <a:ext cx="12192000" cy="6858000"/>
           </a:xfrm>
           <a:prstGeom prst="rect">
             <a:avLst/>
@@ -7336,7 +7500,6 @@
           <a:lstStyle/>
           <a:p>
             <a:pPr algn="ctr"/>
-            <a:endParaRPr/>
           </a:p>
         </p:txBody>
       </p:sp>
@@ -7362,33 +7525,28 @@
           </a:bodyPr>
           <a:lstStyle/>
           <a:p>
-            <a:pPr algn="l">
-              <a:spcAft>
-                <a:spcPts val="600"/>
-              </a:spcAft>
-            </a:pPr>
-            <a:r>
-              <a:rPr sz="2800" b="1" i="0">
+            <a:r>
+              <a:rPr sz="2800" b="1">
                 <a:solidFill>
                   <a:srgbClr val="2C5F2D"/>
                 </a:solidFill>
                 <a:latin typeface="Cambria"/>
               </a:rPr>
-              <a:t>Session 2 — Tonight’s Road</a:t>
-            </a:r>
-          </a:p>
-        </p:txBody>
-      </p:sp>
-      <p:sp>
-        <p:nvSpPr>
-          <p:cNvPr id="4" name="TextBox 3"/>
+              <a:t>Where We Are — the Four Connects</a:t>
+            </a:r>
+          </a:p>
+        </p:txBody>
+      </p:sp>
+      <p:sp>
+        <p:nvSpPr>
+          <p:cNvPr id="5" name="TextBox 4"/>
           <p:cNvSpPr txBox="1"/>
           <p:nvPr/>
         </p:nvSpPr>
         <p:spPr>
           <a:xfrm>
-            <a:off x="822960" y="1508760"/>
-            <a:ext cx="7040880" cy="4503797"/>
+            <a:off x="822960" y="5623560"/>
+            <a:ext cx="10515600" cy="914400"/>
           </a:xfrm>
           <a:prstGeom prst="rect">
             <a:avLst/>
@@ -7401,203 +7559,32 @@
           </a:bodyPr>
           <a:lstStyle/>
           <a:p>
-            <a:pPr>
-              <a:spcAft>
-                <a:spcPts val="800"/>
-              </a:spcAft>
-            </a:pPr>
-            <a:r>
-              <a:rPr sz="2400" b="1" dirty="0">
-                <a:solidFill>
-                  <a:srgbClr val="97BC62"/>
-                </a:solidFill>
-                <a:latin typeface="Calibri"/>
-              </a:rPr>
-              <a:t>1   </a:t>
-            </a:r>
-            <a:r>
-              <a:rPr sz="2400" dirty="0">
+            <a:r>
+              <a:rPr sz="1800" b="0">
                 <a:solidFill>
                   <a:srgbClr val="222B22"/>
                 </a:solidFill>
                 <a:latin typeface="Calibri"/>
               </a:rPr>
-              <a:t>Opening container — full eight-step protocol</a:t>
-            </a:r>
-          </a:p>
-          <a:p>
-            <a:pPr>
-              <a:spcAft>
-                <a:spcPts val="800"/>
-              </a:spcAft>
-            </a:pPr>
-            <a:r>
-              <a:rPr sz="2400" b="1" dirty="0">
-                <a:solidFill>
-                  <a:srgbClr val="97BC62"/>
-                </a:solidFill>
-                <a:latin typeface="Calibri"/>
-              </a:rPr>
-              <a:t>2   </a:t>
-            </a:r>
-            <a:r>
-              <a:rPr sz="2400" dirty="0">
+              <a:t>Session 2 stands in the first box — </a:t>
+            </a:r>
+            <a:r>
+              <a:rPr sz="1800" b="1">
+                <a:solidFill>
+                  <a:srgbClr val="2C5F2D"/>
+                </a:solidFill>
+                <a:latin typeface="Calibri"/>
+              </a:rPr>
+              <a:t>Connect with Self</a:t>
+            </a:r>
+            <a:r>
+              <a:rPr sz="1800" b="0">
                 <a:solidFill>
                   <a:srgbClr val="222B22"/>
                 </a:solidFill>
                 <a:latin typeface="Calibri"/>
               </a:rPr>
-              <a:t>Check-in on Week 1 practice</a:t>
-            </a:r>
-          </a:p>
-          <a:p>
-            <a:pPr>
-              <a:spcAft>
-                <a:spcPts val="800"/>
-              </a:spcAft>
-            </a:pPr>
-            <a:r>
-              <a:rPr sz="2400" b="1" dirty="0">
-                <a:solidFill>
-                  <a:srgbClr val="97BC62"/>
-                </a:solidFill>
-                <a:latin typeface="Calibri"/>
-              </a:rPr>
-              <a:t>3   </a:t>
-            </a:r>
-            <a:r>
-              <a:rPr sz="2400" dirty="0">
-                <a:solidFill>
-                  <a:srgbClr val="222B22"/>
-                </a:solidFill>
-                <a:latin typeface="Calibri"/>
-              </a:rPr>
-              <a:t>Teaching: the seed recalled; Mark 4, the soils, and Paul’s mixed ground</a:t>
-            </a:r>
-          </a:p>
-          <a:p>
-            <a:pPr>
-              <a:spcAft>
-                <a:spcPts val="800"/>
-              </a:spcAft>
-            </a:pPr>
-            <a:r>
-              <a:rPr sz="2400" b="1" dirty="0">
-                <a:solidFill>
-                  <a:srgbClr val="97BC62"/>
-                </a:solidFill>
-                <a:latin typeface="Calibri"/>
-              </a:rPr>
-              <a:t>4   </a:t>
-            </a:r>
-            <a:r>
-              <a:rPr sz="2400" dirty="0">
-                <a:solidFill>
-                  <a:srgbClr val="222B22"/>
-                </a:solidFill>
-                <a:latin typeface="Calibri"/>
-              </a:rPr>
-              <a:t>pairs: question zero, then the Heart Soil diagnostic</a:t>
-            </a:r>
-          </a:p>
-          <a:p>
-            <a:pPr>
-              <a:spcAft>
-                <a:spcPts val="800"/>
-              </a:spcAft>
-            </a:pPr>
-            <a:r>
-              <a:rPr sz="2400" b="1" dirty="0">
-                <a:solidFill>
-                  <a:srgbClr val="97BC62"/>
-                </a:solidFill>
-                <a:latin typeface="Calibri"/>
-              </a:rPr>
-              <a:t>5   </a:t>
-            </a:r>
-            <a:r>
-              <a:rPr sz="2400" dirty="0">
-                <a:solidFill>
-                  <a:srgbClr val="222B22"/>
-                </a:solidFill>
-                <a:latin typeface="Calibri"/>
-              </a:rPr>
-              <a:t>Re-merge — shared debrief; Mark 4:20 re-read</a:t>
-            </a:r>
-          </a:p>
-          <a:p>
-            <a:pPr>
-              <a:spcAft>
-                <a:spcPts val="800"/>
-              </a:spcAft>
-            </a:pPr>
-            <a:r>
-              <a:rPr sz="2400" b="1" dirty="0">
-                <a:solidFill>
-                  <a:srgbClr val="97BC62"/>
-                </a:solidFill>
-                <a:latin typeface="Calibri"/>
-              </a:rPr>
-              <a:t>6   </a:t>
-            </a:r>
-            <a:r>
-              <a:rPr sz="2400" dirty="0">
-                <a:solidFill>
-                  <a:srgbClr val="222B22"/>
-                </a:solidFill>
-                <a:latin typeface="Calibri"/>
-              </a:rPr>
-              <a:t>Homework commissioning — handout + check-in partners</a:t>
-            </a:r>
-          </a:p>
-          <a:p>
-            <a:pPr>
-              <a:spcAft>
-                <a:spcPts val="800"/>
-              </a:spcAft>
-            </a:pPr>
-            <a:r>
-              <a:rPr sz="2400" b="1" dirty="0">
-                <a:solidFill>
-                  <a:srgbClr val="97BC62"/>
-                </a:solidFill>
-                <a:latin typeface="Calibri"/>
-              </a:rPr>
-              <a:t>7   </a:t>
-            </a:r>
-            <a:r>
-              <a:rPr sz="2400" dirty="0">
-                <a:solidFill>
-                  <a:srgbClr val="222B22"/>
-                </a:solidFill>
-                <a:latin typeface="Calibri"/>
-              </a:rPr>
-              <a:t>The Leader Feedback Round — both leaders</a:t>
-            </a:r>
-          </a:p>
-          <a:p>
-            <a:pPr>
-              <a:spcAft>
-                <a:spcPts val="800"/>
-              </a:spcAft>
-            </a:pPr>
-            <a:r>
-              <a:rPr sz="2400" b="1" dirty="0">
-                <a:solidFill>
-                  <a:srgbClr val="97BC62"/>
-                </a:solidFill>
-                <a:latin typeface="Calibri"/>
-              </a:rPr>
-              <a:t>8   </a:t>
-            </a:r>
-            <a:r>
-              <a:rPr sz="2400" dirty="0">
-                <a:solidFill>
-                  <a:srgbClr val="222B22"/>
-                </a:solidFill>
-                <a:latin typeface="Calibri"/>
-              </a:rPr>
-              <a:t>Closing container + Aaronic blessing</a:t>
+              <a:t>. Each connection makes the next one real (Matt. 22:37–40).</a:t>
             </a:r>
           </a:p>
         </p:txBody>
@@ -7624,7 +7611,7 @@
           <a:p>
             <a:pPr algn="r"/>
             <a:r>
-              <a:t>22</a:t>
+              <a:t>21a</a:t>
             </a:r>
             <a:endParaRPr sz="1000" b="1">
               <a:solidFill>
@@ -7637,38 +7624,26 @@
       </p:sp>
       <p:pic>
         <p:nvPicPr>
-          <p:cNvPr id="31" name="Picture 31" descr="the open container bowl"/>
+          <p:cNvPr id="91" name="Picture 90" descr="four-connects.png"/>
           <p:cNvPicPr>
             <a:picLocks noChangeAspect="1"/>
           </p:cNvPicPr>
           <p:nvPr/>
         </p:nvPicPr>
         <p:blipFill>
-          <a:blip r:embed="rId3"/>
+          <a:blip r:embed="rId4"/>
           <a:stretch>
             <a:fillRect/>
           </a:stretch>
         </p:blipFill>
         <p:spPr>
           <a:xfrm>
-            <a:off x="8001000" y="1554480"/>
-            <a:ext cx="3017520" cy="4526280"/>
+            <a:off x="932688" y="1645920"/>
+            <a:ext cx="10332720" cy="3708663"/>
           </a:xfrm>
           <a:prstGeom prst="rect">
             <a:avLst/>
           </a:prstGeom>
-          <a:ln w="76200">
-            <a:solidFill>
-              <a:srgbClr val="FFFFFF"/>
-            </a:solidFill>
-          </a:ln>
-          <a:effectLst>
-            <a:outerShdw blurRad="63500" dist="25400" dir="5400000" rotWithShape="0">
-              <a:srgbClr val="000000">
-                <a:alpha val="35000"/>
-              </a:srgbClr>
-            </a:outerShdw>
-          </a:effectLst>
         </p:spPr>
       </p:pic>
     </p:spTree>
@@ -7716,11 +7691,27 @@
           <a:ln>
             <a:noFill/>
           </a:ln>
-        </p:spPr>
-        <p:txBody>
-          <a:bodyPr/>
-          <a:lstStyle/>
-          <a:p>
+          <a:effectLst/>
+        </p:spPr>
+        <p:style>
+          <a:lnRef idx="1">
+            <a:schemeClr val="accent1"/>
+          </a:lnRef>
+          <a:fillRef idx="3">
+            <a:schemeClr val="accent1"/>
+          </a:fillRef>
+          <a:effectRef idx="2">
+            <a:schemeClr val="accent1"/>
+          </a:effectRef>
+          <a:fontRef idx="minor">
+            <a:schemeClr val="lt1"/>
+          </a:fontRef>
+        </p:style>
+        <p:txBody>
+          <a:bodyPr rtlCol="0" anchor="ctr"/>
+          <a:lstStyle/>
+          <a:p>
+            <a:pPr algn="ctr"/>
             <a:endParaRPr/>
           </a:p>
         </p:txBody>
@@ -7759,21 +7750,21 @@
                 </a:solidFill>
                 <a:latin typeface="Cambria"/>
               </a:rPr>
-              <a:t>Opening Container — the Full Eight Steps</a:t>
-            </a:r>
-          </a:p>
-        </p:txBody>
-      </p:sp>
-      <p:sp>
-        <p:nvSpPr>
-          <p:cNvPr id="4" name="TextBox 4"/>
+              <a:t>Session 2 — Tonight’s Road</a:t>
+            </a:r>
+          </a:p>
+        </p:txBody>
+      </p:sp>
+      <p:sp>
+        <p:nvSpPr>
+          <p:cNvPr id="4" name="TextBox 3"/>
           <p:cNvSpPr txBox="1"/>
           <p:nvPr/>
         </p:nvSpPr>
         <p:spPr>
           <a:xfrm>
-            <a:off x="822960" y="1554480"/>
-            <a:ext cx="10515600" cy="4754880"/>
+            <a:off x="822960" y="1508760"/>
+            <a:ext cx="7040880" cy="4503797"/>
           </a:xfrm>
           <a:prstGeom prst="rect">
             <a:avLst/>
@@ -7781,16 +7772,18 @@
           <a:noFill/>
         </p:spPr>
         <p:txBody>
-          <a:bodyPr wrap="square" lIns="91440" tIns="91440" rIns="91440" bIns="91440"/>
-          <a:lstStyle/>
-          <a:p>
-            <a:pPr marL="342900" indent="-342900">
+          <a:bodyPr wrap="square">
+            <a:spAutoFit/>
+          </a:bodyPr>
+          <a:lstStyle/>
+          <a:p>
+            <a:pPr>
               <a:spcAft>
-                <a:spcPts val="750"/>
+                <a:spcPts val="800"/>
               </a:spcAft>
             </a:pPr>
             <a:r>
-              <a:rPr sz="2400" b="1" i="0" dirty="0">
+              <a:rPr sz="2400" b="1" dirty="0">
                 <a:solidFill>
                   <a:srgbClr val="97BC62"/>
                 </a:solidFill>
@@ -7799,23 +7792,23 @@
               <a:t>1   </a:t>
             </a:r>
             <a:r>
-              <a:rPr sz="2400" b="0" i="0" dirty="0">
+              <a:rPr sz="2400" dirty="0">
                 <a:solidFill>
                   <a:srgbClr val="222B22"/>
                 </a:solidFill>
                 <a:latin typeface="Calibri"/>
               </a:rPr>
-              <a:t>Welcome — five minutes to open the container</a:t>
-            </a:r>
-          </a:p>
-          <a:p>
-            <a:pPr marL="342900" indent="-342900">
+              <a:t>Opening container — full eight-step protocol</a:t>
+            </a:r>
+          </a:p>
+          <a:p>
+            <a:pPr>
               <a:spcAft>
-                <a:spcPts val="750"/>
+                <a:spcPts val="800"/>
               </a:spcAft>
             </a:pPr>
             <a:r>
-              <a:rPr sz="2400" b="1" i="0" dirty="0">
+              <a:rPr sz="2400" b="1" dirty="0">
                 <a:solidFill>
                   <a:srgbClr val="97BC62"/>
                 </a:solidFill>
@@ -7824,23 +7817,23 @@
               <a:t>2   </a:t>
             </a:r>
             <a:r>
-              <a:rPr sz="2400" b="0" i="0" dirty="0">
+              <a:rPr sz="2400" dirty="0">
                 <a:solidFill>
                   <a:srgbClr val="222B22"/>
                 </a:solidFill>
                 <a:latin typeface="Calibri"/>
               </a:rPr>
-              <a:t>Phones silenced and put away</a:t>
-            </a:r>
-          </a:p>
-          <a:p>
-            <a:pPr marL="342900" indent="-342900">
+              <a:t>Check-in on Week 1 practice</a:t>
+            </a:r>
+          </a:p>
+          <a:p>
+            <a:pPr>
               <a:spcAft>
-                <a:spcPts val="750"/>
+                <a:spcPts val="800"/>
               </a:spcAft>
             </a:pPr>
             <a:r>
-              <a:rPr sz="2400" b="1" i="0" dirty="0">
+              <a:rPr sz="2400" b="1" dirty="0">
                 <a:solidFill>
                   <a:srgbClr val="97BC62"/>
                 </a:solidFill>
@@ -7849,23 +7842,23 @@
               <a:t>3   </a:t>
             </a:r>
             <a:r>
-              <a:rPr sz="2400" b="0" i="0" dirty="0">
+              <a:rPr sz="2400" dirty="0">
                 <a:solidFill>
                   <a:srgbClr val="222B22"/>
                 </a:solidFill>
                 <a:latin typeface="Calibri"/>
               </a:rPr>
-              <a:t>Stand in a circle</a:t>
-            </a:r>
-          </a:p>
-          <a:p>
-            <a:pPr marL="342900" indent="-342900">
+              <a:t>Teaching: the seed recalled; Mark 4, the soils, and Paul’s mixed ground</a:t>
+            </a:r>
+          </a:p>
+          <a:p>
+            <a:pPr>
               <a:spcAft>
-                <a:spcPts val="750"/>
+                <a:spcPts val="800"/>
               </a:spcAft>
             </a:pPr>
             <a:r>
-              <a:rPr sz="2400" b="1" i="0" dirty="0">
+              <a:rPr sz="2400" b="1" dirty="0">
                 <a:solidFill>
                   <a:srgbClr val="97BC62"/>
                 </a:solidFill>
@@ -7874,23 +7867,23 @@
               <a:t>4   </a:t>
             </a:r>
             <a:r>
-              <a:rPr sz="2400" b="0" i="0" dirty="0">
+              <a:rPr sz="2400" dirty="0">
                 <a:solidFill>
                   <a:srgbClr val="222B22"/>
                 </a:solidFill>
                 <a:latin typeface="Calibri"/>
               </a:rPr>
-              <a:t>One-word check-in — how you actually are, right now</a:t>
-            </a:r>
-          </a:p>
-          <a:p>
-            <a:pPr marL="342900" indent="-342900">
+              <a:t>pairs: question zero, then the Heart Soil diagnostic</a:t>
+            </a:r>
+          </a:p>
+          <a:p>
+            <a:pPr>
               <a:spcAft>
-                <a:spcPts val="750"/>
+                <a:spcPts val="800"/>
               </a:spcAft>
             </a:pPr>
             <a:r>
-              <a:rPr sz="2400" b="1" i="0" dirty="0">
+              <a:rPr sz="2400" b="1" dirty="0">
                 <a:solidFill>
                   <a:srgbClr val="97BC62"/>
                 </a:solidFill>
@@ -7899,23 +7892,23 @@
               <a:t>5   </a:t>
             </a:r>
             <a:r>
-              <a:rPr sz="2400" b="0" i="0" dirty="0">
+              <a:rPr sz="2400" dirty="0">
                 <a:solidFill>
                   <a:srgbClr val="222B22"/>
                 </a:solidFill>
                 <a:latin typeface="Calibri"/>
               </a:rPr>
-              <a:t>Put out / bring in — set something down; bring a blessing in</a:t>
-            </a:r>
-          </a:p>
-          <a:p>
-            <a:pPr marL="342900" indent="-342900">
+              <a:t>Re-merge — shared debrief; Mark 4:20 re-read</a:t>
+            </a:r>
+          </a:p>
+          <a:p>
+            <a:pPr>
               <a:spcAft>
-                <a:spcPts val="750"/>
+                <a:spcPts val="800"/>
               </a:spcAft>
             </a:pPr>
             <a:r>
-              <a:rPr sz="2400" b="1" i="0" dirty="0">
+              <a:rPr sz="2400" b="1" dirty="0">
                 <a:solidFill>
                   <a:srgbClr val="97BC62"/>
                 </a:solidFill>
@@ -7924,23 +7917,23 @@
               <a:t>6   </a:t>
             </a:r>
             <a:r>
-              <a:rPr sz="2400" b="0" i="0" dirty="0">
+              <a:rPr sz="2400" dirty="0">
                 <a:solidFill>
                   <a:srgbClr val="222B22"/>
                 </a:solidFill>
                 <a:latin typeface="Calibri"/>
               </a:rPr>
-              <a:t>Spoken commitment: “I am here. I am paying attention. I am willing to be moved.”</a:t>
-            </a:r>
-          </a:p>
-          <a:p>
-            <a:pPr marL="342900" indent="-342900">
+              <a:t>Homework commissioning — handout + check-in partners</a:t>
+            </a:r>
+          </a:p>
+          <a:p>
+            <a:pPr>
               <a:spcAft>
-                <a:spcPts val="750"/>
+                <a:spcPts val="800"/>
               </a:spcAft>
             </a:pPr>
             <a:r>
-              <a:rPr sz="2400" b="1" i="0" dirty="0">
+              <a:rPr sz="2400" b="1" dirty="0">
                 <a:solidFill>
                   <a:srgbClr val="97BC62"/>
                 </a:solidFill>
@@ -7949,23 +7942,23 @@
               <a:t>7   </a:t>
             </a:r>
             <a:r>
-              <a:rPr sz="2400" b="0" i="0" dirty="0">
+              <a:rPr sz="2400" dirty="0">
                 <a:solidFill>
                   <a:srgbClr val="222B22"/>
                 </a:solidFill>
                 <a:latin typeface="Calibri"/>
               </a:rPr>
-              <a:t>Opening prayer — “Holy Spirit, you are welcome here. Speak. We are listening.”</a:t>
-            </a:r>
-          </a:p>
-          <a:p>
-            <a:pPr marL="342900" indent="-342900">
+              <a:t>The Leader Feedback Round — both leaders</a:t>
+            </a:r>
+          </a:p>
+          <a:p>
+            <a:pPr>
               <a:spcAft>
-                <a:spcPts val="750"/>
+                <a:spcPts val="800"/>
               </a:spcAft>
             </a:pPr>
             <a:r>
-              <a:rPr sz="2400" b="1" i="0" dirty="0">
+              <a:rPr sz="2400" b="1" dirty="0">
                 <a:solidFill>
                   <a:srgbClr val="97BC62"/>
                 </a:solidFill>
@@ -7974,13 +7967,13 @@
               <a:t>8   </a:t>
             </a:r>
             <a:r>
-              <a:rPr sz="2400" b="0" i="0" dirty="0">
+              <a:rPr sz="2400" dirty="0">
                 <a:solidFill>
                   <a:srgbClr val="222B22"/>
                 </a:solidFill>
                 <a:latin typeface="Calibri"/>
               </a:rPr>
-              <a:t>Sit. Begin.</a:t>
+              <a:t>Closing container + Aaronic blessing</a:t>
             </a:r>
           </a:p>
         </p:txBody>
@@ -8007,7 +8000,7 @@
           <a:p>
             <a:pPr algn="r"/>
             <a:r>
-              <a:t>23</a:t>
+              <a:t>22</a:t>
             </a:r>
             <a:endParaRPr sz="1000" b="1">
               <a:solidFill>
@@ -8018,6 +8011,42 @@
           </a:p>
         </p:txBody>
       </p:sp>
+      <p:pic>
+        <p:nvPicPr>
+          <p:cNvPr id="31" name="Picture 31" descr="the open container bowl"/>
+          <p:cNvPicPr>
+            <a:picLocks noChangeAspect="1"/>
+          </p:cNvPicPr>
+          <p:nvPr/>
+        </p:nvPicPr>
+        <p:blipFill>
+          <a:blip r:embed="rId3"/>
+          <a:stretch>
+            <a:fillRect/>
+          </a:stretch>
+        </p:blipFill>
+        <p:spPr>
+          <a:xfrm>
+            <a:off x="8001000" y="1554480"/>
+            <a:ext cx="3017520" cy="4526280"/>
+          </a:xfrm>
+          <a:prstGeom prst="rect">
+            <a:avLst/>
+          </a:prstGeom>
+          <a:ln w="76200">
+            <a:solidFill>
+              <a:srgbClr val="FFFFFF"/>
+            </a:solidFill>
+          </a:ln>
+          <a:effectLst>
+            <a:outerShdw blurRad="63500" dist="25400" dir="5400000" rotWithShape="0">
+              <a:srgbClr val="000000">
+                <a:alpha val="35000"/>
+              </a:srgbClr>
+            </a:outerShdw>
+          </a:effectLst>
+        </p:spPr>
+      </p:pic>
     </p:spTree>
   </p:cSld>
   <p:clrMapOvr>
@@ -8106,7 +8135,7 @@
                 </a:solidFill>
                 <a:latin typeface="Cambria"/>
               </a:rPr>
-              <a:t>Check-In on Week 1 Practice</a:t>
+              <a:t>Opening Container — the Full Eight Steps</a:t>
             </a:r>
           </a:p>
         </p:txBody>
@@ -8120,7 +8149,7 @@
         <p:spPr>
           <a:xfrm>
             <a:off x="822960" y="1554480"/>
-            <a:ext cx="6675120" cy="4754880"/>
+            <a:ext cx="10515600" cy="4754880"/>
           </a:xfrm>
           <a:prstGeom prst="rect">
             <a:avLst/>
@@ -8131,128 +8160,203 @@
           <a:bodyPr wrap="square" lIns="91440" tIns="91440" rIns="91440" bIns="91440"/>
           <a:lstStyle/>
           <a:p>
-            <a:pPr marL="274320" indent="-274320">
+            <a:pPr marL="342900" indent="-342900">
               <a:spcAft>
-                <a:spcPts val="900"/>
+                <a:spcPts val="750"/>
               </a:spcAft>
             </a:pPr>
             <a:r>
-              <a:rPr sz="2200" b="1" i="0">
+              <a:rPr sz="2400" b="1" i="0" dirty="0">
                 <a:solidFill>
                   <a:srgbClr val="97BC62"/>
                 </a:solidFill>
                 <a:latin typeface="Calibri"/>
               </a:rPr>
-              <a:t>•  </a:t>
-            </a:r>
-            <a:r>
-              <a:rPr sz="2200" b="0" i="0">
+              <a:t>1   </a:t>
+            </a:r>
+            <a:r>
+              <a:rPr sz="2400" b="0" i="0" dirty="0">
                 <a:solidFill>
                   <a:srgbClr val="222B22"/>
                 </a:solidFill>
                 <a:latin typeface="Calibri"/>
               </a:rPr>
-              <a:t>One quick round, one sentence each — a parent starts</a:t>
-            </a:r>
-          </a:p>
-          <a:p>
-            <a:pPr marL="685800" indent="-274320">
+              <a:t>Welcome — five minutes to open the container</a:t>
+            </a:r>
+          </a:p>
+          <a:p>
+            <a:pPr marL="342900" indent="-342900">
               <a:spcAft>
-                <a:spcPts val="700"/>
+                <a:spcPts val="750"/>
               </a:spcAft>
             </a:pPr>
             <a:r>
-              <a:rPr sz="2200" b="1" i="0">
+              <a:rPr sz="2400" b="1" i="0" dirty="0">
                 <a:solidFill>
                   <a:srgbClr val="97BC62"/>
                 </a:solidFill>
                 <a:latin typeface="Calibri"/>
               </a:rPr>
-              <a:t>–  </a:t>
-            </a:r>
-            <a:r>
-              <a:rPr sz="2200" b="0" i="1">
+              <a:t>2   </a:t>
+            </a:r>
+            <a:r>
+              <a:rPr sz="2400" b="0" i="0" dirty="0">
                 <a:solidFill>
                   <a:srgbClr val="222B22"/>
                 </a:solidFill>
                 <a:latin typeface="Calibri"/>
               </a:rPr>
-              <a:t>“One thing I noticed this week when I asked the morning question …”</a:t>
-            </a:r>
-          </a:p>
-          <a:p>
-            <a:pPr marL="685800" indent="-274320">
+              <a:t>Phones silenced and put away</a:t>
+            </a:r>
+          </a:p>
+          <a:p>
+            <a:pPr marL="342900" indent="-342900">
               <a:spcAft>
-                <a:spcPts val="700"/>
+                <a:spcPts val="750"/>
               </a:spcAft>
             </a:pPr>
             <a:r>
-              <a:rPr sz="2200" b="1" i="0">
+              <a:rPr sz="2400" b="1" i="0" dirty="0">
                 <a:solidFill>
                   <a:srgbClr val="97BC62"/>
                 </a:solidFill>
                 <a:latin typeface="Calibri"/>
               </a:rPr>
-              <a:t>–  </a:t>
-            </a:r>
-            <a:r>
-              <a:rPr sz="2200" b="0" i="0">
+              <a:t>3   </a:t>
+            </a:r>
+            <a:r>
+              <a:rPr sz="2400" b="0" i="0" dirty="0">
                 <a:solidFill>
                   <a:srgbClr val="222B22"/>
                 </a:solidFill>
                 <a:latin typeface="Calibri"/>
               </a:rPr>
-              <a:t>Or one thing about the practice itself — “I forgot it three days running” is a real answer</a:t>
-            </a:r>
-          </a:p>
-          <a:p>
-            <a:pPr marL="274320" indent="-274320">
+              <a:t>Stand in a circle</a:t>
+            </a:r>
+          </a:p>
+          <a:p>
+            <a:pPr marL="342900" indent="-342900">
               <a:spcAft>
-                <a:spcPts val="900"/>
+                <a:spcPts val="750"/>
               </a:spcAft>
             </a:pPr>
             <a:r>
-              <a:rPr sz="2200" b="1" i="0">
+              <a:rPr sz="2400" b="1" i="0" dirty="0">
                 <a:solidFill>
                   <a:srgbClr val="97BC62"/>
                 </a:solidFill>
                 <a:latin typeface="Calibri"/>
               </a:rPr>
-              <a:t>•  </a:t>
-            </a:r>
-            <a:r>
-              <a:rPr sz="2200" b="0" i="0">
+              <a:t>4   </a:t>
+            </a:r>
+            <a:r>
+              <a:rPr sz="2400" b="0" i="0" dirty="0">
                 <a:solidFill>
                   <a:srgbClr val="222B22"/>
                 </a:solidFill>
                 <a:latin typeface="Calibri"/>
               </a:rPr>
-              <a:t>No grades, no lectures — honesty over performance</a:t>
-            </a:r>
-          </a:p>
-          <a:p>
-            <a:pPr marL="274320" indent="-274320">
+              <a:t>One-word check-in — how you actually are, right now</a:t>
+            </a:r>
+          </a:p>
+          <a:p>
+            <a:pPr marL="342900" indent="-342900">
               <a:spcAft>
-                <a:spcPts val="900"/>
+                <a:spcPts val="750"/>
               </a:spcAft>
             </a:pPr>
             <a:r>
-              <a:rPr sz="2200" b="1" i="0">
+              <a:rPr sz="2400" b="1" i="0" dirty="0">
                 <a:solidFill>
                   <a:srgbClr val="97BC62"/>
                 </a:solidFill>
                 <a:latin typeface="Calibri"/>
               </a:rPr>
-              <a:t>•  </a:t>
-            </a:r>
-            <a:r>
-              <a:rPr sz="2200" b="0" i="0">
+              <a:t>5   </a:t>
+            </a:r>
+            <a:r>
+              <a:rPr sz="2400" b="0" i="0" dirty="0">
                 <a:solidFill>
                   <a:srgbClr val="222B22"/>
                 </a:solidFill>
                 <a:latin typeface="Calibri"/>
               </a:rPr>
-              <a:t>Missed it? “Thanks for the honesty. Pick it back up tomorrow.”</a:t>
+              <a:t>Put out / bring in — set something down; bring a blessing in</a:t>
+            </a:r>
+          </a:p>
+          <a:p>
+            <a:pPr marL="342900" indent="-342900">
+              <a:spcAft>
+                <a:spcPts val="750"/>
+              </a:spcAft>
+            </a:pPr>
+            <a:r>
+              <a:rPr sz="2400" b="1" i="0" dirty="0">
+                <a:solidFill>
+                  <a:srgbClr val="97BC62"/>
+                </a:solidFill>
+                <a:latin typeface="Calibri"/>
+              </a:rPr>
+              <a:t>6   </a:t>
+            </a:r>
+            <a:r>
+              <a:rPr sz="2400" b="0" i="0" dirty="0">
+                <a:solidFill>
+                  <a:srgbClr val="222B22"/>
+                </a:solidFill>
+                <a:latin typeface="Calibri"/>
+              </a:rPr>
+              <a:t>Spoken commitment: “I am here. I am paying attention. I am willing to be moved.”</a:t>
+            </a:r>
+          </a:p>
+          <a:p>
+            <a:pPr marL="342900" indent="-342900">
+              <a:spcAft>
+                <a:spcPts val="750"/>
+              </a:spcAft>
+            </a:pPr>
+            <a:r>
+              <a:rPr sz="2400" b="1" i="0" dirty="0">
+                <a:solidFill>
+                  <a:srgbClr val="97BC62"/>
+                </a:solidFill>
+                <a:latin typeface="Calibri"/>
+              </a:rPr>
+              <a:t>7   </a:t>
+            </a:r>
+            <a:r>
+              <a:rPr sz="2400" b="0" i="0" dirty="0">
+                <a:solidFill>
+                  <a:srgbClr val="222B22"/>
+                </a:solidFill>
+                <a:latin typeface="Calibri"/>
+              </a:rPr>
+              <a:t>Opening prayer — “Holy Spirit, you are welcome here. Speak. We are listening.”</a:t>
+            </a:r>
+          </a:p>
+          <a:p>
+            <a:pPr marL="342900" indent="-342900">
+              <a:spcAft>
+                <a:spcPts val="750"/>
+              </a:spcAft>
+            </a:pPr>
+            <a:r>
+              <a:rPr sz="2400" b="1" i="0" dirty="0">
+                <a:solidFill>
+                  <a:srgbClr val="97BC62"/>
+                </a:solidFill>
+                <a:latin typeface="Calibri"/>
+              </a:rPr>
+              <a:t>8   </a:t>
+            </a:r>
+            <a:r>
+              <a:rPr sz="2400" b="0" i="0" dirty="0">
+                <a:solidFill>
+                  <a:srgbClr val="222B22"/>
+                </a:solidFill>
+                <a:latin typeface="Calibri"/>
+              </a:rPr>
+              <a:t>Sit. Begin.</a:t>
             </a:r>
           </a:p>
         </p:txBody>
@@ -8279,7 +8383,7 @@
           <a:p>
             <a:pPr algn="r"/>
             <a:r>
-              <a:t>24</a:t>
+              <a:t>23</a:t>
             </a:r>
             <a:endParaRPr sz="1000" b="1">
               <a:solidFill>
@@ -8287,89 +8391,6 @@
               </a:solidFill>
               <a:latin typeface="Calibri"/>
             </a:endParaRPr>
-          </a:p>
-        </p:txBody>
-      </p:sp>
-      <p:pic>
-        <p:nvPicPr>
-          <p:cNvPr id="32" name="Picture 32" descr="trail cairn - the weekly check-in"/>
-          <p:cNvPicPr>
-            <a:picLocks noChangeAspect="1"/>
-          </p:cNvPicPr>
-          <p:nvPr/>
-        </p:nvPicPr>
-        <p:blipFill>
-          <a:blip r:embed="rId3"/>
-          <a:stretch>
-            <a:fillRect/>
-          </a:stretch>
-        </p:blipFill>
-        <p:spPr>
-          <a:xfrm>
-            <a:off x="8103612" y="1463040"/>
-            <a:ext cx="3262379" cy="4892040"/>
-          </a:xfrm>
-          <a:prstGeom prst="rect">
-            <a:avLst/>
-          </a:prstGeom>
-          <a:ln w="76200">
-            <a:solidFill>
-              <a:srgbClr val="FFFFFF"/>
-            </a:solidFill>
-          </a:ln>
-          <a:effectLst>
-            <a:outerShdw blurRad="63500" dist="25400" dir="5400000" rotWithShape="0">
-              <a:srgbClr val="000000">
-                <a:alpha val="35000"/>
-              </a:srgbClr>
-            </a:outerShdw>
-          </a:effectLst>
-        </p:spPr>
-      </p:pic>
-      <p:sp>
-        <p:nvSpPr>
-          <p:cNvPr id="91" name="JoshuaCard"/>
-          <p:cNvSpPr txBox="1"/>
-          <p:nvPr/>
-        </p:nvSpPr>
-        <p:spPr>
-          <a:xfrm>
-            <a:off x="822960" y="5230368"/>
-            <a:ext cx="6675120" cy="1078992"/>
-          </a:xfrm>
-          <a:prstGeom prst="rect">
-            <a:avLst/>
-          </a:prstGeom>
-          <a:solidFill>
-            <a:srgbClr val="F1F6EC"/>
-          </a:solidFill>
-        </p:spPr>
-        <p:txBody>
-          <a:bodyPr wrap="square" lIns="137160" tIns="73152" rIns="137160" bIns="73152" anchor="ctr"/>
-          <a:lstStyle/>
-          <a:p>
-            <a:pPr algn="l"/>
-            <a:r>
-              <a:rPr lang="en-US" sz="2400" i="1">
-                <a:solidFill>
-                  <a:srgbClr val="222B22"/>
-                </a:solidFill>
-                <a:latin typeface="Cambria"/>
-              </a:rPr>
-              <a:t>“When your children ask their fathers in times to come, ‘What do these stones mean?’”</a:t>
-            </a:r>
-          </a:p>
-          <a:p>
-            <a:pPr algn="l"/>
-            <a:r>
-              <a:rPr lang="en-US" sz="1100" b="1">
-                <a:solidFill>
-                  <a:srgbClr val="97BC62"/>
-                </a:solidFill>
-                <a:latin typeface="Calibri"/>
-              </a:rPr>
-              <a:t>— JOSHUA 4:21 (ESV)</a:t>
-            </a:r>
           </a:p>
         </p:txBody>
       </p:sp>
@@ -8461,14 +8482,193 @@
                 </a:solidFill>
                 <a:latin typeface="Cambria"/>
               </a:rPr>
-              <a:t>Teaching — Mark 4 and the Four Soils</a:t>
-            </a:r>
+              <a:t>Check-In on Week 1 Practice</a:t>
+            </a:r>
+          </a:p>
+        </p:txBody>
+      </p:sp>
+      <p:sp>
+        <p:nvSpPr>
+          <p:cNvPr id="4" name="TextBox 4"/>
+          <p:cNvSpPr txBox="1"/>
+          <p:nvPr/>
+        </p:nvSpPr>
+        <p:spPr>
+          <a:xfrm>
+            <a:off x="822960" y="1554480"/>
+            <a:ext cx="6675120" cy="4754880"/>
+          </a:xfrm>
+          <a:prstGeom prst="rect">
+            <a:avLst/>
+          </a:prstGeom>
+          <a:noFill/>
+        </p:spPr>
+        <p:txBody>
+          <a:bodyPr wrap="square" lIns="91440" tIns="91440" rIns="91440" bIns="91440"/>
+          <a:lstStyle/>
+          <a:p>
+            <a:pPr marL="274320" indent="-274320">
+              <a:spcAft>
+                <a:spcPts val="900"/>
+              </a:spcAft>
+            </a:pPr>
+            <a:r>
+              <a:rPr sz="2200" b="1" i="0">
+                <a:solidFill>
+                  <a:srgbClr val="97BC62"/>
+                </a:solidFill>
+                <a:latin typeface="Calibri"/>
+              </a:rPr>
+              <a:t>•  </a:t>
+            </a:r>
+            <a:r>
+              <a:rPr sz="2200" b="0" i="0">
+                <a:solidFill>
+                  <a:srgbClr val="222B22"/>
+                </a:solidFill>
+                <a:latin typeface="Calibri"/>
+              </a:rPr>
+              <a:t>One quick round, one sentence each — a parent starts</a:t>
+            </a:r>
+          </a:p>
+          <a:p>
+            <a:pPr marL="685800" indent="-274320">
+              <a:spcAft>
+                <a:spcPts val="700"/>
+              </a:spcAft>
+            </a:pPr>
+            <a:r>
+              <a:rPr sz="2200" b="1" i="0">
+                <a:solidFill>
+                  <a:srgbClr val="97BC62"/>
+                </a:solidFill>
+                <a:latin typeface="Calibri"/>
+              </a:rPr>
+              <a:t>–  </a:t>
+            </a:r>
+            <a:r>
+              <a:rPr sz="2200" b="0" i="1">
+                <a:solidFill>
+                  <a:srgbClr val="222B22"/>
+                </a:solidFill>
+                <a:latin typeface="Calibri"/>
+              </a:rPr>
+              <a:t>“One thing I noticed this week when I asked the morning question …”</a:t>
+            </a:r>
+          </a:p>
+          <a:p>
+            <a:pPr marL="685800" indent="-274320">
+              <a:spcAft>
+                <a:spcPts val="700"/>
+              </a:spcAft>
+            </a:pPr>
+            <a:r>
+              <a:rPr sz="2200" b="1" i="0">
+                <a:solidFill>
+                  <a:srgbClr val="97BC62"/>
+                </a:solidFill>
+                <a:latin typeface="Calibri"/>
+              </a:rPr>
+              <a:t>–  </a:t>
+            </a:r>
+            <a:r>
+              <a:rPr sz="2200" b="0" i="0">
+                <a:solidFill>
+                  <a:srgbClr val="222B22"/>
+                </a:solidFill>
+                <a:latin typeface="Calibri"/>
+              </a:rPr>
+              <a:t>Or one thing about the practice itself — “I forgot it three days running” is a real answer</a:t>
+            </a:r>
+          </a:p>
+          <a:p>
+            <a:pPr marL="274320" indent="-274320">
+              <a:spcAft>
+                <a:spcPts val="900"/>
+              </a:spcAft>
+            </a:pPr>
+            <a:r>
+              <a:rPr sz="2200" b="1" i="0">
+                <a:solidFill>
+                  <a:srgbClr val="97BC62"/>
+                </a:solidFill>
+                <a:latin typeface="Calibri"/>
+              </a:rPr>
+              <a:t>•  </a:t>
+            </a:r>
+            <a:r>
+              <a:rPr sz="2200" b="0" i="0">
+                <a:solidFill>
+                  <a:srgbClr val="222B22"/>
+                </a:solidFill>
+                <a:latin typeface="Calibri"/>
+              </a:rPr>
+              <a:t>No grades, no lectures — honesty over performance</a:t>
+            </a:r>
+          </a:p>
+          <a:p>
+            <a:pPr marL="274320" indent="-274320">
+              <a:spcAft>
+                <a:spcPts val="900"/>
+              </a:spcAft>
+            </a:pPr>
+            <a:r>
+              <a:rPr sz="2200" b="1" i="0">
+                <a:solidFill>
+                  <a:srgbClr val="97BC62"/>
+                </a:solidFill>
+                <a:latin typeface="Calibri"/>
+              </a:rPr>
+              <a:t>•  </a:t>
+            </a:r>
+            <a:r>
+              <a:rPr sz="2200" b="0" i="0">
+                <a:solidFill>
+                  <a:srgbClr val="222B22"/>
+                </a:solidFill>
+                <a:latin typeface="Calibri"/>
+              </a:rPr>
+              <a:t>Missed it? “Thanks for the honesty. Pick it back up tomorrow.”</a:t>
+            </a:r>
+          </a:p>
+        </p:txBody>
+      </p:sp>
+      <p:sp>
+        <p:nvSpPr>
+          <p:cNvPr id="90" name="SlideNum"/>
+          <p:cNvSpPr txBox="1"/>
+          <p:nvPr/>
+        </p:nvSpPr>
+        <p:spPr>
+          <a:xfrm>
+            <a:off x="11384280" y="6446520"/>
+            <a:ext cx="640080" cy="292608"/>
+          </a:xfrm>
+          <a:prstGeom prst="rect">
+            <a:avLst/>
+          </a:prstGeom>
+          <a:noFill/>
+        </p:spPr>
+        <p:txBody>
+          <a:bodyPr wrap="none" lIns="0" tIns="0" rIns="45720" bIns="0" anchor="ctr"/>
+          <a:lstStyle/>
+          <a:p>
+            <a:pPr algn="r"/>
+            <a:r>
+              <a:t>24</a:t>
+            </a:r>
+            <a:endParaRPr sz="1000" b="1">
+              <a:solidFill>
+                <a:srgbClr val="7A8A6E"/>
+              </a:solidFill>
+              <a:latin typeface="Calibri"/>
+            </a:endParaRPr>
           </a:p>
         </p:txBody>
       </p:sp>
       <p:pic>
         <p:nvPicPr>
-          <p:cNvPr id="5" name="Picture 4" descr="four soils diagram"/>
+          <p:cNvPr id="32" name="Picture 32" descr="trail cairn - the weekly check-in"/>
           <p:cNvPicPr>
             <a:picLocks noChangeAspect="1"/>
           </p:cNvPicPr>
@@ -8482,8 +8682,8 @@
         </p:blipFill>
         <p:spPr>
           <a:xfrm>
-            <a:off x="822960" y="1737360"/>
-            <a:ext cx="10515600" cy="3771900"/>
+            <a:off x="8103612" y="1463040"/>
+            <a:ext cx="3262379" cy="4892040"/>
           </a:xfrm>
           <a:prstGeom prst="rect">
             <a:avLst/>
@@ -8504,80 +8704,48 @@
       </p:pic>
       <p:sp>
         <p:nvSpPr>
-          <p:cNvPr id="4" name="TextBox 4"/>
+          <p:cNvPr id="91" name="JoshuaCard"/>
           <p:cNvSpPr txBox="1"/>
           <p:nvPr/>
         </p:nvSpPr>
         <p:spPr>
           <a:xfrm>
-            <a:off x="822960" y="5623560"/>
-            <a:ext cx="10515600" cy="640080"/>
+            <a:off x="822960" y="5230368"/>
+            <a:ext cx="6675120" cy="1078992"/>
           </a:xfrm>
           <a:prstGeom prst="rect">
             <a:avLst/>
           </a:prstGeom>
-          <a:noFill/>
-        </p:spPr>
-        <p:txBody>
-          <a:bodyPr wrap="square" lIns="91440" tIns="91440" rIns="91440" bIns="91440"/>
-          <a:lstStyle/>
-          <a:p>
-            <a:pPr>
-              <a:spcAft>
-                <a:spcPts val="900"/>
-              </a:spcAft>
-            </a:pPr>
-            <a:r>
-              <a:rPr sz="1800" b="0" i="0">
+          <a:solidFill>
+            <a:srgbClr val="F1F6EC"/>
+          </a:solidFill>
+        </p:spPr>
+        <p:txBody>
+          <a:bodyPr wrap="square" lIns="137160" tIns="73152" rIns="137160" bIns="73152" anchor="ctr"/>
+          <a:lstStyle/>
+          <a:p>
+            <a:pPr algn="l"/>
+            <a:r>
+              <a:rPr lang="en-US" sz="2400" i="1">
                 <a:solidFill>
                   <a:srgbClr val="222B22"/>
                 </a:solidFill>
-                <a:latin typeface="Calibri"/>
-              </a:rPr>
-              <a:t>Read Mark 4:1–20 in full, slowly — all twenty verses, no commentary. </a:t>
-            </a:r>
-            <a:r>
-              <a:rPr sz="1800" b="1" i="0">
-                <a:solidFill>
-                  <a:srgbClr val="222B22"/>
-                </a:solidFill>
-                <a:latin typeface="Calibri"/>
-              </a:rPr>
-              <a:t>Then the seed, recalled — sixty seconds. Then the four soils — and Paul’s mixed ground, next slide.</a:t>
-            </a:r>
-          </a:p>
-        </p:txBody>
-      </p:sp>
-      <p:sp>
-        <p:nvSpPr>
-          <p:cNvPr id="90" name="SlideNum"/>
-          <p:cNvSpPr txBox="1"/>
-          <p:nvPr/>
-        </p:nvSpPr>
-        <p:spPr>
-          <a:xfrm>
-            <a:off x="11384280" y="6446520"/>
-            <a:ext cx="640080" cy="292608"/>
-          </a:xfrm>
-          <a:prstGeom prst="rect">
-            <a:avLst/>
-          </a:prstGeom>
-          <a:noFill/>
-        </p:spPr>
-        <p:txBody>
-          <a:bodyPr wrap="none" lIns="0" tIns="0" rIns="45720" bIns="0" anchor="ctr"/>
-          <a:lstStyle/>
-          <a:p>
-            <a:pPr algn="r"/>
-            <a:r>
-              <a:t>25</a:t>
-            </a:r>
-            <a:endParaRPr sz="1000" b="1">
-              <a:solidFill>
-                <a:srgbClr val="7A8A6E"/>
-              </a:solidFill>
-              <a:latin typeface="Calibri"/>
-            </a:endParaRPr>
+                <a:latin typeface="Cambria"/>
+              </a:rPr>
+              <a:t>“When your children ask their fathers in times to come, ‘What do these stones mean?’”</a:t>
+            </a:r>
+          </a:p>
+          <a:p>
+            <a:pPr algn="l"/>
+            <a:r>
+              <a:rPr lang="en-US" sz="1100" b="1">
+                <a:solidFill>
+                  <a:srgbClr val="97BC62"/>
+                </a:solidFill>
+                <a:latin typeface="Calibri"/>
+              </a:rPr>
+              <a:t>— JOSHUA 4:21 (ESV)</a:t>
+            </a:r>
           </a:p>
         </p:txBody>
       </p:sp>
@@ -8669,21 +8837,57 @@
                 </a:solidFill>
                 <a:latin typeface="Cambria"/>
               </a:rPr>
-              <a:t>Paul’s Mixed Ground — Romans 7</a:t>
-            </a:r>
-          </a:p>
-        </p:txBody>
-      </p:sp>
-      <p:sp>
-        <p:nvSpPr>
-          <p:cNvPr id="90" name="SlideNum"/>
+              <a:t>Teaching — Mark 4 and the Four Soils</a:t>
+            </a:r>
+          </a:p>
+        </p:txBody>
+      </p:sp>
+      <p:pic>
+        <p:nvPicPr>
+          <p:cNvPr id="5" name="Picture 4" descr="four soils diagram"/>
+          <p:cNvPicPr>
+            <a:picLocks noChangeAspect="1"/>
+          </p:cNvPicPr>
+          <p:nvPr/>
+        </p:nvPicPr>
+        <p:blipFill>
+          <a:blip r:embed="rId3"/>
+          <a:stretch>
+            <a:fillRect/>
+          </a:stretch>
+        </p:blipFill>
+        <p:spPr>
+          <a:xfrm>
+            <a:off x="822960" y="1737360"/>
+            <a:ext cx="10515600" cy="3771900"/>
+          </a:xfrm>
+          <a:prstGeom prst="rect">
+            <a:avLst/>
+          </a:prstGeom>
+          <a:ln w="76200">
+            <a:solidFill>
+              <a:srgbClr val="FFFFFF"/>
+            </a:solidFill>
+          </a:ln>
+          <a:effectLst>
+            <a:outerShdw blurRad="63500" dist="25400" dir="5400000" rotWithShape="0">
+              <a:srgbClr val="000000">
+                <a:alpha val="35000"/>
+              </a:srgbClr>
+            </a:outerShdw>
+          </a:effectLst>
+        </p:spPr>
+      </p:pic>
+      <p:sp>
+        <p:nvSpPr>
+          <p:cNvPr id="4" name="TextBox 4"/>
           <p:cNvSpPr txBox="1"/>
           <p:nvPr/>
         </p:nvSpPr>
         <p:spPr>
           <a:xfrm>
-            <a:off x="11384280" y="6446520"/>
-            <a:ext cx="640080" cy="292608"/>
+            <a:off x="822960" y="5623560"/>
+            <a:ext cx="10515600" cy="640080"/>
           </a:xfrm>
           <a:prstGeom prst="rect">
             <a:avLst/>
@@ -8691,12 +8895,58 @@
           <a:noFill/>
         </p:spPr>
         <p:txBody>
+          <a:bodyPr wrap="square" lIns="91440" tIns="91440" rIns="91440" bIns="91440"/>
+          <a:lstStyle/>
+          <a:p>
+            <a:pPr>
+              <a:spcAft>
+                <a:spcPts val="900"/>
+              </a:spcAft>
+            </a:pPr>
+            <a:r>
+              <a:rPr sz="1800" b="0" i="0">
+                <a:solidFill>
+                  <a:srgbClr val="222B22"/>
+                </a:solidFill>
+                <a:latin typeface="Calibri"/>
+              </a:rPr>
+              <a:t>Read Mark 4:1–20 in full, slowly — all twenty verses, no commentary. </a:t>
+            </a:r>
+            <a:r>
+              <a:rPr sz="1800" b="1" i="0">
+                <a:solidFill>
+                  <a:srgbClr val="222B22"/>
+                </a:solidFill>
+                <a:latin typeface="Calibri"/>
+              </a:rPr>
+              <a:t>Then the seed, recalled — sixty seconds. Then the four soils — and Paul’s mixed ground, next slide.</a:t>
+            </a:r>
+          </a:p>
+        </p:txBody>
+      </p:sp>
+      <p:sp>
+        <p:nvSpPr>
+          <p:cNvPr id="90" name="SlideNum"/>
+          <p:cNvSpPr txBox="1"/>
+          <p:nvPr/>
+        </p:nvSpPr>
+        <p:spPr>
+          <a:xfrm>
+            <a:off x="11384280" y="6446520"/>
+            <a:ext cx="640080" cy="292608"/>
+          </a:xfrm>
+          <a:prstGeom prst="rect">
+            <a:avLst/>
+          </a:prstGeom>
+          <a:noFill/>
+        </p:spPr>
+        <p:txBody>
           <a:bodyPr wrap="none" lIns="0" tIns="0" rIns="45720" bIns="0" anchor="ctr"/>
           <a:lstStyle/>
           <a:p>
             <a:pPr algn="r"/>
             <a:r>
-              <a:t>26</a:t>
+              <a:t>25</a:t>
             </a:r>
             <a:endParaRPr sz="1000" b="1">
               <a:solidFill>
@@ -8704,149 +8954,6 @@
               </a:solidFill>
               <a:latin typeface="Calibri"/>
             </a:endParaRPr>
-          </a:p>
-        </p:txBody>
-      </p:sp>
-      <p:sp>
-        <p:nvSpPr>
-          <p:cNvPr id="260" name="StruggleCard"/>
-          <p:cNvSpPr txBox="1"/>
-          <p:nvPr/>
-        </p:nvSpPr>
-        <p:spPr>
-          <a:xfrm>
-            <a:off x="822960" y="1508760"/>
-            <a:ext cx="6035040" cy="3108960"/>
-          </a:xfrm>
-          <a:prstGeom prst="rect">
-            <a:avLst/>
-          </a:prstGeom>
-          <a:solidFill>
-            <a:srgbClr val="F1F6EC"/>
-          </a:solidFill>
-        </p:spPr>
-        <p:txBody>
-          <a:bodyPr wrap="square" lIns="137160" tIns="91440" rIns="137160" bIns="91440" anchor="ctr"/>
-          <a:lstStyle/>
-          <a:p>
-            <a:pPr>
-              <a:spcAft>
-                <a:spcPts val="800"/>
-              </a:spcAft>
-            </a:pPr>
-            <a:r>
-              <a:rPr sz="1200" b="1" i="0" dirty="0">
-                <a:solidFill>
-                  <a:srgbClr val="97BC62"/>
-                </a:solidFill>
-                <a:latin typeface="Calibri"/>
-              </a:rPr>
-              <a:t>ROMANS 7:15, 18–19</a:t>
-            </a:r>
-          </a:p>
-          <a:p>
-            <a:pPr>
-              <a:spcAft>
-                <a:spcPts val="400"/>
-              </a:spcAft>
-            </a:pPr>
-            <a:r>
-              <a:rPr sz="2400" b="0" i="1" dirty="0">
-                <a:solidFill>
-                  <a:srgbClr val="222B22"/>
-                </a:solidFill>
-                <a:latin typeface="Cambria"/>
-              </a:rPr>
-              <a:t>“For I do not understand my own actions. For I do not do what I want, but I do the very thing I hate… For I have the desire to do what is right, but not the ability to carry it out. For I do not do the good I want, but the evil I do not want is what I keep on doing.”</a:t>
-            </a:r>
-          </a:p>
-        </p:txBody>
-      </p:sp>
-      <p:sp>
-        <p:nvSpPr>
-          <p:cNvPr id="261" name="RescueCard"/>
-          <p:cNvSpPr txBox="1"/>
-          <p:nvPr/>
-        </p:nvSpPr>
-        <p:spPr>
-          <a:xfrm>
-            <a:off x="7132320" y="1508760"/>
-            <a:ext cx="4206240" cy="3108960"/>
-          </a:xfrm>
-          <a:prstGeom prst="rect">
-            <a:avLst/>
-          </a:prstGeom>
-          <a:solidFill>
-            <a:srgbClr val="F1F6EC"/>
-          </a:solidFill>
-        </p:spPr>
-        <p:txBody>
-          <a:bodyPr wrap="square" lIns="137160" tIns="91440" rIns="137160" bIns="91440" anchor="ctr"/>
-          <a:lstStyle/>
-          <a:p>
-            <a:pPr>
-              <a:spcAft>
-                <a:spcPts val="800"/>
-              </a:spcAft>
-            </a:pPr>
-            <a:r>
-              <a:rPr sz="1200" b="1" i="0" dirty="0">
-                <a:solidFill>
-                  <a:srgbClr val="97BC62"/>
-                </a:solidFill>
-                <a:latin typeface="Calibri"/>
-              </a:rPr>
-              <a:t>ROMANS 7:24–25</a:t>
-            </a:r>
-          </a:p>
-          <a:p>
-            <a:pPr>
-              <a:spcAft>
-                <a:spcPts val="400"/>
-              </a:spcAft>
-            </a:pPr>
-            <a:r>
-              <a:rPr sz="2400" b="0" i="1" dirty="0">
-                <a:solidFill>
-                  <a:srgbClr val="222B22"/>
-                </a:solidFill>
-                <a:latin typeface="Cambria"/>
-              </a:rPr>
-              <a:t>“Wretched man that I am! Who will deliver me from this body of death? Thanks be to God through Jesus Christ our Lord!”</a:t>
-            </a:r>
-          </a:p>
-        </p:txBody>
-      </p:sp>
-      <p:sp>
-        <p:nvSpPr>
-          <p:cNvPr id="262" name="Landing"/>
-          <p:cNvSpPr txBox="1"/>
-          <p:nvPr/>
-        </p:nvSpPr>
-        <p:spPr>
-          <a:xfrm>
-            <a:off x="822960" y="5029200"/>
-            <a:ext cx="10515600" cy="1005840"/>
-          </a:xfrm>
-          <a:prstGeom prst="rect">
-            <a:avLst/>
-          </a:prstGeom>
-          <a:noFill/>
-        </p:spPr>
-        <p:txBody>
-          <a:bodyPr wrap="square"/>
-          <a:lstStyle/>
-          <a:p>
-            <a:pPr algn="l"/>
-            <a:r>
-              <a:rPr sz="2800" b="0" i="1" dirty="0">
-                <a:solidFill>
-                  <a:srgbClr val="222B22"/>
-                </a:solidFill>
-                <a:latin typeface="Calibri"/>
-              </a:rPr>
-              <a:t>Mixed soil, in the mouth of an apostle — and he lands on rescue, not despair. All four soils in one honest week is not failure. It is apostolic company.</a:t>
-            </a:r>
           </a:p>
         </p:txBody>
       </p:sp>
@@ -8938,7 +9045,7 @@
                 </a:solidFill>
                 <a:latin typeface="Cambria"/>
               </a:rPr>
-              <a:t>Question Zero — Private, Journal Only</a:t>
+              <a:t>Paul’s Mixed Ground — Romans 7</a:t>
             </a:r>
           </a:p>
         </p:txBody>
@@ -8965,7 +9072,7 @@
           <a:p>
             <a:pPr algn="r"/>
             <a:r>
-              <a:t>27</a:t>
+              <a:t>26</a:t>
             </a:r>
             <a:endParaRPr sz="1000" b="1">
               <a:solidFill>
@@ -8978,14 +9085,14 @@
       </p:sp>
       <p:sp>
         <p:nvSpPr>
-          <p:cNvPr id="240" name="CorCard"/>
+          <p:cNvPr id="260" name="StruggleCard"/>
           <p:cNvSpPr txBox="1"/>
           <p:nvPr/>
         </p:nvSpPr>
         <p:spPr>
           <a:xfrm>
-            <a:off x="822960" y="1417320"/>
-            <a:ext cx="10515600" cy="1325880"/>
+            <a:off x="822960" y="1508760"/>
+            <a:ext cx="6035040" cy="3108960"/>
           </a:xfrm>
           <a:prstGeom prst="rect">
             <a:avLst/>
@@ -9004,13 +9111,13 @@
               </a:spcAft>
             </a:pPr>
             <a:r>
-              <a:rPr sz="1200" b="1" i="0">
+              <a:rPr sz="1200" b="1" i="0" dirty="0">
                 <a:solidFill>
                   <a:srgbClr val="97BC62"/>
                 </a:solidFill>
                 <a:latin typeface="Calibri"/>
               </a:rPr>
-              <a:t>2 CORINTHIANS 13:5</a:t>
+              <a:t>ROMANS 7:15, 18–19</a:t>
             </a:r>
           </a:p>
           <a:p>
@@ -9020,27 +9127,82 @@
               </a:spcAft>
             </a:pPr>
             <a:r>
-              <a:rPr sz="2400" b="0" i="1">
+              <a:rPr sz="2400" b="0" i="1" dirty="0">
                 <a:solidFill>
                   <a:srgbClr val="222B22"/>
                 </a:solidFill>
                 <a:latin typeface="Cambria"/>
               </a:rPr>
-              <a:t>“Examine yourselves, to see whether you are in the faith. Test yourselves.”</a:t>
-            </a:r>
-          </a:p>
-        </p:txBody>
-      </p:sp>
-      <p:sp>
-        <p:nvSpPr>
-          <p:cNvPr id="241" name="QzQuestion"/>
+              <a:t>“For I do not understand my own actions. For I do not do what I want, but I do the very thing I hate… For I have the desire to do what is right, but not the ability to carry it out. For I do not do the good I want, but the evil I do not want is what I keep on doing.”</a:t>
+            </a:r>
+          </a:p>
+        </p:txBody>
+      </p:sp>
+      <p:sp>
+        <p:nvSpPr>
+          <p:cNvPr id="261" name="RescueCard"/>
           <p:cNvSpPr txBox="1"/>
           <p:nvPr/>
         </p:nvSpPr>
         <p:spPr>
           <a:xfrm>
-            <a:off x="822960" y="3063240"/>
-            <a:ext cx="10515600" cy="1417320"/>
+            <a:off x="7132320" y="1508760"/>
+            <a:ext cx="4206240" cy="3108960"/>
+          </a:xfrm>
+          <a:prstGeom prst="rect">
+            <a:avLst/>
+          </a:prstGeom>
+          <a:solidFill>
+            <a:srgbClr val="F1F6EC"/>
+          </a:solidFill>
+        </p:spPr>
+        <p:txBody>
+          <a:bodyPr wrap="square" lIns="137160" tIns="91440" rIns="137160" bIns="91440" anchor="ctr"/>
+          <a:lstStyle/>
+          <a:p>
+            <a:pPr>
+              <a:spcAft>
+                <a:spcPts val="800"/>
+              </a:spcAft>
+            </a:pPr>
+            <a:r>
+              <a:rPr sz="1200" b="1" i="0" dirty="0">
+                <a:solidFill>
+                  <a:srgbClr val="97BC62"/>
+                </a:solidFill>
+                <a:latin typeface="Calibri"/>
+              </a:rPr>
+              <a:t>ROMANS 7:24–25</a:t>
+            </a:r>
+          </a:p>
+          <a:p>
+            <a:pPr>
+              <a:spcAft>
+                <a:spcPts val="400"/>
+              </a:spcAft>
+            </a:pPr>
+            <a:r>
+              <a:rPr sz="2400" b="0" i="1" dirty="0">
+                <a:solidFill>
+                  <a:srgbClr val="222B22"/>
+                </a:solidFill>
+                <a:latin typeface="Cambria"/>
+              </a:rPr>
+              <a:t>“Wretched man that I am! Who will deliver me from this body of death? Thanks be to God through Jesus Christ our Lord!”</a:t>
+            </a:r>
+          </a:p>
+        </p:txBody>
+      </p:sp>
+      <p:sp>
+        <p:nvSpPr>
+          <p:cNvPr id="262" name="Landing"/>
+          <p:cNvSpPr txBox="1"/>
+          <p:nvPr/>
+        </p:nvSpPr>
+        <p:spPr>
+          <a:xfrm>
+            <a:off x="822960" y="5029200"/>
+            <a:ext cx="10515600" cy="1005840"/>
           </a:xfrm>
           <a:prstGeom prst="rect">
             <a:avLst/>
@@ -9053,88 +9215,13 @@
           <a:p>
             <a:pPr algn="l"/>
             <a:r>
-              <a:rPr sz="2400" b="1" i="0">
+              <a:rPr sz="2800" b="0" i="1" dirty="0">
                 <a:solidFill>
                   <a:srgbClr val="222B22"/>
                 </a:solidFill>
-                <a:latin typeface="Cambria"/>
-              </a:rPr>
-              <a:t>Has the seed itself ever gone into your ground? Has there been a time you actually said yes to Jesus — your yes, not your family’s?</a:t>
-            </a:r>
-          </a:p>
-        </p:txBody>
-      </p:sp>
-      <p:sp>
-        <p:nvSpPr>
-          <p:cNvPr id="242" name="QzSub"/>
-          <p:cNvSpPr txBox="1"/>
-          <p:nvPr/>
-        </p:nvSpPr>
-        <p:spPr>
-          <a:xfrm>
-            <a:off x="479507" y="4389120"/>
-            <a:ext cx="10515600" cy="548640"/>
-          </a:xfrm>
-          <a:prstGeom prst="rect">
-            <a:avLst/>
-          </a:prstGeom>
-          <a:noFill/>
-        </p:spPr>
-        <p:txBody>
-          <a:bodyPr wrap="square"/>
-          <a:lstStyle/>
-          <a:p>
-            <a:pPr algn="ctr"/>
-            <a:r>
-              <a:rPr sz="2400" b="0" i="0" dirty="0">
-                <a:solidFill>
-                  <a:srgbClr val="222B22"/>
-                </a:solidFill>
-                <a:latin typeface="Calibri"/>
-              </a:rPr>
-              <a:t>Write your honest answer — yes, no, or I’m not sure. Nobody shares this one</a:t>
-            </a:r>
-            <a:r>
-              <a:rPr sz="1800" b="0" i="0" dirty="0">
-                <a:solidFill>
-                  <a:srgbClr val="222B22"/>
-                </a:solidFill>
-                <a:latin typeface="Calibri"/>
-              </a:rPr>
-              <a:t>.</a:t>
-            </a:r>
-          </a:p>
-        </p:txBody>
-      </p:sp>
-      <p:sp>
-        <p:nvSpPr>
-          <p:cNvPr id="243" name="QzRoad"/>
-          <p:cNvSpPr txBox="1"/>
-          <p:nvPr/>
-        </p:nvSpPr>
-        <p:spPr>
-          <a:xfrm>
-            <a:off x="822960" y="5349240"/>
-            <a:ext cx="10515600" cy="1005840"/>
-          </a:xfrm>
-          <a:prstGeom prst="rect">
-            <a:avLst/>
-          </a:prstGeom>
-          <a:noFill/>
-        </p:spPr>
-        <p:txBody>
-          <a:bodyPr wrap="square"/>
-          <a:lstStyle/>
-          <a:p>
-            <a:pPr algn="l"/>
-            <a:r>
-              <a:rPr sz="2400" b="0" i="1" dirty="0">
-                <a:solidFill>
-                  <a:srgbClr val="222B22"/>
-                </a:solidFill>
-                <a:latin typeface="Calibri"/>
-              </a:rPr>
-              <a:t>If it’s no, or not sure — the road is short. The thief walked it in one sentence. Any Companion, any Wednesday, quietly — or start with your parent, tonight, in the car.</a:t>
+                <a:latin typeface="Calibri"/>
+              </a:rPr>
+              <a:t>Mixed soil, in the mouth of an apostle — and he lands on rescue, not despair. All four soils in one honest week is not failure. It is apostolic company.</a:t>
             </a:r>
           </a:p>
         </p:txBody>
@@ -9227,21 +9314,21 @@
                 </a:solidFill>
                 <a:latin typeface="Cambria"/>
               </a:rPr>
-              <a:t>pairs — the Heart Soil Diagnostic</a:t>
-            </a:r>
-          </a:p>
-        </p:txBody>
-      </p:sp>
-      <p:sp>
-        <p:nvSpPr>
-          <p:cNvPr id="4" name="TextBox 4"/>
+              <a:t>Question Zero — Private, Journal Only</a:t>
+            </a:r>
+          </a:p>
+        </p:txBody>
+      </p:sp>
+      <p:sp>
+        <p:nvSpPr>
+          <p:cNvPr id="90" name="SlideNum"/>
           <p:cNvSpPr txBox="1"/>
           <p:nvPr/>
         </p:nvSpPr>
         <p:spPr>
           <a:xfrm>
-            <a:off x="822960" y="1508760"/>
-            <a:ext cx="6675120" cy="4937760"/>
+            <a:off x="11384280" y="6446520"/>
+            <a:ext cx="640080" cy="292608"/>
           </a:xfrm>
           <a:prstGeom prst="rect">
             <a:avLst/>
@@ -9249,226 +9336,12 @@
           <a:noFill/>
         </p:spPr>
         <p:txBody>
-          <a:bodyPr wrap="square" lIns="91440" tIns="91440" rIns="91440" bIns="91440"/>
-          <a:lstStyle/>
-          <a:p>
-            <a:pPr marL="274320" indent="-274320">
-              <a:spcAft>
-                <a:spcPts val="800"/>
-              </a:spcAft>
-            </a:pPr>
-            <a:r>
-              <a:rPr sz="2200" b="1" i="0">
-                <a:solidFill>
-                  <a:srgbClr val="97BC62"/>
-                </a:solidFill>
-                <a:latin typeface="Calibri"/>
-              </a:rPr>
-              <a:t>•  </a:t>
-            </a:r>
-            <a:r>
-              <a:rPr sz="2000" b="0" i="0">
-                <a:solidFill>
-                  <a:srgbClr val="222B22"/>
-                </a:solidFill>
-                <a:latin typeface="Calibri"/>
-              </a:rPr>
-              <a:t>Not </a:t>
-            </a:r>
-            <a:r>
-              <a:rPr sz="2000" b="0" i="1">
-                <a:solidFill>
-                  <a:srgbClr val="222B22"/>
-                </a:solidFill>
-                <a:latin typeface="Calibri"/>
-              </a:rPr>
-              <a:t>“which soil am I?”</a:t>
-            </a:r>
-            <a:r>
-              <a:rPr sz="2000" b="0" i="0">
-                <a:solidFill>
-                  <a:srgbClr val="222B22"/>
-                </a:solidFill>
-                <a:latin typeface="Calibri"/>
-              </a:rPr>
-              <a:t> — where does each soil show up in my life right now? Specifically.</a:t>
-            </a:r>
-          </a:p>
-          <a:p>
-            <a:pPr marL="342900" indent="-342900">
-              <a:spcAft>
-                <a:spcPts val="650"/>
-              </a:spcAft>
-            </a:pPr>
-            <a:r>
-              <a:rPr sz="2000" b="1" i="0">
-                <a:solidFill>
-                  <a:srgbClr val="97BC62"/>
-                </a:solidFill>
-                <a:latin typeface="Calibri"/>
-              </a:rPr>
-              <a:t>1   </a:t>
-            </a:r>
-            <a:r>
-              <a:rPr sz="2000" b="0" i="0">
-                <a:solidFill>
-                  <a:srgbClr val="222B22"/>
-                </a:solidFill>
-                <a:latin typeface="Calibri"/>
-              </a:rPr>
-              <a:t>Path — where is the ground hard right now? One specific place, this week</a:t>
-            </a:r>
-          </a:p>
-          <a:p>
-            <a:pPr marL="342900" indent="-342900">
-              <a:spcAft>
-                <a:spcPts val="650"/>
-              </a:spcAft>
-            </a:pPr>
-            <a:r>
-              <a:rPr sz="2000" b="1" i="0">
-                <a:solidFill>
-                  <a:srgbClr val="97BC62"/>
-                </a:solidFill>
-                <a:latin typeface="Calibri"/>
-              </a:rPr>
-              <a:t>2   </a:t>
-            </a:r>
-            <a:r>
-              <a:rPr sz="2000" b="0" i="0">
-                <a:solidFill>
-                  <a:srgbClr val="222B22"/>
-                </a:solidFill>
-                <a:latin typeface="Calibri"/>
-              </a:rPr>
-              <a:t>Rocky — where has a season with God not lasted? What sun revealed the missing roots?</a:t>
-            </a:r>
-          </a:p>
-          <a:p>
-            <a:pPr marL="342900" indent="-342900">
-              <a:spcAft>
-                <a:spcPts val="650"/>
-              </a:spcAft>
-            </a:pPr>
-            <a:r>
-              <a:rPr sz="2000" b="1" i="0">
-                <a:solidFill>
-                  <a:srgbClr val="97BC62"/>
-                </a:solidFill>
-                <a:latin typeface="Calibri"/>
-              </a:rPr>
-              <a:t>3   </a:t>
-            </a:r>
-            <a:r>
-              <a:rPr sz="2000" b="0" i="0">
-                <a:solidFill>
-                  <a:srgbClr val="222B22"/>
-                </a:solidFill>
-                <a:latin typeface="Calibri"/>
-              </a:rPr>
-              <a:t>Thorny — what is choking me right now: cares, riches, other desires? Which is loudest?</a:t>
-            </a:r>
-          </a:p>
-          <a:p>
-            <a:pPr marL="342900" indent="-342900">
-              <a:spcAft>
-                <a:spcPts val="650"/>
-              </a:spcAft>
-            </a:pPr>
-            <a:r>
-              <a:rPr sz="2000" b="1" i="0">
-                <a:solidFill>
-                  <a:srgbClr val="97BC62"/>
-                </a:solidFill>
-                <a:latin typeface="Calibri"/>
-              </a:rPr>
-              <a:t>4   </a:t>
-            </a:r>
-            <a:r>
-              <a:rPr sz="2000" b="0" i="0">
-                <a:solidFill>
-                  <a:srgbClr val="222B22"/>
-                </a:solidFill>
-                <a:latin typeface="Calibri"/>
-              </a:rPr>
-              <a:t>Good — where has something God planted actually grown? Name one real piece of fruit</a:t>
-            </a:r>
-          </a:p>
-          <a:p>
-            <a:pPr marL="274320" indent="-274320">
-              <a:spcAft>
-                <a:spcPts val="650"/>
-              </a:spcAft>
-            </a:pPr>
-            <a:r>
-              <a:rPr sz="2000" b="1" i="0">
-                <a:solidFill>
-                  <a:srgbClr val="97BC62"/>
-                </a:solidFill>
-                <a:latin typeface="Calibri"/>
-              </a:rPr>
-              <a:t>•  </a:t>
-            </a:r>
-            <a:r>
-              <a:rPr sz="2000" b="0" i="0">
-                <a:solidFill>
-                  <a:srgbClr val="222B22"/>
-                </a:solidFill>
-                <a:latin typeface="Calibri"/>
-              </a:rPr>
-              <a:t>Journal two minutes, then share — a parent answers first, every round</a:t>
-            </a:r>
-          </a:p>
-          <a:p>
-            <a:pPr marL="274320" indent="-274320">
-              <a:spcAft>
-                <a:spcPts val="650"/>
-              </a:spcAft>
-            </a:pPr>
-            <a:r>
-              <a:rPr sz="2000" b="1" i="0">
-                <a:solidFill>
-                  <a:srgbClr val="97BC62"/>
-                </a:solidFill>
-                <a:latin typeface="Calibri"/>
-              </a:rPr>
-              <a:t>•  </a:t>
-            </a:r>
-            <a:r>
-              <a:rPr sz="2000" b="0" i="0">
-                <a:solidFill>
-                  <a:srgbClr val="222B22"/>
-                </a:solidFill>
-                <a:latin typeface="Calibri"/>
-              </a:rPr>
-              <a:t>“I’d rather not share that one” is a complete answer — a gift, not ammunition</a:t>
-            </a:r>
-          </a:p>
-        </p:txBody>
-      </p:sp>
-      <p:sp>
-        <p:nvSpPr>
-          <p:cNvPr id="90" name="SlideNum"/>
-          <p:cNvSpPr txBox="1"/>
-          <p:nvPr/>
-        </p:nvSpPr>
-        <p:spPr>
-          <a:xfrm>
-            <a:off x="11384280" y="6446520"/>
-            <a:ext cx="640080" cy="292608"/>
-          </a:xfrm>
-          <a:prstGeom prst="rect">
-            <a:avLst/>
-          </a:prstGeom>
-          <a:noFill/>
-        </p:spPr>
-        <p:txBody>
           <a:bodyPr wrap="none" lIns="0" tIns="0" rIns="45720" bIns="0" anchor="ctr"/>
           <a:lstStyle/>
           <a:p>
             <a:pPr algn="r"/>
             <a:r>
-              <a:t>28</a:t>
+              <a:t>27</a:t>
             </a:r>
             <a:endParaRPr sz="1000" b="1">
               <a:solidFill>
@@ -9479,42 +9352,169 @@
           </a:p>
         </p:txBody>
       </p:sp>
-      <p:pic>
-        <p:nvPicPr>
-          <p:cNvPr id="30" name="Picture 30" descr="hands examining soil and seed"/>
-          <p:cNvPicPr>
-            <a:picLocks noChangeAspect="1"/>
-          </p:cNvPicPr>
+      <p:sp>
+        <p:nvSpPr>
+          <p:cNvPr id="240" name="CorCard"/>
+          <p:cNvSpPr txBox="1"/>
           <p:nvPr/>
-        </p:nvPicPr>
-        <p:blipFill>
-          <a:blip r:embed="rId3"/>
-          <a:stretch>
-            <a:fillRect/>
-          </a:stretch>
-        </p:blipFill>
-        <p:spPr>
-          <a:xfrm>
-            <a:off x="7818120" y="1463040"/>
-            <a:ext cx="3264408" cy="4892040"/>
+        </p:nvSpPr>
+        <p:spPr>
+          <a:xfrm>
+            <a:off x="822960" y="1417320"/>
+            <a:ext cx="10515600" cy="1325880"/>
           </a:xfrm>
           <a:prstGeom prst="rect">
             <a:avLst/>
           </a:prstGeom>
-          <a:ln w="76200">
-            <a:solidFill>
-              <a:srgbClr val="FFFFFF"/>
-            </a:solidFill>
-          </a:ln>
-          <a:effectLst>
-            <a:outerShdw blurRad="63500" dist="25400" dir="5400000" rotWithShape="0">
-              <a:srgbClr val="000000">
-                <a:alpha val="35000"/>
-              </a:srgbClr>
-            </a:outerShdw>
-          </a:effectLst>
-        </p:spPr>
-      </p:pic>
+          <a:solidFill>
+            <a:srgbClr val="F1F6EC"/>
+          </a:solidFill>
+        </p:spPr>
+        <p:txBody>
+          <a:bodyPr wrap="square" lIns="137160" tIns="91440" rIns="137160" bIns="91440" anchor="ctr"/>
+          <a:lstStyle/>
+          <a:p>
+            <a:pPr>
+              <a:spcAft>
+                <a:spcPts val="800"/>
+              </a:spcAft>
+            </a:pPr>
+            <a:r>
+              <a:rPr sz="1200" b="1" i="0">
+                <a:solidFill>
+                  <a:srgbClr val="97BC62"/>
+                </a:solidFill>
+                <a:latin typeface="Calibri"/>
+              </a:rPr>
+              <a:t>2 CORINTHIANS 13:5</a:t>
+            </a:r>
+          </a:p>
+          <a:p>
+            <a:pPr>
+              <a:spcAft>
+                <a:spcPts val="400"/>
+              </a:spcAft>
+            </a:pPr>
+            <a:r>
+              <a:rPr sz="2400" b="0" i="1">
+                <a:solidFill>
+                  <a:srgbClr val="222B22"/>
+                </a:solidFill>
+                <a:latin typeface="Cambria"/>
+              </a:rPr>
+              <a:t>“Examine yourselves, to see whether you are in the faith. Test yourselves.”</a:t>
+            </a:r>
+          </a:p>
+        </p:txBody>
+      </p:sp>
+      <p:sp>
+        <p:nvSpPr>
+          <p:cNvPr id="241" name="QzQuestion"/>
+          <p:cNvSpPr txBox="1"/>
+          <p:nvPr/>
+        </p:nvSpPr>
+        <p:spPr>
+          <a:xfrm>
+            <a:off x="822960" y="3063240"/>
+            <a:ext cx="10515600" cy="1417320"/>
+          </a:xfrm>
+          <a:prstGeom prst="rect">
+            <a:avLst/>
+          </a:prstGeom>
+          <a:noFill/>
+        </p:spPr>
+        <p:txBody>
+          <a:bodyPr wrap="square"/>
+          <a:lstStyle/>
+          <a:p>
+            <a:pPr algn="l"/>
+            <a:r>
+              <a:rPr sz="2400" b="1" i="0">
+                <a:solidFill>
+                  <a:srgbClr val="222B22"/>
+                </a:solidFill>
+                <a:latin typeface="Cambria"/>
+              </a:rPr>
+              <a:t>Has the seed itself ever gone into your ground? Has there been a time you actually said yes to Jesus — your yes, not your family’s?</a:t>
+            </a:r>
+          </a:p>
+        </p:txBody>
+      </p:sp>
+      <p:sp>
+        <p:nvSpPr>
+          <p:cNvPr id="242" name="QzSub"/>
+          <p:cNvSpPr txBox="1"/>
+          <p:nvPr/>
+        </p:nvSpPr>
+        <p:spPr>
+          <a:xfrm>
+            <a:off x="479507" y="4389120"/>
+            <a:ext cx="10515600" cy="548640"/>
+          </a:xfrm>
+          <a:prstGeom prst="rect">
+            <a:avLst/>
+          </a:prstGeom>
+          <a:noFill/>
+        </p:spPr>
+        <p:txBody>
+          <a:bodyPr wrap="square"/>
+          <a:lstStyle/>
+          <a:p>
+            <a:pPr algn="ctr"/>
+            <a:r>
+              <a:rPr sz="2400" b="0" i="0" dirty="0">
+                <a:solidFill>
+                  <a:srgbClr val="222B22"/>
+                </a:solidFill>
+                <a:latin typeface="Calibri"/>
+              </a:rPr>
+              <a:t>Write your honest answer — yes, no, or I’m not sure. Nobody shares this one</a:t>
+            </a:r>
+            <a:r>
+              <a:rPr sz="1800" b="0" i="0" dirty="0">
+                <a:solidFill>
+                  <a:srgbClr val="222B22"/>
+                </a:solidFill>
+                <a:latin typeface="Calibri"/>
+              </a:rPr>
+              <a:t>.</a:t>
+            </a:r>
+          </a:p>
+        </p:txBody>
+      </p:sp>
+      <p:sp>
+        <p:nvSpPr>
+          <p:cNvPr id="243" name="QzRoad"/>
+          <p:cNvSpPr txBox="1"/>
+          <p:nvPr/>
+        </p:nvSpPr>
+        <p:spPr>
+          <a:xfrm>
+            <a:off x="822960" y="5349240"/>
+            <a:ext cx="10515600" cy="1005840"/>
+          </a:xfrm>
+          <a:prstGeom prst="rect">
+            <a:avLst/>
+          </a:prstGeom>
+          <a:noFill/>
+        </p:spPr>
+        <p:txBody>
+          <a:bodyPr wrap="square"/>
+          <a:lstStyle/>
+          <a:p>
+            <a:pPr algn="l"/>
+            <a:r>
+              <a:rPr sz="2400" b="0" i="1" dirty="0">
+                <a:solidFill>
+                  <a:srgbClr val="222B22"/>
+                </a:solidFill>
+                <a:latin typeface="Calibri"/>
+              </a:rPr>
+              <a:t>If it’s no, or not sure — the road is short. The thief walked it in one sentence. Any Companion, any Wednesday, quietly — or start with your parent, tonight, in the car.</a:t>
+            </a:r>
+          </a:p>
+        </p:txBody>
+      </p:sp>
     </p:spTree>
   </p:cSld>
   <p:clrMapOvr>

--- a/_implementation-notes/evening-series/FotH Evening Session 2 Slides DRAFT v1.pptx
+++ b/_implementation-notes/evening-series/FotH Evening Session 2 Slides DRAFT v1.pptx
@@ -7631,7 +7631,7 @@
           <p:nvPr/>
         </p:nvPicPr>
         <p:blipFill>
-          <a:blip r:embed="rId4"/>
+          <a:blip r:embed="rId5"/>
           <a:stretch>
             <a:fillRect/>
           </a:stretch>

--- a/_implementation-notes/evening-series/FotH Evening Session 2 Slides DRAFT v1.pptx
+++ b/_implementation-notes/evening-series/FotH Evening Session 2 Slides DRAFT v1.pptx
@@ -5380,7 +5380,7 @@
           <a:p>
             <a:pPr algn="r"/>
             <a:r>
-              <a:t>28</a:t>
+              <a:t>30</a:t>
             </a:r>
             <a:endParaRPr sz="1000" b="1">
               <a:solidFill>
@@ -5693,7 +5693,7 @@
           <a:p>
             <a:pPr algn="r"/>
             <a:r>
-              <a:t>29</a:t>
+              <a:t>31</a:t>
             </a:r>
             <a:endParaRPr sz="1000" b="1">
               <a:solidFill>
@@ -6019,7 +6019,7 @@
           <a:p>
             <a:pPr algn="r"/>
             <a:r>
-              <a:t>30</a:t>
+              <a:t>32</a:t>
             </a:r>
             <a:endParaRPr sz="1000" b="1">
               <a:solidFill>
@@ -6247,7 +6247,7 @@
           <a:p>
             <a:pPr algn="r"/>
             <a:r>
-              <a:t>31</a:t>
+              <a:t>33</a:t>
             </a:r>
             <a:endParaRPr sz="1000" b="1">
               <a:solidFill>
@@ -6439,7 +6439,7 @@
           <a:p>
             <a:pPr algn="r"/>
             <a:r>
-              <a:t>31a</a:t>
+              <a:t>34</a:t>
             </a:r>
             <a:endParaRPr sz="1000" b="1">
               <a:solidFill>
@@ -6736,7 +6736,7 @@
           <a:p>
             <a:pPr algn="r"/>
             <a:r>
-              <a:t>32</a:t>
+              <a:t>35</a:t>
             </a:r>
             <a:endParaRPr sz="1000" b="1">
               <a:solidFill>
@@ -7181,7 +7181,7 @@
           <a:p>
             <a:pPr algn="r"/>
             <a:r>
-              <a:t>33</a:t>
+              <a:t>36</a:t>
             </a:r>
             <a:endParaRPr sz="1000" b="1">
               <a:solidFill>
@@ -7430,7 +7430,7 @@
           <a:p>
             <a:pPr algn="r"/>
             <a:r>
-              <a:t>21</a:t>
+              <a:t>22</a:t>
             </a:r>
             <a:endParaRPr sz="1000" b="1">
               <a:solidFill>
@@ -7611,7 +7611,7 @@
           <a:p>
             <a:pPr algn="r"/>
             <a:r>
-              <a:t>21a</a:t>
+              <a:t>23</a:t>
             </a:r>
             <a:endParaRPr sz="1000" b="1">
               <a:solidFill>
@@ -8000,7 +8000,7 @@
           <a:p>
             <a:pPr algn="r"/>
             <a:r>
-              <a:t>22</a:t>
+              <a:t>24</a:t>
             </a:r>
             <a:endParaRPr sz="1000" b="1">
               <a:solidFill>
@@ -8383,7 +8383,7 @@
           <a:p>
             <a:pPr algn="r"/>
             <a:r>
-              <a:t>23</a:t>
+              <a:t>25</a:t>
             </a:r>
             <a:endParaRPr sz="1000" b="1">
               <a:solidFill>
@@ -8655,7 +8655,7 @@
           <a:p>
             <a:pPr algn="r"/>
             <a:r>
-              <a:t>24</a:t>
+              <a:t>26</a:t>
             </a:r>
             <a:endParaRPr sz="1000" b="1">
               <a:solidFill>
@@ -8946,7 +8946,7 @@
           <a:p>
             <a:pPr algn="r"/>
             <a:r>
-              <a:t>25</a:t>
+              <a:t>27</a:t>
             </a:r>
             <a:endParaRPr sz="1000" b="1">
               <a:solidFill>
@@ -9072,7 +9072,7 @@
           <a:p>
             <a:pPr algn="r"/>
             <a:r>
-              <a:t>26</a:t>
+              <a:t>28</a:t>
             </a:r>
             <a:endParaRPr sz="1000" b="1">
               <a:solidFill>
@@ -9341,7 +9341,7 @@
           <a:p>
             <a:pPr algn="r"/>
             <a:r>
-              <a:t>27</a:t>
+              <a:t>29</a:t>
             </a:r>
             <a:endParaRPr sz="1000" b="1">
               <a:solidFill>

--- a/_implementation-notes/evening-series/FotH Evening Session 2 Slides DRAFT v1.pptx
+++ b/_implementation-notes/evening-series/FotH Evening Session 2 Slides DRAFT v1.pptx
@@ -7631,7 +7631,7 @@
           <p:nvPr/>
         </p:nvPicPr>
         <p:blipFill>
-          <a:blip r:embed="rId5"/>
+          <a:blip r:embed="rId6"/>
           <a:stretch>
             <a:fillRect/>
           </a:stretch>

--- a/_implementation-notes/evening-series/FotH Evening Session 2 Slides DRAFT v1.pptx
+++ b/_implementation-notes/evening-series/FotH Evening Session 2 Slides DRAFT v1.pptx
@@ -1078,7 +1078,7 @@
           <a:p>
             <a:r>
               <a:rPr lang="en-US" sz="1200"/>
-              <a:t>CUES: pair spaces set before doors open; every leadsanion has done the diagnostic on themselves; the opening parent for each pair is arranged in advance.</a:t>
+              <a:t>CUES: pair spaces set before doors open; every Lead Companion has done the diagnostic on themselves; the opening parent for each pair is arranged in advance.</a:t>
             </a:r>
           </a:p>
         </p:txBody>

--- a/_implementation-notes/evening-series/FotH Evening Session 2 Slides DRAFT v1.pptx
+++ b/_implementation-notes/evening-series/FotH Evening Session 2 Slides DRAFT v1.pptx
@@ -1592,7 +1592,7 @@
           <a:p>
             <a:r>
               <a:rPr lang="en-US" sz="1200"/>
-              <a:t>S2 · 8:11–8:20 · LEAD: CONTENT PRESENTER</a:t>
+              <a:t>S2 · 8:11–8:20 · LEAD: CONTAINER HOLDER</a:t>
             </a:r>
           </a:p>
           <a:p>

--- a/_implementation-notes/evening-series/FotH Evening Session 2 Slides DRAFT v1.pptx
+++ b/_implementation-notes/evening-series/FotH Evening Session 2 Slides DRAFT v1.pptx
@@ -1385,7 +1385,7 @@
           <a:p>
             <a:r>
               <a:rPr lang="en-US" sz="1200"/>
-              <a:t>CUES: Bridge before the 4:40 move: restate the container for the pairs — what your family says today is a gift, not ammunition; it does not come up in the car. Wait for nods from each family before anyone moves.</a:t>
+              <a:t>CUES: Bridge before the 7:40 move: restate the container for the pairs — what your family says today is a gift, not ammunition; it does not come up in the car. Wait for nods from each family before anyone moves.</a:t>
             </a:r>
           </a:p>
         </p:txBody>
@@ -1604,7 +1604,7 @@
           <a:p>
             <a:r>
               <a:rPr lang="en-US" sz="1200"/>
-              <a:t>1. Re-merge starts at 5:09 — three minutes to move; let the circle settle.</a:t>
+              <a:t>1. Re-merge starts at 8:10 — one minute to move; let the circle settle.</a:t>
             </a:r>
           </a:p>
           <a:p>

--- a/_implementation-notes/evening-series/FotH Evening Session 2 Slides DRAFT v1.pptx
+++ b/_implementation-notes/evening-series/FotH Evening Session 2 Slides DRAFT v1.pptx
@@ -1816,38 +1816,37 @@
           <a:lstStyle/>
           <a:p>
             <a:r>
-              <a:rPr lang="en-US" sz="1200"/>
               <a:t>S2 · 8:28–8:30 · LEAD: CONTAINER HOLDER</a:t>
             </a:r>
           </a:p>
           <a:p>
             <a:r>
-              <a:rPr lang="en-US" sz="1200"/>
               <a:t>BEATS:</a:t>
             </a:r>
           </a:p>
           <a:p>
             <a:r>
-              <a:rPr lang="en-US" sz="1200"/>
               <a:t>1. Abbreviated six-step close: one-word landing, one thing I'm taking, one practice (the three soil journals).</a:t>
             </a:r>
           </a:p>
           <a:p>
             <a:r>
-              <a:rPr lang="en-US" sz="1200"/>
               <a:t>2. Aaronic blessing parent-to-teen, teen-to-parent — the cohort knows the form now.</a:t>
             </a:r>
           </a:p>
           <a:p>
             <a:r>
-              <a:rPr lang="en-US" sz="1200"/>
               <a:t>3. Brief closing prayer naming, without details, what surfaced: 'Father, You saw the rocks and the thorns we named today.'</a:t>
             </a:r>
           </a:p>
           <a:p>
             <a:r>
-              <a:rPr lang="en-US" sz="1200"/>
               <a:t>GUARD: If the merge ran heavy, give the prayer 60–90 seconds; do not lighten the room.</a:t>
+            </a:r>
+          </a:p>
+          <a:p>
+            <a:r>
+              <a:t>BLESSINGS: eyes on the person, not the screen — nothing to read; say what is on your heart for them, specific and short.</a:t>
             </a:r>
           </a:p>
         </p:txBody>
@@ -7042,7 +7041,7 @@
                 </a:solidFill>
                 <a:latin typeface="Calibri"/>
               </a:rPr>
-              <a:t>Blessings — specific, witnessed, short</a:t>
+              <a:t>Blessings — eyes on the person, not the screen: say what is on your heart for them. Specific, witnessed, short</a:t>
             </a:r>
           </a:p>
           <a:p>

--- a/_implementation-notes/evening-series/FotH Evening Session 2 Slides DRAFT v1.pptx
+++ b/_implementation-notes/evening-series/FotH Evening Session 2 Slides DRAFT v1.pptx
@@ -786,7 +786,7 @@
           <a:lstStyle/>
           <a:p>
             <a:r>
-              <a:t>S2 · WELCOME · LEAD: CONTAINER HOLDER · GROUNDING — every session opens on this map</a:t>
+              <a:t>E2 · WELCOME · LEAD: CONTAINER HOLDER · GROUNDING — every session opens on this map</a:t>
             </a:r>
           </a:p>
           <a:p>
@@ -796,7 +796,7 @@
           </a:p>
           <a:p>
             <a:r>
-              <a:t>1. Locate tonight on the map, plainly: Session 2 stands in the first box — Connect with Self. Each connection makes the next one real (Matt. 22:37–40).</a:t>
+              <a:t>1. Locate tonight on the map, plainly: Evening 2 stands in the first box — Connect with Self. Each connection makes the next one real (Matt. 22:37–40).</a:t>
             </a:r>
           </a:p>
           <a:p>
@@ -857,7 +857,7 @@
           <a:lstStyle/>
           <a:p>
             <a:r>
-              <a:t>S2 · COMMISSIONING · LEAD: CONTENT PRESENTER</a:t>
+              <a:t>E2 · COMMISSIONING · LEAD: CONTENT PRESENTER</a:t>
             </a:r>
           </a:p>
           <a:p>
@@ -928,7 +928,7 @@
           <a:lstStyle/>
           <a:p>
             <a:r>
-              <a:t>S2 · COMMISSIONING · LEAD: CONTENT PRESENTER</a:t>
+              <a:t>E2 · COMMISSIONING · LEAD: CONTENT PRESENTER</a:t>
             </a:r>
           </a:p>
           <a:p>
@@ -994,13 +994,11 @@
           <a:lstStyle/>
           <a:p>
             <a:r>
-              <a:rPr lang="en-US" sz="1200"/>
-              <a:t>S2 · pre-session · DIVIDER</a:t>
-            </a:r>
-          </a:p>
-          <a:p>
-            <a:r>
-              <a:rPr lang="en-US" sz="1200"/>
+              <a:t>E2 · pre-session · DIVIDER</a:t>
+            </a:r>
+          </a:p>
+          <a:p>
+            <a:r>
               <a:t>On screen through dinner and as the circle forms. Greet at the door — the slide holds the room.</a:t>
             </a:r>
           </a:p>
@@ -1047,37 +1045,31 @@
           <a:lstStyle/>
           <a:p>
             <a:r>
-              <a:rPr lang="en-US" sz="1200"/>
-              <a:t>S2 · 7:00–8:30 · LEAD: BOTH LEADERS</a:t>
-            </a:r>
-          </a:p>
-          <a:p>
-            <a:r>
-              <a:rPr lang="en-US" sz="1200"/>
+              <a:t>E2 · 7:00–8:30 · LEAD: BOTH LEADERS</a:t>
+            </a:r>
+          </a:p>
+          <a:p>
+            <a:r>
               <a:t>BEATS:</a:t>
             </a:r>
           </a:p>
           <a:p>
             <a:r>
-              <a:rPr lang="en-US" sz="1200"/>
               <a:t>1. Shape: full eight-step open, practice check-in, Mark 4 teaching, first move into FAMILY PAIRS for the Heart Soil diagnostic, merge, practice, close.</a:t>
             </a:r>
           </a:p>
           <a:p>
             <a:r>
-              <a:rPr lang="en-US" sz="1200"/>
               <a:t>2. First pair night — frame it confidently: your family stays together, a parent goes first every time, you choose your own depth.</a:t>
             </a:r>
           </a:p>
           <a:p>
             <a:r>
-              <a:rPr lang="en-US" sz="1200"/>
               <a:t>3. If the room is about ten or fewer, skip the pairs entirely — one circle all night.</a:t>
             </a:r>
           </a:p>
           <a:p>
             <a:r>
-              <a:rPr lang="en-US" sz="1200"/>
               <a:t>CUES: pair spaces set before doors open; every Lead Companion has done the diagnostic on themselves; the opening parent for each pair is arranged in advance.</a:t>
             </a:r>
           </a:p>
@@ -1124,7 +1116,7 @@
           <a:lstStyle/>
           <a:p>
             <a:r>
-              <a:t>S2 · 7:00–7:08 · LEAD: CONTAINER HOLDER</a:t>
+              <a:t>E2 · 7:00–7:08 · LEAD: CONTAINER HOLDER</a:t>
             </a:r>
           </a:p>
           <a:p>
@@ -1139,7 +1131,7 @@
           </a:p>
           <a:p>
             <a:r>
-              <a:t>2. Four conditions: name them once; nods or a quiet yes are enough. Re-teach only if Week 1 felt unsafe.</a:t>
+              <a:t>2. Four conditions: name them once; nods or a quiet yes are enough. Re-teach only if Evening 1 felt unsafe.</a:t>
             </a:r>
           </a:p>
           <a:p>
@@ -1200,37 +1192,31 @@
           <a:lstStyle/>
           <a:p>
             <a:r>
-              <a:rPr lang="en-US" sz="1200"/>
-              <a:t>S2 · 7:08–7:25 · LEAD: CONTAINER HOLDER</a:t>
-            </a:r>
-          </a:p>
-          <a:p>
-            <a:r>
-              <a:rPr lang="en-US" sz="1200"/>
+              <a:t>E2 · 7:08–7:25 · LEAD: CONTAINER HOLDER</a:t>
+            </a:r>
+          </a:p>
+          <a:p>
+            <a:r>
               <a:t>BEATS:</a:t>
             </a:r>
           </a:p>
           <a:p>
             <a:r>
-              <a:rPr lang="en-US" sz="1200"/>
               <a:t>1. Parent Co-Companion leads and models first with one true sentence ('I checked my phone before the question most days').</a:t>
             </a:r>
           </a:p>
           <a:p>
             <a:r>
-              <a:rPr lang="en-US" sz="1200"/>
               <a:t>2. One quick sentence each around the circle — what I noticed, or what I noticed about the practice. Honor passes without ceremony.</a:t>
             </a:r>
           </a:p>
           <a:p>
             <a:r>
-              <a:rPr lang="en-US" sz="1200"/>
               <a:t>3. Teach the anchor once, thirty seconds: Joshua 4 — twelve stones from the Jordan. Every week this check-in adds a stone.</a:t>
             </a:r>
           </a:p>
           <a:p>
             <a:r>
-              <a:rPr lang="en-US" sz="1200"/>
               <a:t>GUARD: No grading, no lecture on consistency. 'I didn't do it' gets 'Thanks for the honesty. Pick it back up tomorrow.'</a:t>
             </a:r>
           </a:p>
@@ -1277,37 +1263,31 @@
           <a:lstStyle/>
           <a:p>
             <a:r>
-              <a:rPr lang="en-US" sz="1200"/>
-              <a:t>S2 · 7:25–7:39 · LEAD: CONTENT PRESENTER</a:t>
-            </a:r>
-          </a:p>
-          <a:p>
-            <a:r>
-              <a:rPr lang="en-US" sz="1200"/>
+              <a:t>E2 · 7:25–7:39 · LEAD: CONTENT PRESENTER</a:t>
+            </a:r>
+          </a:p>
+          <a:p>
+            <a:r>
               <a:t>BEATS:</a:t>
             </a:r>
           </a:p>
           <a:p>
             <a:r>
-              <a:rPr lang="en-US" sz="1200"/>
               <a:t>1. Read Mark 4:1–20 in full from the physical Bible — slowly, all 20 verses, no stopping to comment.</a:t>
             </a:r>
           </a:p>
           <a:p>
             <a:r>
-              <a:rPr lang="en-US" sz="1200"/>
               <a:t>2. Recall the seed, 60 seconds: 'the sower sows the word' — today is about the ground it lands on, yours and mine.</a:t>
             </a:r>
           </a:p>
           <a:p>
             <a:r>
-              <a:rPr lang="en-US" sz="1200"/>
               <a:t>3. Walk the four soils in six minutes max: path (hard, taken), rocky (fast, rootless), thorny (choked, fruitless), good (hears, accepts, produces — fruit, not perfection).</a:t>
             </a:r>
           </a:p>
           <a:p>
             <a:r>
-              <a:rPr lang="en-US" sz="1200"/>
               <a:t>GUARD: At path soil, name the enemy plainly — no dramatizing, no denying. Save the back of the block for Paul.</a:t>
             </a:r>
           </a:p>
@@ -1354,37 +1334,31 @@
           <a:lstStyle/>
           <a:p>
             <a:r>
-              <a:rPr lang="en-US" sz="1200"/>
-              <a:t>S2 · 7:25–7:39 · LEAD: CONTENT PRESENTER</a:t>
-            </a:r>
-          </a:p>
-          <a:p>
-            <a:r>
-              <a:rPr lang="en-US" sz="1200"/>
+              <a:t>E2 · 7:25–7:39 · LEAD: CONTENT PRESENTER</a:t>
+            </a:r>
+          </a:p>
+          <a:p>
+            <a:r>
               <a:t>BEATS:</a:t>
             </a:r>
           </a:p>
           <a:p>
             <a:r>
-              <a:rPr lang="en-US" sz="1200"/>
               <a:t>1. Paul's mixed ground, 3 min: read Romans 7:15, 18–19 — an apostle with all four soils at once.</a:t>
             </a:r>
           </a:p>
           <a:p>
             <a:r>
-              <a:rPr lang="en-US" sz="1200"/>
               <a:t>2. Land where Paul lands, 7:24–25: rescue, not despair. Finding rocks and thorns is apostolic company.</a:t>
             </a:r>
           </a:p>
           <a:p>
             <a:r>
-              <a:rPr lang="en-US" sz="1200"/>
               <a:t>3. Pivot: the wrong question is 'which soil are you?' — the right one is 'where does each show up, specifically, this week?'</a:t>
             </a:r>
           </a:p>
           <a:p>
             <a:r>
-              <a:rPr lang="en-US" sz="1200"/>
               <a:t>CUES: Bridge before the 7:40 move: restate the container for the pairs — what your family says today is a gift, not ammunition; it does not come up in the car. Wait for nods from each family before anyone moves.</a:t>
             </a:r>
           </a:p>
@@ -1431,37 +1405,31 @@
           <a:lstStyle/>
           <a:p>
             <a:r>
-              <a:rPr lang="en-US" sz="1200"/>
-              <a:t>S2 · 7:40–8:10 · LEAD: CONTENT PRESENTER · PAIRS</a:t>
-            </a:r>
-          </a:p>
-          <a:p>
-            <a:r>
-              <a:rPr lang="en-US" sz="1200"/>
+              <a:t>E2 · 7:40–8:10 · LEAD: CONTENT PRESENTER · PAIRS</a:t>
+            </a:r>
+          </a:p>
+          <a:p>
+            <a:r>
               <a:t>BEATS:</a:t>
             </a:r>
           </a:p>
           <a:p>
             <a:r>
-              <a:rPr lang="en-US" sz="1200"/>
               <a:t>1. First three minutes of pair time. Journals open to the Question Zero page; scripture asks it — 2 Corinthians 13:5.</a:t>
             </a:r>
           </a:p>
           <a:p>
             <a:r>
-              <a:rPr lang="en-US" sz="1200"/>
               <a:t>2. Read it once: has the seed itself ever gone into your ground — your yes, not your family's? Write yes, no, or not sure. The road is short; the thief walked it in one sentence.</a:t>
             </a:r>
           </a:p>
           <a:p>
             <a:r>
-              <a:rPr lang="en-US" sz="1200"/>
               <a:t>3. Three quiet minutes. Do not walk the circle; do not glance at pages.</a:t>
             </a:r>
           </a:p>
           <a:p>
             <a:r>
-              <a:rPr lang="en-US" sz="1200"/>
               <a:t>GUARD: Question zero is PRIVATE and journal-only — never shared, never referenced again, today or ever. No 'anyone want to say anything about the first one.' The quiet seeker who finds a Companion afterward is the year's best outcome, not a crisis.</a:t>
             </a:r>
           </a:p>
@@ -1508,43 +1476,36 @@
           <a:lstStyle/>
           <a:p>
             <a:r>
-              <a:rPr lang="en-US" sz="1200"/>
-              <a:t>S2 · 7:40–8:10 · LEAD: CONTENT PRESENTER · PAIRS</a:t>
-            </a:r>
-          </a:p>
-          <a:p>
-            <a:r>
-              <a:rPr lang="en-US" sz="1200"/>
+              <a:t>E2 · 7:40–8:10 · LEAD: CONTENT PRESENTER · PAIRS</a:t>
+            </a:r>
+          </a:p>
+          <a:p>
+            <a:r>
               <a:t>BEATS:</a:t>
             </a:r>
           </a:p>
           <a:p>
             <a:r>
-              <a:rPr lang="en-US" sz="1200"/>
               <a:t>1. Four questions, one at a time: path, rocky, thorny, good. About two minutes journaling each, then share around — 'I'd rather not share that one' is a complete answer.</a:t>
             </a:r>
           </a:p>
           <a:p>
             <a:r>
-              <a:rPr lang="en-US" sz="1200"/>
               <a:t>2. Push for one specific incident, not a category — 'my phone' becomes one moment this week.</a:t>
             </a:r>
           </a:p>
           <a:p>
             <a:r>
-              <a:rPr lang="en-US" sz="1200"/>
               <a:t>3. Nobody fixes anybody across the family line: 'Just receive it. We're noticing today, not fixing.'</a:t>
             </a:r>
           </a:p>
           <a:p>
             <a:r>
-              <a:rPr lang="en-US" sz="1200"/>
               <a:t>CUES: The arranged parent opens the first round — never a cold call, never on a teen. Watch the clock privately: question zero plus four questions in 28 minutes. Ten or fewer today — run it as one whole circle.</a:t>
             </a:r>
           </a:p>
           <a:p>
             <a:r>
-              <a:rPr lang="en-US" sz="1200"/>
               <a:t>GUARD: Heavy material ('rocky is when we fight at home') — acknowledge, hold, move on; follow up per Handbook Section 6. Watch a teen's face while their parent shares.</a:t>
             </a:r>
           </a:p>
@@ -1591,37 +1552,31 @@
           <a:lstStyle/>
           <a:p>
             <a:r>
-              <a:rPr lang="en-US" sz="1200"/>
-              <a:t>S2 · 8:11–8:20 · LEAD: CONTAINER HOLDER</a:t>
-            </a:r>
-          </a:p>
-          <a:p>
-            <a:r>
-              <a:rPr lang="en-US" sz="1200"/>
+              <a:t>E2 · 8:11–8:20 · LEAD: CONTAINER HOLDER</a:t>
+            </a:r>
+          </a:p>
+          <a:p>
+            <a:r>
               <a:t>BEATS:</a:t>
             </a:r>
           </a:p>
           <a:p>
             <a:r>
-              <a:rPr lang="en-US" sz="1200"/>
               <a:t>1. Re-merge starts at 8:10 — one minute to move; let the circle settle.</a:t>
             </a:r>
           </a:p>
           <a:p>
             <a:r>
-              <a:rPr lang="en-US" sz="1200"/>
               <a:t>2. One word each on what today surfaced — 'thorny', 'seen', 'tired'. Hold each word a beat.</a:t>
             </a:r>
           </a:p>
           <a:p>
             <a:r>
-              <a:rPr lang="en-US" sz="1200"/>
               <a:t>3. Re-read Mark 4:20 slowly; land it: good soil is not soil without rocks — it hears, accepts, produces. The noticing IS what good soil does.</a:t>
             </a:r>
           </a:p>
           <a:p>
             <a:r>
-              <a:rPr lang="en-US" sz="1200"/>
               <a:t>GUARD: No specifics from the pairs — the diagnostic stays in the pair; the merge is for landing, not repeating.</a:t>
             </a:r>
           </a:p>
@@ -1668,31 +1623,26 @@
           <a:lstStyle/>
           <a:p>
             <a:r>
-              <a:rPr lang="en-US" sz="1200" dirty="0"/>
-              <a:t>S2 · 8:20–8:24 · LEAD: CONTENT PRESENTER</a:t>
-            </a:r>
-          </a:p>
-          <a:p>
-            <a:r>
-              <a:rPr lang="en-US" sz="1200" dirty="0"/>
+              <a:t>E2 · 8:20–8:24 · LEAD: CONTENT PRESENTER</a:t>
+            </a:r>
+          </a:p>
+          <a:p>
+            <a:r>
               <a:t>BEATS:</a:t>
             </a:r>
           </a:p>
           <a:p>
             <a:r>
-              <a:rPr lang="en-US" sz="1200" dirty="0"/>
               <a:t>1. Parent Co-Companion leads. Three times this week — not daily — five minutes: one sentence per soil, where did each show up today? Specific, not general.</a:t>
             </a:r>
           </a:p>
           <a:p>
             <a:r>
-              <a:rPr lang="en-US" sz="1200" dirty="0"/>
               <a:t>2. Rule stands: no fixing. The Spirit fixes; our job is to pay attention.</a:t>
             </a:r>
           </a:p>
           <a:p>
             <a:r>
-              <a:rPr lang="en-US" sz="1200" dirty="0"/>
               <a:t>3. Keep last week's morning question going — the two practices stack.</a:t>
             </a:r>
           </a:p>
@@ -1739,37 +1689,31 @@
           <a:lstStyle/>
           <a:p>
             <a:r>
-              <a:rPr lang="en-US" sz="1200"/>
-              <a:t>S2 · 8:24–8:28 · LEAD: BOTH LEADERS</a:t>
-            </a:r>
-          </a:p>
-          <a:p>
-            <a:r>
-              <a:rPr lang="en-US" sz="1200"/>
+              <a:t>E2 · 8:24–8:28 · LEAD: BOTH LEADERS</a:t>
+            </a:r>
+          </a:p>
+          <a:p>
+            <a:r>
               <a:t>BEATS:</a:t>
             </a:r>
           </a:p>
           <a:p>
             <a:r>
-              <a:rPr lang="en-US" sz="1200"/>
               <a:t>1. Your three things first: what went well; what I'd do differently; what I'd tell someone teaching today's process.</a:t>
             </a:r>
           </a:p>
           <a:p>
             <a:r>
-              <a:rPr lang="en-US" sz="1200"/>
               <a:t>2. Room's two questions; two or three voices is plenty.</a:t>
             </a:r>
           </a:p>
           <a:p>
             <a:r>
-              <a:rPr lang="en-US" sz="1200"/>
               <a:t>3. Receive without defending — 'thank you' is the whole response.</a:t>
             </a:r>
           </a:p>
           <a:p>
             <a:r>
-              <a:rPr lang="en-US" sz="1200"/>
               <a:t>CUES: May be dropped if the room's energy needs something else; dropping it twice running goes to the team debrief.</a:t>
             </a:r>
           </a:p>
@@ -1816,7 +1760,7 @@
           <a:lstStyle/>
           <a:p>
             <a:r>
-              <a:t>S2 · 8:28–8:30 · LEAD: CONTAINER HOLDER</a:t>
+              <a:t>E2 · 8:28–8:30 · LEAD: CONTAINER HOLDER</a:t>
             </a:r>
           </a:p>
           <a:p>
@@ -7331,7 +7275,7 @@
                 </a:solidFill>
                 <a:latin typeface="Calibri"/>
               </a:rPr>
-              <a:t>SESSION 2</a:t>
+              <a:t>EVENING 2</a:t>
             </a:r>
           </a:p>
           <a:p>
@@ -7565,7 +7509,7 @@
                 </a:solidFill>
                 <a:latin typeface="Calibri"/>
               </a:rPr>
-              <a:t>Session 2 stands in the first box — </a:t>
+              <a:t>Evening 2 stands in the first box — </a:t>
             </a:r>
             <a:r>
               <a:rPr sz="1800" b="1">
@@ -7749,7 +7693,7 @@
                 </a:solidFill>
                 <a:latin typeface="Cambria"/>
               </a:rPr>
-              <a:t>Session 2 — Tonight’s Road</a:t>
+              <a:t>Evening 2 — Tonight’s Road</a:t>
             </a:r>
           </a:p>
         </p:txBody>
@@ -7822,7 +7766,7 @@
                 </a:solidFill>
                 <a:latin typeface="Calibri"/>
               </a:rPr>
-              <a:t>Check-in on Week 1 practice</a:t>
+              <a:t>Check-in on Evening 1 practice</a:t>
             </a:r>
           </a:p>
           <a:p>
@@ -8481,7 +8425,7 @@
                 </a:solidFill>
                 <a:latin typeface="Cambria"/>
               </a:rPr>
-              <a:t>Check-In on Week 1 Practice</a:t>
+              <a:t>Check-In on Evening 1 Practice</a:t>
             </a:r>
           </a:p>
         </p:txBody>

--- a/_implementation-notes/evening-series/FotH Evening Session 2 Slides DRAFT v1.pptx
+++ b/_implementation-notes/evening-series/FotH Evening Session 2 Slides DRAFT v1.pptx
@@ -9453,7 +9453,7 @@
                 </a:solidFill>
                 <a:latin typeface="Calibri"/>
               </a:rPr>
-              <a:t>If it’s no, or not sure — the road is short. The thief walked it in one sentence. Any Companion, any Wednesday, quietly — or start with your parent, tonight, in the car.</a:t>
+              <a:t>If it’s no, or not sure — the road is short. The thief walked it in one sentence. Any Companion, any evening, quietly — or start with your parent, tonight, in the car.</a:t>
             </a:r>
           </a:p>
         </p:txBody>
